--- a/data/courses/FBE_2026/slides/FBE_2026_03_Block3_Intraspecific_Trait_Variability.pptx
+++ b/data/courses/FBE_2026/slides/FBE_2026_03_Block3_Intraspecific_Trait_Variability.pptx
@@ -4,6 +4,9 @@
   <p:sldMasterIdLst>
     <p:sldMasterId id="2147483648" r:id="rId1"/>
   </p:sldMasterIdLst>
+  <p:notesMasterIdLst>
+    <p:notesMasterId r:id="rId14"/>
+  </p:notesMasterIdLst>
   <p:sldIdLst>
     <p:sldId id="256" r:id="rId2"/>
     <p:sldId id="257" r:id="rId3"/>
@@ -18,9 +21,6 @@
     <p:sldId id="266" r:id="rId12"/>
     <p:sldId id="267" r:id="rId13"/>
   </p:sldIdLst>
-  <p:notesMasterIdLst>
-    <p:notesMasterId r:id="rId14"/>
-  </p:notesMasterIdLst>
   <p:sldSz cx="12192000" cy="6858000"/>
   <p:notesSz cx="6858000" cy="12192000"/>
   <p:defaultTextStyle>
@@ -115,13 +115,20 @@
       </a:defRPr>
     </a:lvl9pPr>
   </p:defaultTextStyle>
+  <p:extLst>
+    <p:ext uri="{EFAFB233-063F-42B5-8137-9DF3F51BA10A}">
+      <p15:sldGuideLst xmlns:p15="http://schemas.microsoft.com/office/powerpoint/2012/main"/>
+    </p:ext>
+  </p:extLst>
 </p:presentation>
 </file>
 
 <file path=ppt/charts/chart1.xml><?xml version="1.0" encoding="utf-8"?>
-<c:chartSpace xmlns:c="http://schemas.openxmlformats.org/drawingml/2006/chart" xmlns:a="http://schemas.openxmlformats.org/drawingml/2006/main" xmlns:r="http://schemas.openxmlformats.org/officeDocument/2006/relationships">
+<c:chartSpace xmlns:c="http://schemas.openxmlformats.org/drawingml/2006/chart" xmlns:a="http://schemas.openxmlformats.org/drawingml/2006/main" xmlns:r="http://schemas.openxmlformats.org/officeDocument/2006/relationships" xmlns:c16r2="http://schemas.microsoft.com/office/drawing/2015/06/chart">
   <c:date1904 val="0"/>
+  <c:lang val="fr-FR"/>
   <c:roundedCorners val="1"/>
+  <c:style val="2"/>
   <c:chart>
     <c:title>
       <c:tx>
@@ -138,7 +145,7 @@
               </a:defRPr>
             </a:pPr>
             <a:r>
-              <a:rPr sz="1200" b="0" i="0" u="none" strike="noStrike">
+              <a:rPr lang="fr-FR" sz="1200" b="0" i="0" u="none" strike="noStrike">
                 <a:solidFill>
                   <a:srgbClr val="0B3C5D"/>
                 </a:solidFill>
@@ -149,13 +156,13 @@
           </a:p>
         </c:rich>
       </c:tx>
-      <c:layout/>
       <c:overlay val="0"/>
     </c:title>
     <c:autoTitleDeleted val="0"/>
     <c:plotArea>
       <c:layout/>
       <c:lineChart>
+        <c:grouping val="standard"/>
         <c:varyColors val="0"/>
         <c:ser>
           <c:idx val="0"/>
@@ -172,9 +179,6 @@
             </c:strRef>
           </c:tx>
           <c:spPr>
-            <a:solidFill>
-              <a:srgbClr val="1D6F9E"/>
-            </a:solidFill>
             <a:ln w="31750" cap="flat">
               <a:solidFill>
                 <a:srgbClr val="1D6F9E"/>
@@ -184,180 +188,139 @@
             </a:ln>
             <a:effectLst/>
           </c:spPr>
-          <c:invertIfNegative val="0"/>
-          <c:dLbls>
-            <c:numFmt formatCode="#,##0" sourceLinked="0"/>
-            <c:txPr>
-              <a:bodyPr/>
-              <a:lstStyle/>
-              <a:p>
-                <a:pPr>
-                  <a:defRPr b="0" i="0" strike="noStrike" sz="1200" u="none">
-                    <a:solidFill>
-                      <a:srgbClr val="000000"/>
-                    </a:solidFill>
-                    <a:latin typeface="Arial"/>
-                  </a:defRPr>
-                </a:pPr>
-              </a:p>
-            </c:txPr>
-            <c:showLegendKey val="0"/>
-            <c:showVal val="0"/>
-            <c:showCatName val="0"/>
-            <c:showSerName val="0"/>
-            <c:showPercent val="0"/>
-            <c:showBubbleSize val="0"/>
-            <c:showLeaderLines val="0"/>
-          </c:dLbls>
           <c:marker>
             <c:symbol val="none"/>
-            <c:size val="6"/>
-            <c:spPr>
-              <a:solidFill>
-                <a:srgbClr val="1D6F9E"/>
-              </a:solidFill>
-              <a:ln w="9525" cap="flat">
-                <a:solidFill>
-                  <a:srgbClr val="1D6F9E"/>
-                </a:solidFill>
-                <a:prstDash val="solid"/>
-                <a:round/>
-              </a:ln>
-              <a:effectLst/>
-            </c:spPr>
           </c:marker>
           <c:cat>
-            <c:multiLvlStrRef>
+            <c:strRef>
               <c:f>Sheet1!$A$2:$A$42</c:f>
-              <c:multiLvlStrCache>
+              <c:strCache>
                 <c:ptCount val="41"/>
-                <c:lvl>
-                  <c:pt idx="0">
-                    <c:v>0</c:v>
-                  </c:pt>
-                  <c:pt idx="1">
-                    <c:v>1</c:v>
-                  </c:pt>
-                  <c:pt idx="2">
-                    <c:v>2</c:v>
-                  </c:pt>
-                  <c:pt idx="3">
-                    <c:v>3</c:v>
-                  </c:pt>
-                  <c:pt idx="4">
-                    <c:v>4</c:v>
-                  </c:pt>
-                  <c:pt idx="5">
-                    <c:v>5</c:v>
-                  </c:pt>
-                  <c:pt idx="6">
-                    <c:v>6</c:v>
-                  </c:pt>
-                  <c:pt idx="7">
-                    <c:v>7</c:v>
-                  </c:pt>
-                  <c:pt idx="8">
-                    <c:v>8</c:v>
-                  </c:pt>
-                  <c:pt idx="9">
-                    <c:v>9</c:v>
-                  </c:pt>
-                  <c:pt idx="10">
-                    <c:v>10</c:v>
-                  </c:pt>
-                  <c:pt idx="11">
-                    <c:v>11</c:v>
-                  </c:pt>
-                  <c:pt idx="12">
-                    <c:v>12</c:v>
-                  </c:pt>
-                  <c:pt idx="13">
-                    <c:v>13</c:v>
-                  </c:pt>
-                  <c:pt idx="14">
-                    <c:v>14</c:v>
-                  </c:pt>
-                  <c:pt idx="15">
-                    <c:v>15</c:v>
-                  </c:pt>
-                  <c:pt idx="16">
-                    <c:v>16</c:v>
-                  </c:pt>
-                  <c:pt idx="17">
-                    <c:v>17</c:v>
-                  </c:pt>
-                  <c:pt idx="18">
-                    <c:v>18</c:v>
-                  </c:pt>
-                  <c:pt idx="19">
-                    <c:v>19</c:v>
-                  </c:pt>
-                  <c:pt idx="20">
-                    <c:v>20</c:v>
-                  </c:pt>
-                  <c:pt idx="21">
-                    <c:v>21</c:v>
-                  </c:pt>
-                  <c:pt idx="22">
-                    <c:v>22</c:v>
-                  </c:pt>
-                  <c:pt idx="23">
-                    <c:v>23</c:v>
-                  </c:pt>
-                  <c:pt idx="24">
-                    <c:v>24</c:v>
-                  </c:pt>
-                  <c:pt idx="25">
-                    <c:v>25</c:v>
-                  </c:pt>
-                  <c:pt idx="26">
-                    <c:v>26</c:v>
-                  </c:pt>
-                  <c:pt idx="27">
-                    <c:v>27</c:v>
-                  </c:pt>
-                  <c:pt idx="28">
-                    <c:v>28</c:v>
-                  </c:pt>
-                  <c:pt idx="29">
-                    <c:v>29</c:v>
-                  </c:pt>
-                  <c:pt idx="30">
-                    <c:v>30</c:v>
-                  </c:pt>
-                  <c:pt idx="31">
-                    <c:v>31</c:v>
-                  </c:pt>
-                  <c:pt idx="32">
-                    <c:v>32</c:v>
-                  </c:pt>
-                  <c:pt idx="33">
-                    <c:v>33</c:v>
-                  </c:pt>
-                  <c:pt idx="34">
-                    <c:v>34</c:v>
-                  </c:pt>
-                  <c:pt idx="35">
-                    <c:v>35</c:v>
-                  </c:pt>
-                  <c:pt idx="36">
-                    <c:v>36</c:v>
-                  </c:pt>
-                  <c:pt idx="37">
-                    <c:v>37</c:v>
-                  </c:pt>
-                  <c:pt idx="38">
-                    <c:v>38</c:v>
-                  </c:pt>
-                  <c:pt idx="39">
-                    <c:v>39</c:v>
-                  </c:pt>
-                  <c:pt idx="40">
-                    <c:v>40</c:v>
-                  </c:pt>
-                </c:lvl>
-              </c:multiLvlStrCache>
-            </c:multiLvlStrRef>
+                <c:pt idx="0">
+                  <c:v>0</c:v>
+                </c:pt>
+                <c:pt idx="1">
+                  <c:v>1</c:v>
+                </c:pt>
+                <c:pt idx="2">
+                  <c:v>2</c:v>
+                </c:pt>
+                <c:pt idx="3">
+                  <c:v>3</c:v>
+                </c:pt>
+                <c:pt idx="4">
+                  <c:v>4</c:v>
+                </c:pt>
+                <c:pt idx="5">
+                  <c:v>5</c:v>
+                </c:pt>
+                <c:pt idx="6">
+                  <c:v>6</c:v>
+                </c:pt>
+                <c:pt idx="7">
+                  <c:v>7</c:v>
+                </c:pt>
+                <c:pt idx="8">
+                  <c:v>8</c:v>
+                </c:pt>
+                <c:pt idx="9">
+                  <c:v>9</c:v>
+                </c:pt>
+                <c:pt idx="10">
+                  <c:v>10</c:v>
+                </c:pt>
+                <c:pt idx="11">
+                  <c:v>11</c:v>
+                </c:pt>
+                <c:pt idx="12">
+                  <c:v>12</c:v>
+                </c:pt>
+                <c:pt idx="13">
+                  <c:v>13</c:v>
+                </c:pt>
+                <c:pt idx="14">
+                  <c:v>14</c:v>
+                </c:pt>
+                <c:pt idx="15">
+                  <c:v>15</c:v>
+                </c:pt>
+                <c:pt idx="16">
+                  <c:v>16</c:v>
+                </c:pt>
+                <c:pt idx="17">
+                  <c:v>17</c:v>
+                </c:pt>
+                <c:pt idx="18">
+                  <c:v>18</c:v>
+                </c:pt>
+                <c:pt idx="19">
+                  <c:v>19</c:v>
+                </c:pt>
+                <c:pt idx="20">
+                  <c:v>20</c:v>
+                </c:pt>
+                <c:pt idx="21">
+                  <c:v>21</c:v>
+                </c:pt>
+                <c:pt idx="22">
+                  <c:v>22</c:v>
+                </c:pt>
+                <c:pt idx="23">
+                  <c:v>23</c:v>
+                </c:pt>
+                <c:pt idx="24">
+                  <c:v>24</c:v>
+                </c:pt>
+                <c:pt idx="25">
+                  <c:v>25</c:v>
+                </c:pt>
+                <c:pt idx="26">
+                  <c:v>26</c:v>
+                </c:pt>
+                <c:pt idx="27">
+                  <c:v>27</c:v>
+                </c:pt>
+                <c:pt idx="28">
+                  <c:v>28</c:v>
+                </c:pt>
+                <c:pt idx="29">
+                  <c:v>29</c:v>
+                </c:pt>
+                <c:pt idx="30">
+                  <c:v>30</c:v>
+                </c:pt>
+                <c:pt idx="31">
+                  <c:v>31</c:v>
+                </c:pt>
+                <c:pt idx="32">
+                  <c:v>32</c:v>
+                </c:pt>
+                <c:pt idx="33">
+                  <c:v>33</c:v>
+                </c:pt>
+                <c:pt idx="34">
+                  <c:v>34</c:v>
+                </c:pt>
+                <c:pt idx="35">
+                  <c:v>35</c:v>
+                </c:pt>
+                <c:pt idx="36">
+                  <c:v>36</c:v>
+                </c:pt>
+                <c:pt idx="37">
+                  <c:v>37</c:v>
+                </c:pt>
+                <c:pt idx="38">
+                  <c:v>38</c:v>
+                </c:pt>
+                <c:pt idx="39">
+                  <c:v>39</c:v>
+                </c:pt>
+                <c:pt idx="40">
+                  <c:v>40</c:v>
+                </c:pt>
+              </c:strCache>
+            </c:strRef>
           </c:cat>
           <c:val>
             <c:numRef>
@@ -366,34 +329,34 @@
                 <c:formatCode>General</c:formatCode>
                 <c:ptCount val="41"/>
                 <c:pt idx="0">
-                  <c:v>0.0038659201394728076</c:v>
+                  <c:v>3.8659201394728076E-3</c:v>
                 </c:pt>
                 <c:pt idx="1">
-                  <c:v>0.006645011282741399</c:v>
+                  <c:v>6.645011282741399E-3</c:v>
                 </c:pt>
                 <c:pt idx="2">
-                  <c:v>0.011108996538242306</c:v>
+                  <c:v>1.1108996538242306E-2</c:v>
                 </c:pt>
                 <c:pt idx="3">
-                  <c:v>0.018063013419781275</c:v>
+                  <c:v>1.8063013419781275E-2</c:v>
                 </c:pt>
                 <c:pt idx="4">
-                  <c:v>0.028565500784550377</c:v>
+                  <c:v>2.8565500784550377E-2</c:v>
                 </c:pt>
                 <c:pt idx="5">
-                  <c:v>0.04393693362340742</c:v>
+                  <c:v>4.393693362340742E-2</c:v>
                 </c:pt>
                 <c:pt idx="6">
-                  <c:v>0.06572852861653047</c:v>
+                  <c:v>6.5728528616530474E-2</c:v>
                 </c:pt>
                 <c:pt idx="7">
-                  <c:v>0.0956344448325386</c:v>
+                  <c:v>9.5634444832538607E-2</c:v>
                 </c:pt>
                 <c:pt idx="8">
                   <c:v>0.1353352832366127</c:v>
                 </c:pt>
                 <c:pt idx="9">
-                  <c:v>0.1862704636977009</c:v>
+                  <c:v>0.18627046369770089</c:v>
                 </c:pt>
                 <c:pt idx="10">
                   <c:v>0.24935220877729622</c:v>
@@ -405,49 +368,49 @@
                   <c:v>0.41111229050718745</c:v>
                 </c:pt>
                 <c:pt idx="13">
-                  <c:v>0.5063356166481006</c:v>
+                  <c:v>0.50633561664810056</c:v>
                 </c:pt>
                 <c:pt idx="14">
-                  <c:v>0.6065306597126334</c:v>
+                  <c:v>0.60653065971263342</c:v>
                 </c:pt>
                 <c:pt idx="15">
-                  <c:v>0.7066482778577163</c:v>
+                  <c:v>0.70664827785771633</c:v>
                 </c:pt>
                 <c:pt idx="16">
-                  <c:v>0.8007374029168081</c:v>
+                  <c:v>0.80073740291680806</c:v>
                 </c:pt>
                 <c:pt idx="17">
-                  <c:v>0.8824969025845955</c:v>
+                  <c:v>0.88249690258459546</c:v>
                 </c:pt>
                 <c:pt idx="18">
-                  <c:v>0.9459594689067654</c:v>
+                  <c:v>0.94595946890676541</c:v>
                 </c:pt>
                 <c:pt idx="19">
-                  <c:v>0.9862071167439163</c:v>
+                  <c:v>0.98620711674391626</c:v>
                 </c:pt>
                 <c:pt idx="20">
                   <c:v>1</c:v>
                 </c:pt>
                 <c:pt idx="21">
-                  <c:v>0.9862071167439163</c:v>
+                  <c:v>0.98620711674391626</c:v>
                 </c:pt>
                 <c:pt idx="22">
-                  <c:v>0.9459594689067654</c:v>
+                  <c:v>0.94595946890676541</c:v>
                 </c:pt>
                 <c:pt idx="23">
-                  <c:v>0.8824969025845955</c:v>
+                  <c:v>0.88249690258459546</c:v>
                 </c:pt>
                 <c:pt idx="24">
-                  <c:v>0.8007374029168081</c:v>
+                  <c:v>0.80073740291680806</c:v>
                 </c:pt>
                 <c:pt idx="25">
-                  <c:v>0.7066482778577163</c:v>
+                  <c:v>0.70664827785771633</c:v>
                 </c:pt>
                 <c:pt idx="26">
-                  <c:v>0.6065306597126334</c:v>
+                  <c:v>0.60653065971263342</c:v>
                 </c:pt>
                 <c:pt idx="27">
-                  <c:v>0.5063356166481006</c:v>
+                  <c:v>0.50633561664810056</c:v>
                 </c:pt>
                 <c:pt idx="28">
                   <c:v>0.41111229050718745</c:v>
@@ -459,68 +422,56 @@
                   <c:v>0.24935220877729622</c:v>
                 </c:pt>
                 <c:pt idx="31">
-                  <c:v>0.1862704636977009</c:v>
+                  <c:v>0.18627046369770089</c:v>
                 </c:pt>
                 <c:pt idx="32">
                   <c:v>0.1353352832366127</c:v>
                 </c:pt>
                 <c:pt idx="33">
-                  <c:v>0.0956344448325386</c:v>
+                  <c:v>9.5634444832538607E-2</c:v>
                 </c:pt>
                 <c:pt idx="34">
-                  <c:v>0.06572852861653047</c:v>
+                  <c:v>6.5728528616530474E-2</c:v>
                 </c:pt>
                 <c:pt idx="35">
-                  <c:v>0.04393693362340742</c:v>
+                  <c:v>4.393693362340742E-2</c:v>
                 </c:pt>
                 <c:pt idx="36">
-                  <c:v>0.028565500784550377</c:v>
+                  <c:v>2.8565500784550377E-2</c:v>
                 </c:pt>
                 <c:pt idx="37">
-                  <c:v>0.018063013419781275</c:v>
+                  <c:v>1.8063013419781275E-2</c:v>
                 </c:pt>
                 <c:pt idx="38">
-                  <c:v>0.011108996538242306</c:v>
+                  <c:v>1.1108996538242306E-2</c:v>
                 </c:pt>
                 <c:pt idx="39">
-                  <c:v>0.006645011282741399</c:v>
+                  <c:v>6.645011282741399E-3</c:v>
                 </c:pt>
                 <c:pt idx="40">
-                  <c:v>0.0038659201394728076</c:v>
+                  <c:v>3.8659201394728076E-3</c:v>
                 </c:pt>
               </c:numCache>
             </c:numRef>
           </c:val>
           <c:smooth val="1"/>
+          <c:extLst>
+            <c:ext xmlns:c16="http://schemas.microsoft.com/office/drawing/2014/chart" uri="{C3380CC4-5D6E-409C-BE32-E72D297353CC}">
+              <c16:uniqueId val="{00000000-FFDC-DD46-8800-09854274561A}"/>
+            </c:ext>
+          </c:extLst>
         </c:ser>
         <c:dLbls>
-          <c:numFmt formatCode="#,##0" sourceLinked="0"/>
-          <c:txPr>
-            <a:bodyPr/>
-            <a:lstStyle/>
-            <a:p>
-              <a:pPr>
-                <a:defRPr b="0" i="0" strike="noStrike" sz="1200" u="none">
-                  <a:solidFill>
-                    <a:srgbClr val="000000"/>
-                  </a:solidFill>
-                  <a:latin typeface="Arial"/>
-                </a:defRPr>
-              </a:pPr>
-            </a:p>
-          </c:txPr>
           <c:showLegendKey val="0"/>
           <c:showVal val="0"/>
           <c:showCatName val="0"/>
           <c:showSerName val="0"/>
           <c:showPercent val="0"/>
           <c:showBubbleSize val="0"/>
-          <c:showLeaderLines val="0"/>
         </c:dLbls>
-        <c:marker val="1"/>
+        <c:smooth val="0"/>
         <c:axId val="2094734554"/>
         <c:axId val="2094734552"/>
-        <c:axId val="2094734556"/>
       </c:lineChart>
       <c:catAx>
         <c:axId val="2094734554"/>
@@ -544,7 +495,7 @@
                   </a:defRPr>
                 </a:pPr>
                 <a:r>
-                  <a:rPr b="0" i="0" u="none" strike="noStrike">
+                  <a:rPr lang="fr-FR" b="0" i="0" u="none" strike="noStrike">
                     <a:solidFill>
                       <a:srgbClr val="6B6B6B"/>
                     </a:solidFill>
@@ -555,7 +506,6 @@
               </a:p>
             </c:rich>
           </c:tx>
-          <c:layout/>
           <c:overlay val="0"/>
         </c:title>
         <c:numFmt formatCode="General" sourceLinked="1"/>
@@ -590,8 +540,9 @@
         <c:crosses val="autoZero"/>
         <c:auto val="1"/>
         <c:lblAlgn val="ctr"/>
+        <c:lblOffset val="100"/>
+        <c:tickLblSkip val="10"/>
         <c:noMultiLvlLbl val="1"/>
-        <c:tickLblSkip val="10"/>
       </c:catAx>
       <c:valAx>
         <c:axId val="2094734552"/>
@@ -626,7 +577,7 @@
                   </a:defRPr>
                 </a:pPr>
                 <a:r>
-                  <a:rPr b="0" i="0" u="none" strike="noStrike">
+                  <a:rPr lang="fr-FR" b="0" i="0" u="none" strike="noStrike">
                     <a:solidFill>
                       <a:srgbClr val="6B6B6B"/>
                     </a:solidFill>
@@ -637,7 +588,6 @@
               </a:p>
             </c:rich>
           </c:tx>
-          <c:layout/>
           <c:overlay val="0"/>
         </c:title>
         <c:numFmt formatCode="General" sourceLinked="0"/>
@@ -682,6 +632,7 @@
     </c:plotArea>
     <c:plotVisOnly val="1"/>
     <c:dispBlanksAs val="span"/>
+    <c:showDLblsOverMax val="1"/>
   </c:chart>
   <c:spPr>
     <a:noFill/>
@@ -697,9 +648,11 @@
 </file>
 
 <file path=ppt/charts/chart2.xml><?xml version="1.0" encoding="utf-8"?>
-<c:chartSpace xmlns:c="http://schemas.openxmlformats.org/drawingml/2006/chart" xmlns:a="http://schemas.openxmlformats.org/drawingml/2006/main" xmlns:r="http://schemas.openxmlformats.org/officeDocument/2006/relationships">
+<c:chartSpace xmlns:c="http://schemas.openxmlformats.org/drawingml/2006/chart" xmlns:a="http://schemas.openxmlformats.org/drawingml/2006/main" xmlns:r="http://schemas.openxmlformats.org/officeDocument/2006/relationships" xmlns:c16r2="http://schemas.microsoft.com/office/drawing/2015/06/chart">
   <c:date1904 val="0"/>
+  <c:lang val="fr-FR"/>
   <c:roundedCorners val="1"/>
+  <c:style val="2"/>
   <c:chart>
     <c:title>
       <c:tx>
@@ -716,7 +669,7 @@
               </a:defRPr>
             </a:pPr>
             <a:r>
-              <a:rPr sz="1100" b="0" i="0" u="none" strike="noStrike">
+              <a:rPr lang="fr-FR" sz="1100" b="0" i="0" u="none" strike="noStrike">
                 <a:solidFill>
                   <a:srgbClr val="0B3C5D"/>
                 </a:solidFill>
@@ -727,7 +680,6 @@
           </a:p>
         </c:rich>
       </c:tx>
-      <c:layout/>
       <c:overlay val="0"/>
     </c:title>
     <c:autoTitleDeleted val="0"/>
@@ -760,18 +712,26 @@
           <c:invertIfNegative val="0"/>
           <c:dLbls>
             <c:numFmt formatCode="#,##0" sourceLinked="0"/>
+            <c:spPr>
+              <a:noFill/>
+              <a:ln>
+                <a:noFill/>
+              </a:ln>
+              <a:effectLst/>
+            </c:spPr>
             <c:txPr>
               <a:bodyPr/>
               <a:lstStyle/>
               <a:p>
                 <a:pPr>
-                  <a:defRPr b="0" i="0" strike="noStrike" sz="1200" u="none">
+                  <a:defRPr sz="1200" b="0" i="0" u="none" strike="noStrike">
                     <a:solidFill>
                       <a:srgbClr val="0B3C5D"/>
                     </a:solidFill>
                     <a:latin typeface="Arial"/>
                   </a:defRPr>
                 </a:pPr>
+                <a:endParaRPr lang="fr-FR"/>
               </a:p>
             </c:txPr>
             <c:showLegendKey val="0"/>
@@ -781,22 +741,25 @@
             <c:showPercent val="0"/>
             <c:showBubbleSize val="0"/>
             <c:showLeaderLines val="0"/>
+            <c:extLst>
+              <c:ext xmlns:c15="http://schemas.microsoft.com/office/drawing/2012/chart" uri="{CE6537A1-D6FC-4f65-9D91-7224C49458BB}">
+                <c15:showLeaderLines val="0"/>
+              </c:ext>
+            </c:extLst>
           </c:dLbls>
           <c:cat>
-            <c:multiLvlStrRef>
+            <c:strRef>
               <c:f>Sheet1!$A$2:$A$3</c:f>
-              <c:multiLvlStrCache>
+              <c:strCache>
                 <c:ptCount val="2"/>
-                <c:lvl>
-                  <c:pt idx="0">
-                    <c:v>Within communities</c:v>
-                  </c:pt>
-                  <c:pt idx="1">
-                    <c:v>Among communities</c:v>
-                  </c:pt>
-                </c:lvl>
-              </c:multiLvlStrCache>
-            </c:multiLvlStrRef>
+                <c:pt idx="0">
+                  <c:v>Within communities</c:v>
+                </c:pt>
+                <c:pt idx="1">
+                  <c:v>Among communities</c:v>
+                </c:pt>
+              </c:strCache>
+            </c:strRef>
           </c:cat>
           <c:val>
             <c:numRef>
@@ -813,36 +776,23 @@
               </c:numCache>
             </c:numRef>
           </c:val>
+          <c:extLst>
+            <c:ext xmlns:c16="http://schemas.microsoft.com/office/drawing/2014/chart" uri="{C3380CC4-5D6E-409C-BE32-E72D297353CC}">
+              <c16:uniqueId val="{00000000-4E42-0045-B09E-7837C6A3DE7A}"/>
+            </c:ext>
+          </c:extLst>
         </c:ser>
         <c:dLbls>
-          <c:numFmt formatCode="#,##0" sourceLinked="0"/>
-          <c:txPr>
-            <a:bodyPr/>
-            <a:lstStyle/>
-            <a:p>
-              <a:pPr>
-                <a:defRPr b="0" i="0" strike="noStrike" sz="1200" u="none">
-                  <a:solidFill>
-                    <a:srgbClr val="0B3C5D"/>
-                  </a:solidFill>
-                  <a:latin typeface="Arial"/>
-                </a:defRPr>
-              </a:pPr>
-            </a:p>
-          </c:txPr>
           <c:showLegendKey val="0"/>
           <c:showVal val="1"/>
           <c:showCatName val="0"/>
           <c:showSerName val="0"/>
           <c:showPercent val="0"/>
           <c:showBubbleSize val="0"/>
-          <c:showLeaderLines val="0"/>
         </c:dLbls>
         <c:gapWidth val="60"/>
-        <c:overlap val="0"/>
         <c:axId val="2094734554"/>
         <c:axId val="2094734552"/>
-        <c:axId val="2094734556"/>
       </c:barChart>
       <c:catAx>
         <c:axId val="2094734554"/>
@@ -883,6 +833,7 @@
         <c:crosses val="autoZero"/>
         <c:auto val="1"/>
         <c:lblAlgn val="ctr"/>
+        <c:lblOffset val="100"/>
         <c:noMultiLvlLbl val="1"/>
       </c:catAx>
       <c:valAx>
@@ -919,7 +870,7 @@
                   </a:defRPr>
                 </a:pPr>
                 <a:r>
-                  <a:rPr b="0" i="0" u="none" strike="noStrike">
+                  <a:rPr lang="fr-FR" b="0" i="0" u="none" strike="noStrike">
                     <a:solidFill>
                       <a:srgbClr val="6B6B6B"/>
                     </a:solidFill>
@@ -930,7 +881,6 @@
               </a:p>
             </c:rich>
           </c:tx>
-          <c:layout/>
           <c:overlay val="0"/>
         </c:title>
         <c:numFmt formatCode="General" sourceLinked="0"/>
@@ -975,6 +925,7 @@
     </c:plotArea>
     <c:plotVisOnly val="1"/>
     <c:dispBlanksAs val="span"/>
+    <c:showDLblsOverMax val="1"/>
   </c:chart>
   <c:spPr>
     <a:noFill/>
@@ -990,9 +941,11 @@
 </file>
 
 <file path=ppt/charts/chart3.xml><?xml version="1.0" encoding="utf-8"?>
-<c:chartSpace xmlns:c="http://schemas.openxmlformats.org/drawingml/2006/chart" xmlns:a="http://schemas.openxmlformats.org/drawingml/2006/main" xmlns:r="http://schemas.openxmlformats.org/officeDocument/2006/relationships">
+<c:chartSpace xmlns:c="http://schemas.openxmlformats.org/drawingml/2006/chart" xmlns:a="http://schemas.openxmlformats.org/drawingml/2006/main" xmlns:r="http://schemas.openxmlformats.org/officeDocument/2006/relationships" xmlns:c16r2="http://schemas.microsoft.com/office/drawing/2015/06/chart">
   <c:date1904 val="0"/>
+  <c:lang val="fr-FR"/>
   <c:roundedCorners val="1"/>
+  <c:style val="2"/>
   <c:chart>
     <c:title>
       <c:tx>
@@ -1009,7 +962,7 @@
               </a:defRPr>
             </a:pPr>
             <a:r>
-              <a:rPr sz="1200" b="0" i="0" u="none" strike="noStrike">
+              <a:rPr lang="fr-FR" sz="1200" b="0" i="0" u="none" strike="noStrike">
                 <a:solidFill>
                   <a:srgbClr val="0B3C5D"/>
                 </a:solidFill>
@@ -1020,13 +973,13 @@
           </a:p>
         </c:rich>
       </c:tx>
-      <c:layout/>
       <c:overlay val="0"/>
     </c:title>
     <c:autoTitleDeleted val="0"/>
     <c:plotArea>
       <c:layout/>
       <c:lineChart>
+        <c:grouping val="standard"/>
         <c:varyColors val="0"/>
         <c:ser>
           <c:idx val="0"/>
@@ -1043,9 +996,6 @@
             </c:strRef>
           </c:tx>
           <c:spPr>
-            <a:solidFill>
-              <a:srgbClr val="1D6F9E"/>
-            </a:solidFill>
             <a:ln w="31750" cap="flat">
               <a:solidFill>
                 <a:srgbClr val="1D6F9E"/>
@@ -1055,180 +1005,139 @@
             </a:ln>
             <a:effectLst/>
           </c:spPr>
-          <c:invertIfNegative val="0"/>
-          <c:dLbls>
-            <c:numFmt formatCode="#,##0" sourceLinked="0"/>
-            <c:txPr>
-              <a:bodyPr/>
-              <a:lstStyle/>
-              <a:p>
-                <a:pPr>
-                  <a:defRPr b="0" i="0" strike="noStrike" sz="1200" u="none">
-                    <a:solidFill>
-                      <a:srgbClr val="000000"/>
-                    </a:solidFill>
-                    <a:latin typeface="Arial"/>
-                  </a:defRPr>
-                </a:pPr>
-              </a:p>
-            </c:txPr>
-            <c:showLegendKey val="0"/>
-            <c:showVal val="0"/>
-            <c:showCatName val="0"/>
-            <c:showSerName val="0"/>
-            <c:showPercent val="0"/>
-            <c:showBubbleSize val="0"/>
-            <c:showLeaderLines val="0"/>
-          </c:dLbls>
           <c:marker>
             <c:symbol val="none"/>
-            <c:size val="6"/>
-            <c:spPr>
-              <a:solidFill>
-                <a:srgbClr val="1D6F9E"/>
-              </a:solidFill>
-              <a:ln w="9525" cap="flat">
-                <a:solidFill>
-                  <a:srgbClr val="1D6F9E"/>
-                </a:solidFill>
-                <a:prstDash val="solid"/>
-                <a:round/>
-              </a:ln>
-              <a:effectLst/>
-            </c:spPr>
           </c:marker>
           <c:cat>
-            <c:multiLvlStrRef>
+            <c:strRef>
               <c:f>Sheet1!$A$2:$A$42</c:f>
-              <c:multiLvlStrCache>
+              <c:strCache>
                 <c:ptCount val="41"/>
-                <c:lvl>
-                  <c:pt idx="0">
-                    <c:v>0</c:v>
-                  </c:pt>
-                  <c:pt idx="1">
-                    <c:v>1</c:v>
-                  </c:pt>
-                  <c:pt idx="2">
-                    <c:v>2</c:v>
-                  </c:pt>
-                  <c:pt idx="3">
-                    <c:v>3</c:v>
-                  </c:pt>
-                  <c:pt idx="4">
-                    <c:v>4</c:v>
-                  </c:pt>
-                  <c:pt idx="5">
-                    <c:v>5</c:v>
-                  </c:pt>
-                  <c:pt idx="6">
-                    <c:v>6</c:v>
-                  </c:pt>
-                  <c:pt idx="7">
-                    <c:v>7</c:v>
-                  </c:pt>
-                  <c:pt idx="8">
-                    <c:v>8</c:v>
-                  </c:pt>
-                  <c:pt idx="9">
-                    <c:v>9</c:v>
-                  </c:pt>
-                  <c:pt idx="10">
-                    <c:v>10</c:v>
-                  </c:pt>
-                  <c:pt idx="11">
-                    <c:v>11</c:v>
-                  </c:pt>
-                  <c:pt idx="12">
-                    <c:v>12</c:v>
-                  </c:pt>
-                  <c:pt idx="13">
-                    <c:v>13</c:v>
-                  </c:pt>
-                  <c:pt idx="14">
-                    <c:v>14</c:v>
-                  </c:pt>
-                  <c:pt idx="15">
-                    <c:v>15</c:v>
-                  </c:pt>
-                  <c:pt idx="16">
-                    <c:v>16</c:v>
-                  </c:pt>
-                  <c:pt idx="17">
-                    <c:v>17</c:v>
-                  </c:pt>
-                  <c:pt idx="18">
-                    <c:v>18</c:v>
-                  </c:pt>
-                  <c:pt idx="19">
-                    <c:v>19</c:v>
-                  </c:pt>
-                  <c:pt idx="20">
-                    <c:v>20</c:v>
-                  </c:pt>
-                  <c:pt idx="21">
-                    <c:v>21</c:v>
-                  </c:pt>
-                  <c:pt idx="22">
-                    <c:v>22</c:v>
-                  </c:pt>
-                  <c:pt idx="23">
-                    <c:v>23</c:v>
-                  </c:pt>
-                  <c:pt idx="24">
-                    <c:v>24</c:v>
-                  </c:pt>
-                  <c:pt idx="25">
-                    <c:v>25</c:v>
-                  </c:pt>
-                  <c:pt idx="26">
-                    <c:v>26</c:v>
-                  </c:pt>
-                  <c:pt idx="27">
-                    <c:v>27</c:v>
-                  </c:pt>
-                  <c:pt idx="28">
-                    <c:v>28</c:v>
-                  </c:pt>
-                  <c:pt idx="29">
-                    <c:v>29</c:v>
-                  </c:pt>
-                  <c:pt idx="30">
-                    <c:v>30</c:v>
-                  </c:pt>
-                  <c:pt idx="31">
-                    <c:v>31</c:v>
-                  </c:pt>
-                  <c:pt idx="32">
-                    <c:v>32</c:v>
-                  </c:pt>
-                  <c:pt idx="33">
-                    <c:v>33</c:v>
-                  </c:pt>
-                  <c:pt idx="34">
-                    <c:v>34</c:v>
-                  </c:pt>
-                  <c:pt idx="35">
-                    <c:v>35</c:v>
-                  </c:pt>
-                  <c:pt idx="36">
-                    <c:v>36</c:v>
-                  </c:pt>
-                  <c:pt idx="37">
-                    <c:v>37</c:v>
-                  </c:pt>
-                  <c:pt idx="38">
-                    <c:v>38</c:v>
-                  </c:pt>
-                  <c:pt idx="39">
-                    <c:v>39</c:v>
-                  </c:pt>
-                  <c:pt idx="40">
-                    <c:v>40</c:v>
-                  </c:pt>
-                </c:lvl>
-              </c:multiLvlStrCache>
-            </c:multiLvlStrRef>
+                <c:pt idx="0">
+                  <c:v>0</c:v>
+                </c:pt>
+                <c:pt idx="1">
+                  <c:v>1</c:v>
+                </c:pt>
+                <c:pt idx="2">
+                  <c:v>2</c:v>
+                </c:pt>
+                <c:pt idx="3">
+                  <c:v>3</c:v>
+                </c:pt>
+                <c:pt idx="4">
+                  <c:v>4</c:v>
+                </c:pt>
+                <c:pt idx="5">
+                  <c:v>5</c:v>
+                </c:pt>
+                <c:pt idx="6">
+                  <c:v>6</c:v>
+                </c:pt>
+                <c:pt idx="7">
+                  <c:v>7</c:v>
+                </c:pt>
+                <c:pt idx="8">
+                  <c:v>8</c:v>
+                </c:pt>
+                <c:pt idx="9">
+                  <c:v>9</c:v>
+                </c:pt>
+                <c:pt idx="10">
+                  <c:v>10</c:v>
+                </c:pt>
+                <c:pt idx="11">
+                  <c:v>11</c:v>
+                </c:pt>
+                <c:pt idx="12">
+                  <c:v>12</c:v>
+                </c:pt>
+                <c:pt idx="13">
+                  <c:v>13</c:v>
+                </c:pt>
+                <c:pt idx="14">
+                  <c:v>14</c:v>
+                </c:pt>
+                <c:pt idx="15">
+                  <c:v>15</c:v>
+                </c:pt>
+                <c:pt idx="16">
+                  <c:v>16</c:v>
+                </c:pt>
+                <c:pt idx="17">
+                  <c:v>17</c:v>
+                </c:pt>
+                <c:pt idx="18">
+                  <c:v>18</c:v>
+                </c:pt>
+                <c:pt idx="19">
+                  <c:v>19</c:v>
+                </c:pt>
+                <c:pt idx="20">
+                  <c:v>20</c:v>
+                </c:pt>
+                <c:pt idx="21">
+                  <c:v>21</c:v>
+                </c:pt>
+                <c:pt idx="22">
+                  <c:v>22</c:v>
+                </c:pt>
+                <c:pt idx="23">
+                  <c:v>23</c:v>
+                </c:pt>
+                <c:pt idx="24">
+                  <c:v>24</c:v>
+                </c:pt>
+                <c:pt idx="25">
+                  <c:v>25</c:v>
+                </c:pt>
+                <c:pt idx="26">
+                  <c:v>26</c:v>
+                </c:pt>
+                <c:pt idx="27">
+                  <c:v>27</c:v>
+                </c:pt>
+                <c:pt idx="28">
+                  <c:v>28</c:v>
+                </c:pt>
+                <c:pt idx="29">
+                  <c:v>29</c:v>
+                </c:pt>
+                <c:pt idx="30">
+                  <c:v>30</c:v>
+                </c:pt>
+                <c:pt idx="31">
+                  <c:v>31</c:v>
+                </c:pt>
+                <c:pt idx="32">
+                  <c:v>32</c:v>
+                </c:pt>
+                <c:pt idx="33">
+                  <c:v>33</c:v>
+                </c:pt>
+                <c:pt idx="34">
+                  <c:v>34</c:v>
+                </c:pt>
+                <c:pt idx="35">
+                  <c:v>35</c:v>
+                </c:pt>
+                <c:pt idx="36">
+                  <c:v>36</c:v>
+                </c:pt>
+                <c:pt idx="37">
+                  <c:v>37</c:v>
+                </c:pt>
+                <c:pt idx="38">
+                  <c:v>38</c:v>
+                </c:pt>
+                <c:pt idx="39">
+                  <c:v>39</c:v>
+                </c:pt>
+                <c:pt idx="40">
+                  <c:v>40</c:v>
+                </c:pt>
+              </c:strCache>
+            </c:strRef>
           </c:cat>
           <c:val>
             <c:numRef>
@@ -1237,16 +1146,16 @@
                 <c:formatCode>General</c:formatCode>
                 <c:ptCount val="41"/>
                 <c:pt idx="0">
-                  <c:v>0.06572852861653047</c:v>
+                  <c:v>6.5728528616530474E-2</c:v>
                 </c:pt>
                 <c:pt idx="1">
-                  <c:v>0.0956344448325386</c:v>
+                  <c:v>9.5634444832538607E-2</c:v>
                 </c:pt>
                 <c:pt idx="2">
                   <c:v>0.1353352832366127</c:v>
                 </c:pt>
                 <c:pt idx="3">
-                  <c:v>0.1862704636977009</c:v>
+                  <c:v>0.18627046369770089</c:v>
                 </c:pt>
                 <c:pt idx="4">
                   <c:v>0.24935220877729622</c:v>
@@ -1258,49 +1167,49 @@
                   <c:v>0.41111229050718745</c:v>
                 </c:pt>
                 <c:pt idx="7">
-                  <c:v>0.5063356166481006</c:v>
+                  <c:v>0.50633561664810056</c:v>
                 </c:pt>
                 <c:pt idx="8">
-                  <c:v>0.6065306597126334</c:v>
+                  <c:v>0.60653065971263342</c:v>
                 </c:pt>
                 <c:pt idx="9">
-                  <c:v>0.7066482778577163</c:v>
+                  <c:v>0.70664827785771633</c:v>
                 </c:pt>
                 <c:pt idx="10">
-                  <c:v>0.8007374029168081</c:v>
+                  <c:v>0.80073740291680806</c:v>
                 </c:pt>
                 <c:pt idx="11">
-                  <c:v>0.8824969025845955</c:v>
+                  <c:v>0.88249690258459546</c:v>
                 </c:pt>
                 <c:pt idx="12">
-                  <c:v>0.9459594689067654</c:v>
+                  <c:v>0.94595946890676541</c:v>
                 </c:pt>
                 <c:pt idx="13">
-                  <c:v>0.9862071167439163</c:v>
+                  <c:v>0.98620711674391626</c:v>
                 </c:pt>
                 <c:pt idx="14">
                   <c:v>1</c:v>
                 </c:pt>
                 <c:pt idx="15">
-                  <c:v>0.9862071167439163</c:v>
+                  <c:v>0.98620711674391626</c:v>
                 </c:pt>
                 <c:pt idx="16">
-                  <c:v>0.9459594689067654</c:v>
+                  <c:v>0.94595946890676541</c:v>
                 </c:pt>
                 <c:pt idx="17">
-                  <c:v>0.8824969025845955</c:v>
+                  <c:v>0.88249690258459546</c:v>
                 </c:pt>
                 <c:pt idx="18">
-                  <c:v>0.8007374029168081</c:v>
+                  <c:v>0.80073740291680806</c:v>
                 </c:pt>
                 <c:pt idx="19">
-                  <c:v>0.7066482778577163</c:v>
+                  <c:v>0.70664827785771633</c:v>
                 </c:pt>
                 <c:pt idx="20">
-                  <c:v>0.6065306597126334</c:v>
+                  <c:v>0.60653065971263342</c:v>
                 </c:pt>
                 <c:pt idx="21">
-                  <c:v>0.5063356166481006</c:v>
+                  <c:v>0.50633561664810056</c:v>
                 </c:pt>
                 <c:pt idx="22">
                   <c:v>0.41111229050718745</c:v>
@@ -1312,57 +1221,62 @@
                   <c:v>0.24935220877729622</c:v>
                 </c:pt>
                 <c:pt idx="25">
-                  <c:v>0.1862704636977009</c:v>
+                  <c:v>0.18627046369770089</c:v>
                 </c:pt>
                 <c:pt idx="26">
                   <c:v>0.1353352832366127</c:v>
                 </c:pt>
                 <c:pt idx="27">
-                  <c:v>0.0956344448325386</c:v>
+                  <c:v>9.5634444832538607E-2</c:v>
                 </c:pt>
                 <c:pt idx="28">
-                  <c:v>0.06572852861653047</c:v>
+                  <c:v>6.5728528616530474E-2</c:v>
                 </c:pt>
                 <c:pt idx="29">
-                  <c:v>0.04393693362340742</c:v>
+                  <c:v>4.393693362340742E-2</c:v>
                 </c:pt>
                 <c:pt idx="30">
-                  <c:v>0.028565500784550377</c:v>
+                  <c:v>2.8565500784550377E-2</c:v>
                 </c:pt>
                 <c:pt idx="31">
-                  <c:v>0.018063013419781275</c:v>
+                  <c:v>1.8063013419781275E-2</c:v>
                 </c:pt>
                 <c:pt idx="32">
-                  <c:v>0.011108996538242306</c:v>
+                  <c:v>1.1108996538242306E-2</c:v>
                 </c:pt>
                 <c:pt idx="33">
-                  <c:v>0.006645011282741399</c:v>
+                  <c:v>6.645011282741399E-3</c:v>
                 </c:pt>
                 <c:pt idx="34">
-                  <c:v>0.0038659201394728076</c:v>
+                  <c:v>3.8659201394728076E-3</c:v>
                 </c:pt>
                 <c:pt idx="35">
-                  <c:v>0.002187491118182885</c:v>
+                  <c:v>2.1874911181828851E-3</c:v>
                 </c:pt>
                 <c:pt idx="36">
-                  <c:v>0.001203859994828203</c:v>
+                  <c:v>1.2038599948282029E-3</c:v>
                 </c:pt>
                 <c:pt idx="37">
-                  <c:v>0.0006443798205686081</c:v>
+                  <c:v>6.4437982056860812E-4</c:v>
                 </c:pt>
                 <c:pt idx="38">
-                  <c:v>0.00033546262790251185</c:v>
+                  <c:v>3.3546262790251185E-4</c:v>
                 </c:pt>
                 <c:pt idx="39">
-                  <c:v>0.0001698566765614107</c:v>
+                  <c:v>1.698566765614107E-4</c:v>
                 </c:pt>
                 <c:pt idx="40">
-                  <c:v>0.00008364834722972752</c:v>
+                  <c:v>8.3648347229727524E-5</c:v>
                 </c:pt>
               </c:numCache>
             </c:numRef>
           </c:val>
           <c:smooth val="1"/>
+          <c:extLst>
+            <c:ext xmlns:c16="http://schemas.microsoft.com/office/drawing/2014/chart" uri="{C3380CC4-5D6E-409C-BE32-E72D297353CC}">
+              <c16:uniqueId val="{00000000-4981-0C4C-9D45-E46DA7866A7B}"/>
+            </c:ext>
+          </c:extLst>
         </c:ser>
         <c:ser>
           <c:idx val="1"/>
@@ -1379,9 +1293,6 @@
             </c:strRef>
           </c:tx>
           <c:spPr>
-            <a:solidFill>
-              <a:srgbClr val="D9822B"/>
-            </a:solidFill>
             <a:ln w="31750" cap="flat">
               <a:solidFill>
                 <a:srgbClr val="D9822B"/>
@@ -1391,180 +1302,139 @@
             </a:ln>
             <a:effectLst/>
           </c:spPr>
-          <c:invertIfNegative val="0"/>
-          <c:dLbls>
-            <c:numFmt formatCode="#,##0" sourceLinked="0"/>
-            <c:txPr>
-              <a:bodyPr/>
-              <a:lstStyle/>
-              <a:p>
-                <a:pPr>
-                  <a:defRPr b="0" i="0" strike="noStrike" sz="1200" u="none">
-                    <a:solidFill>
-                      <a:srgbClr val="000000"/>
-                    </a:solidFill>
-                    <a:latin typeface="Arial"/>
-                  </a:defRPr>
-                </a:pPr>
-              </a:p>
-            </c:txPr>
-            <c:showLegendKey val="0"/>
-            <c:showVal val="0"/>
-            <c:showCatName val="0"/>
-            <c:showSerName val="0"/>
-            <c:showPercent val="0"/>
-            <c:showBubbleSize val="0"/>
-            <c:showLeaderLines val="0"/>
-          </c:dLbls>
           <c:marker>
             <c:symbol val="none"/>
-            <c:size val="6"/>
-            <c:spPr>
-              <a:solidFill>
-                <a:srgbClr val="D9822B"/>
-              </a:solidFill>
-              <a:ln w="9525" cap="flat">
-                <a:solidFill>
-                  <a:srgbClr val="D9822B"/>
-                </a:solidFill>
-                <a:prstDash val="solid"/>
-                <a:round/>
-              </a:ln>
-              <a:effectLst/>
-            </c:spPr>
           </c:marker>
           <c:cat>
-            <c:multiLvlStrRef>
+            <c:strRef>
               <c:f>Sheet1!$A$2:$A$42</c:f>
-              <c:multiLvlStrCache>
+              <c:strCache>
                 <c:ptCount val="41"/>
-                <c:lvl>
-                  <c:pt idx="0">
-                    <c:v>0</c:v>
-                  </c:pt>
-                  <c:pt idx="1">
-                    <c:v>1</c:v>
-                  </c:pt>
-                  <c:pt idx="2">
-                    <c:v>2</c:v>
-                  </c:pt>
-                  <c:pt idx="3">
-                    <c:v>3</c:v>
-                  </c:pt>
-                  <c:pt idx="4">
-                    <c:v>4</c:v>
-                  </c:pt>
-                  <c:pt idx="5">
-                    <c:v>5</c:v>
-                  </c:pt>
-                  <c:pt idx="6">
-                    <c:v>6</c:v>
-                  </c:pt>
-                  <c:pt idx="7">
-                    <c:v>7</c:v>
-                  </c:pt>
-                  <c:pt idx="8">
-                    <c:v>8</c:v>
-                  </c:pt>
-                  <c:pt idx="9">
-                    <c:v>9</c:v>
-                  </c:pt>
-                  <c:pt idx="10">
-                    <c:v>10</c:v>
-                  </c:pt>
-                  <c:pt idx="11">
-                    <c:v>11</c:v>
-                  </c:pt>
-                  <c:pt idx="12">
-                    <c:v>12</c:v>
-                  </c:pt>
-                  <c:pt idx="13">
-                    <c:v>13</c:v>
-                  </c:pt>
-                  <c:pt idx="14">
-                    <c:v>14</c:v>
-                  </c:pt>
-                  <c:pt idx="15">
-                    <c:v>15</c:v>
-                  </c:pt>
-                  <c:pt idx="16">
-                    <c:v>16</c:v>
-                  </c:pt>
-                  <c:pt idx="17">
-                    <c:v>17</c:v>
-                  </c:pt>
-                  <c:pt idx="18">
-                    <c:v>18</c:v>
-                  </c:pt>
-                  <c:pt idx="19">
-                    <c:v>19</c:v>
-                  </c:pt>
-                  <c:pt idx="20">
-                    <c:v>20</c:v>
-                  </c:pt>
-                  <c:pt idx="21">
-                    <c:v>21</c:v>
-                  </c:pt>
-                  <c:pt idx="22">
-                    <c:v>22</c:v>
-                  </c:pt>
-                  <c:pt idx="23">
-                    <c:v>23</c:v>
-                  </c:pt>
-                  <c:pt idx="24">
-                    <c:v>24</c:v>
-                  </c:pt>
-                  <c:pt idx="25">
-                    <c:v>25</c:v>
-                  </c:pt>
-                  <c:pt idx="26">
-                    <c:v>26</c:v>
-                  </c:pt>
-                  <c:pt idx="27">
-                    <c:v>27</c:v>
-                  </c:pt>
-                  <c:pt idx="28">
-                    <c:v>28</c:v>
-                  </c:pt>
-                  <c:pt idx="29">
-                    <c:v>29</c:v>
-                  </c:pt>
-                  <c:pt idx="30">
-                    <c:v>30</c:v>
-                  </c:pt>
-                  <c:pt idx="31">
-                    <c:v>31</c:v>
-                  </c:pt>
-                  <c:pt idx="32">
-                    <c:v>32</c:v>
-                  </c:pt>
-                  <c:pt idx="33">
-                    <c:v>33</c:v>
-                  </c:pt>
-                  <c:pt idx="34">
-                    <c:v>34</c:v>
-                  </c:pt>
-                  <c:pt idx="35">
-                    <c:v>35</c:v>
-                  </c:pt>
-                  <c:pt idx="36">
-                    <c:v>36</c:v>
-                  </c:pt>
-                  <c:pt idx="37">
-                    <c:v>37</c:v>
-                  </c:pt>
-                  <c:pt idx="38">
-                    <c:v>38</c:v>
-                  </c:pt>
-                  <c:pt idx="39">
-                    <c:v>39</c:v>
-                  </c:pt>
-                  <c:pt idx="40">
-                    <c:v>40</c:v>
-                  </c:pt>
-                </c:lvl>
-              </c:multiLvlStrCache>
-            </c:multiLvlStrRef>
+                <c:pt idx="0">
+                  <c:v>0</c:v>
+                </c:pt>
+                <c:pt idx="1">
+                  <c:v>1</c:v>
+                </c:pt>
+                <c:pt idx="2">
+                  <c:v>2</c:v>
+                </c:pt>
+                <c:pt idx="3">
+                  <c:v>3</c:v>
+                </c:pt>
+                <c:pt idx="4">
+                  <c:v>4</c:v>
+                </c:pt>
+                <c:pt idx="5">
+                  <c:v>5</c:v>
+                </c:pt>
+                <c:pt idx="6">
+                  <c:v>6</c:v>
+                </c:pt>
+                <c:pt idx="7">
+                  <c:v>7</c:v>
+                </c:pt>
+                <c:pt idx="8">
+                  <c:v>8</c:v>
+                </c:pt>
+                <c:pt idx="9">
+                  <c:v>9</c:v>
+                </c:pt>
+                <c:pt idx="10">
+                  <c:v>10</c:v>
+                </c:pt>
+                <c:pt idx="11">
+                  <c:v>11</c:v>
+                </c:pt>
+                <c:pt idx="12">
+                  <c:v>12</c:v>
+                </c:pt>
+                <c:pt idx="13">
+                  <c:v>13</c:v>
+                </c:pt>
+                <c:pt idx="14">
+                  <c:v>14</c:v>
+                </c:pt>
+                <c:pt idx="15">
+                  <c:v>15</c:v>
+                </c:pt>
+                <c:pt idx="16">
+                  <c:v>16</c:v>
+                </c:pt>
+                <c:pt idx="17">
+                  <c:v>17</c:v>
+                </c:pt>
+                <c:pt idx="18">
+                  <c:v>18</c:v>
+                </c:pt>
+                <c:pt idx="19">
+                  <c:v>19</c:v>
+                </c:pt>
+                <c:pt idx="20">
+                  <c:v>20</c:v>
+                </c:pt>
+                <c:pt idx="21">
+                  <c:v>21</c:v>
+                </c:pt>
+                <c:pt idx="22">
+                  <c:v>22</c:v>
+                </c:pt>
+                <c:pt idx="23">
+                  <c:v>23</c:v>
+                </c:pt>
+                <c:pt idx="24">
+                  <c:v>24</c:v>
+                </c:pt>
+                <c:pt idx="25">
+                  <c:v>25</c:v>
+                </c:pt>
+                <c:pt idx="26">
+                  <c:v>26</c:v>
+                </c:pt>
+                <c:pt idx="27">
+                  <c:v>27</c:v>
+                </c:pt>
+                <c:pt idx="28">
+                  <c:v>28</c:v>
+                </c:pt>
+                <c:pt idx="29">
+                  <c:v>29</c:v>
+                </c:pt>
+                <c:pt idx="30">
+                  <c:v>30</c:v>
+                </c:pt>
+                <c:pt idx="31">
+                  <c:v>31</c:v>
+                </c:pt>
+                <c:pt idx="32">
+                  <c:v>32</c:v>
+                </c:pt>
+                <c:pt idx="33">
+                  <c:v>33</c:v>
+                </c:pt>
+                <c:pt idx="34">
+                  <c:v>34</c:v>
+                </c:pt>
+                <c:pt idx="35">
+                  <c:v>35</c:v>
+                </c:pt>
+                <c:pt idx="36">
+                  <c:v>36</c:v>
+                </c:pt>
+                <c:pt idx="37">
+                  <c:v>37</c:v>
+                </c:pt>
+                <c:pt idx="38">
+                  <c:v>38</c:v>
+                </c:pt>
+                <c:pt idx="39">
+                  <c:v>39</c:v>
+                </c:pt>
+                <c:pt idx="40">
+                  <c:v>40</c:v>
+                </c:pt>
+              </c:strCache>
+            </c:strRef>
           </c:cat>
           <c:val>
             <c:numRef>
@@ -1573,52 +1443,52 @@
                 <c:formatCode>General</c:formatCode>
                 <c:ptCount val="41"/>
                 <c:pt idx="0">
-                  <c:v>0.00008364834722972752</c:v>
+                  <c:v>8.3648347229727524E-5</c:v>
                 </c:pt>
                 <c:pt idx="1">
-                  <c:v>0.0001698566765614107</c:v>
+                  <c:v>1.698566765614107E-4</c:v>
                 </c:pt>
                 <c:pt idx="2">
-                  <c:v>0.00033546262790251185</c:v>
+                  <c:v>3.3546262790251185E-4</c:v>
                 </c:pt>
                 <c:pt idx="3">
-                  <c:v>0.0006443798205686081</c:v>
+                  <c:v>6.4437982056860812E-4</c:v>
                 </c:pt>
                 <c:pt idx="4">
-                  <c:v>0.001203859994828203</c:v>
+                  <c:v>1.2038599948282029E-3</c:v>
                 </c:pt>
                 <c:pt idx="5">
-                  <c:v>0.002187491118182885</c:v>
+                  <c:v>2.1874911181828851E-3</c:v>
                 </c:pt>
                 <c:pt idx="6">
-                  <c:v>0.0038659201394728076</c:v>
+                  <c:v>3.8659201394728076E-3</c:v>
                 </c:pt>
                 <c:pt idx="7">
-                  <c:v>0.006645011282741399</c:v>
+                  <c:v>6.645011282741399E-3</c:v>
                 </c:pt>
                 <c:pt idx="8">
-                  <c:v>0.011108996538242306</c:v>
+                  <c:v>1.1108996538242306E-2</c:v>
                 </c:pt>
                 <c:pt idx="9">
-                  <c:v>0.018063013419781275</c:v>
+                  <c:v>1.8063013419781275E-2</c:v>
                 </c:pt>
                 <c:pt idx="10">
-                  <c:v>0.028565500784550377</c:v>
+                  <c:v>2.8565500784550377E-2</c:v>
                 </c:pt>
                 <c:pt idx="11">
-                  <c:v>0.04393693362340742</c:v>
+                  <c:v>4.393693362340742E-2</c:v>
                 </c:pt>
                 <c:pt idx="12">
-                  <c:v>0.06572852861653047</c:v>
+                  <c:v>6.5728528616530474E-2</c:v>
                 </c:pt>
                 <c:pt idx="13">
-                  <c:v>0.0956344448325386</c:v>
+                  <c:v>9.5634444832538607E-2</c:v>
                 </c:pt>
                 <c:pt idx="14">
                   <c:v>0.1353352832366127</c:v>
                 </c:pt>
                 <c:pt idx="15">
-                  <c:v>0.1862704636977009</c:v>
+                  <c:v>0.18627046369770089</c:v>
                 </c:pt>
                 <c:pt idx="16">
                   <c:v>0.24935220877729622</c:v>
@@ -1630,49 +1500,49 @@
                   <c:v>0.41111229050718745</c:v>
                 </c:pt>
                 <c:pt idx="19">
-                  <c:v>0.5063356166481006</c:v>
+                  <c:v>0.50633561664810056</c:v>
                 </c:pt>
                 <c:pt idx="20">
-                  <c:v>0.6065306597126334</c:v>
+                  <c:v>0.60653065971263342</c:v>
                 </c:pt>
                 <c:pt idx="21">
-                  <c:v>0.7066482778577163</c:v>
+                  <c:v>0.70664827785771633</c:v>
                 </c:pt>
                 <c:pt idx="22">
-                  <c:v>0.8007374029168081</c:v>
+                  <c:v>0.80073740291680806</c:v>
                 </c:pt>
                 <c:pt idx="23">
-                  <c:v>0.8824969025845955</c:v>
+                  <c:v>0.88249690258459546</c:v>
                 </c:pt>
                 <c:pt idx="24">
-                  <c:v>0.9459594689067654</c:v>
+                  <c:v>0.94595946890676541</c:v>
                 </c:pt>
                 <c:pt idx="25">
-                  <c:v>0.9862071167439163</c:v>
+                  <c:v>0.98620711674391626</c:v>
                 </c:pt>
                 <c:pt idx="26">
                   <c:v>1</c:v>
                 </c:pt>
                 <c:pt idx="27">
-                  <c:v>0.9862071167439163</c:v>
+                  <c:v>0.98620711674391626</c:v>
                 </c:pt>
                 <c:pt idx="28">
-                  <c:v>0.9459594689067654</c:v>
+                  <c:v>0.94595946890676541</c:v>
                 </c:pt>
                 <c:pt idx="29">
-                  <c:v>0.8824969025845955</c:v>
+                  <c:v>0.88249690258459546</c:v>
                 </c:pt>
                 <c:pt idx="30">
-                  <c:v>0.8007374029168081</c:v>
+                  <c:v>0.80073740291680806</c:v>
                 </c:pt>
                 <c:pt idx="31">
-                  <c:v>0.7066482778577163</c:v>
+                  <c:v>0.70664827785771633</c:v>
                 </c:pt>
                 <c:pt idx="32">
-                  <c:v>0.6065306597126334</c:v>
+                  <c:v>0.60653065971263342</c:v>
                 </c:pt>
                 <c:pt idx="33">
-                  <c:v>0.5063356166481006</c:v>
+                  <c:v>0.50633561664810056</c:v>
                 </c:pt>
                 <c:pt idx="34">
                   <c:v>0.41111229050718745</c:v>
@@ -1684,50 +1554,38 @@
                   <c:v>0.24935220877729622</c:v>
                 </c:pt>
                 <c:pt idx="37">
-                  <c:v>0.1862704636977009</c:v>
+                  <c:v>0.18627046369770089</c:v>
                 </c:pt>
                 <c:pt idx="38">
                   <c:v>0.1353352832366127</c:v>
                 </c:pt>
                 <c:pt idx="39">
-                  <c:v>0.0956344448325386</c:v>
+                  <c:v>9.5634444832538607E-2</c:v>
                 </c:pt>
                 <c:pt idx="40">
-                  <c:v>0.06572852861653047</c:v>
+                  <c:v>6.5728528616530474E-2</c:v>
                 </c:pt>
               </c:numCache>
             </c:numRef>
           </c:val>
           <c:smooth val="1"/>
+          <c:extLst>
+            <c:ext xmlns:c16="http://schemas.microsoft.com/office/drawing/2014/chart" uri="{C3380CC4-5D6E-409C-BE32-E72D297353CC}">
+              <c16:uniqueId val="{00000001-4981-0C4C-9D45-E46DA7866A7B}"/>
+            </c:ext>
+          </c:extLst>
         </c:ser>
         <c:dLbls>
-          <c:numFmt formatCode="#,##0" sourceLinked="0"/>
-          <c:txPr>
-            <a:bodyPr/>
-            <a:lstStyle/>
-            <a:p>
-              <a:pPr>
-                <a:defRPr b="0" i="0" strike="noStrike" sz="1200" u="none">
-                  <a:solidFill>
-                    <a:srgbClr val="000000"/>
-                  </a:solidFill>
-                  <a:latin typeface="Arial"/>
-                </a:defRPr>
-              </a:pPr>
-            </a:p>
-          </c:txPr>
           <c:showLegendKey val="0"/>
           <c:showVal val="0"/>
           <c:showCatName val="0"/>
           <c:showSerName val="0"/>
           <c:showPercent val="0"/>
           <c:showBubbleSize val="0"/>
-          <c:showLeaderLines val="0"/>
         </c:dLbls>
-        <c:marker val="1"/>
+        <c:smooth val="0"/>
         <c:axId val="2094734554"/>
         <c:axId val="2094734552"/>
-        <c:axId val="2094734556"/>
       </c:lineChart>
       <c:catAx>
         <c:axId val="2094734554"/>
@@ -1751,7 +1609,7 @@
                   </a:defRPr>
                 </a:pPr>
                 <a:r>
-                  <a:rPr b="0" i="0" u="none" strike="noStrike">
+                  <a:rPr lang="fr-FR" b="0" i="0" u="none" strike="noStrike">
                     <a:solidFill>
                       <a:srgbClr val="6B6B6B"/>
                     </a:solidFill>
@@ -1762,7 +1620,6 @@
               </a:p>
             </c:rich>
           </c:tx>
-          <c:layout/>
           <c:overlay val="0"/>
         </c:title>
         <c:numFmt formatCode="General" sourceLinked="1"/>
@@ -1797,8 +1654,9 @@
         <c:crosses val="autoZero"/>
         <c:auto val="1"/>
         <c:lblAlgn val="ctr"/>
+        <c:lblOffset val="100"/>
+        <c:tickLblSkip val="10"/>
         <c:noMultiLvlLbl val="1"/>
-        <c:tickLblSkip val="10"/>
       </c:catAx>
       <c:valAx>
         <c:axId val="2094734552"/>
@@ -1833,7 +1691,7 @@
                   </a:defRPr>
                 </a:pPr>
                 <a:r>
-                  <a:rPr b="0" i="0" u="none" strike="noStrike">
+                  <a:rPr lang="fr-FR" b="0" i="0" u="none" strike="noStrike">
                     <a:solidFill>
                       <a:srgbClr val="6B6B6B"/>
                     </a:solidFill>
@@ -1844,7 +1702,6 @@
               </a:p>
             </c:rich>
           </c:tx>
-          <c:layout/>
           <c:overlay val="0"/>
         </c:title>
         <c:numFmt formatCode="General" sourceLinked="0"/>
@@ -1895,7 +1752,7 @@
         <a:lstStyle/>
         <a:p>
           <a:pPr>
-            <a:defRPr sz="1000">      </a:defRPr>
+            <a:defRPr sz="1000"/>
           </a:pPr>
           <a:endParaRPr lang="en-US"/>
         </a:p>
@@ -1903,6 +1760,7 @@
     </c:legend>
     <c:plotVisOnly val="1"/>
     <c:dispBlanksAs val="span"/>
+    <c:showDLblsOverMax val="1"/>
   </c:chart>
   <c:spPr>
     <a:noFill/>
@@ -1918,9 +1776,11 @@
 </file>
 
 <file path=ppt/charts/chart4.xml><?xml version="1.0" encoding="utf-8"?>
-<c:chartSpace xmlns:c="http://schemas.openxmlformats.org/drawingml/2006/chart" xmlns:a="http://schemas.openxmlformats.org/drawingml/2006/main" xmlns:r="http://schemas.openxmlformats.org/officeDocument/2006/relationships">
+<c:chartSpace xmlns:c="http://schemas.openxmlformats.org/drawingml/2006/chart" xmlns:a="http://schemas.openxmlformats.org/drawingml/2006/main" xmlns:r="http://schemas.openxmlformats.org/officeDocument/2006/relationships" xmlns:c16r2="http://schemas.microsoft.com/office/drawing/2015/06/chart">
   <c:date1904 val="0"/>
+  <c:lang val="fr-FR"/>
   <c:roundedCorners val="1"/>
+  <c:style val="2"/>
   <c:chart>
     <c:title>
       <c:tx>
@@ -1937,7 +1797,7 @@
               </a:defRPr>
             </a:pPr>
             <a:r>
-              <a:rPr sz="1200" b="0" i="0" u="none" strike="noStrike">
+              <a:rPr lang="fr-FR" sz="1200" b="0" i="0" u="none" strike="noStrike">
                 <a:solidFill>
                   <a:srgbClr val="0B3C5D"/>
                 </a:solidFill>
@@ -1948,13 +1808,13 @@
           </a:p>
         </c:rich>
       </c:tx>
-      <c:layout/>
       <c:overlay val="0"/>
     </c:title>
     <c:autoTitleDeleted val="0"/>
     <c:plotArea>
       <c:layout/>
       <c:lineChart>
+        <c:grouping val="standard"/>
         <c:varyColors val="0"/>
         <c:ser>
           <c:idx val="0"/>
@@ -1971,9 +1831,6 @@
             </c:strRef>
           </c:tx>
           <c:spPr>
-            <a:solidFill>
-              <a:srgbClr val="1D6F9E"/>
-            </a:solidFill>
             <a:ln w="31750" cap="flat">
               <a:solidFill>
                 <a:srgbClr val="1D6F9E"/>
@@ -1983,180 +1840,139 @@
             </a:ln>
             <a:effectLst/>
           </c:spPr>
-          <c:invertIfNegative val="0"/>
-          <c:dLbls>
-            <c:numFmt formatCode="#,##0" sourceLinked="0"/>
-            <c:txPr>
-              <a:bodyPr/>
-              <a:lstStyle/>
-              <a:p>
-                <a:pPr>
-                  <a:defRPr b="0" i="0" strike="noStrike" sz="1200" u="none">
-                    <a:solidFill>
-                      <a:srgbClr val="000000"/>
-                    </a:solidFill>
-                    <a:latin typeface="Arial"/>
-                  </a:defRPr>
-                </a:pPr>
-              </a:p>
-            </c:txPr>
-            <c:showLegendKey val="0"/>
-            <c:showVal val="0"/>
-            <c:showCatName val="0"/>
-            <c:showSerName val="0"/>
-            <c:showPercent val="0"/>
-            <c:showBubbleSize val="0"/>
-            <c:showLeaderLines val="0"/>
-          </c:dLbls>
           <c:marker>
             <c:symbol val="none"/>
-            <c:size val="6"/>
-            <c:spPr>
-              <a:solidFill>
-                <a:srgbClr val="1D6F9E"/>
-              </a:solidFill>
-              <a:ln w="9525" cap="flat">
-                <a:solidFill>
-                  <a:srgbClr val="1D6F9E"/>
-                </a:solidFill>
-                <a:prstDash val="solid"/>
-                <a:round/>
-              </a:ln>
-              <a:effectLst/>
-            </c:spPr>
           </c:marker>
           <c:cat>
-            <c:multiLvlStrRef>
+            <c:strRef>
               <c:f>Sheet1!$A$2:$A$42</c:f>
-              <c:multiLvlStrCache>
+              <c:strCache>
                 <c:ptCount val="41"/>
-                <c:lvl>
-                  <c:pt idx="0">
-                    <c:v>0</c:v>
-                  </c:pt>
-                  <c:pt idx="1">
-                    <c:v>1</c:v>
-                  </c:pt>
-                  <c:pt idx="2">
-                    <c:v>2</c:v>
-                  </c:pt>
-                  <c:pt idx="3">
-                    <c:v>3</c:v>
-                  </c:pt>
-                  <c:pt idx="4">
-                    <c:v>4</c:v>
-                  </c:pt>
-                  <c:pt idx="5">
-                    <c:v>5</c:v>
-                  </c:pt>
-                  <c:pt idx="6">
-                    <c:v>6</c:v>
-                  </c:pt>
-                  <c:pt idx="7">
-                    <c:v>7</c:v>
-                  </c:pt>
-                  <c:pt idx="8">
-                    <c:v>8</c:v>
-                  </c:pt>
-                  <c:pt idx="9">
-                    <c:v>9</c:v>
-                  </c:pt>
-                  <c:pt idx="10">
-                    <c:v>10</c:v>
-                  </c:pt>
-                  <c:pt idx="11">
-                    <c:v>11</c:v>
-                  </c:pt>
-                  <c:pt idx="12">
-                    <c:v>12</c:v>
-                  </c:pt>
-                  <c:pt idx="13">
-                    <c:v>13</c:v>
-                  </c:pt>
-                  <c:pt idx="14">
-                    <c:v>14</c:v>
-                  </c:pt>
-                  <c:pt idx="15">
-                    <c:v>15</c:v>
-                  </c:pt>
-                  <c:pt idx="16">
-                    <c:v>16</c:v>
-                  </c:pt>
-                  <c:pt idx="17">
-                    <c:v>17</c:v>
-                  </c:pt>
-                  <c:pt idx="18">
-                    <c:v>18</c:v>
-                  </c:pt>
-                  <c:pt idx="19">
-                    <c:v>19</c:v>
-                  </c:pt>
-                  <c:pt idx="20">
-                    <c:v>20</c:v>
-                  </c:pt>
-                  <c:pt idx="21">
-                    <c:v>21</c:v>
-                  </c:pt>
-                  <c:pt idx="22">
-                    <c:v>22</c:v>
-                  </c:pt>
-                  <c:pt idx="23">
-                    <c:v>23</c:v>
-                  </c:pt>
-                  <c:pt idx="24">
-                    <c:v>24</c:v>
-                  </c:pt>
-                  <c:pt idx="25">
-                    <c:v>25</c:v>
-                  </c:pt>
-                  <c:pt idx="26">
-                    <c:v>26</c:v>
-                  </c:pt>
-                  <c:pt idx="27">
-                    <c:v>27</c:v>
-                  </c:pt>
-                  <c:pt idx="28">
-                    <c:v>28</c:v>
-                  </c:pt>
-                  <c:pt idx="29">
-                    <c:v>29</c:v>
-                  </c:pt>
-                  <c:pt idx="30">
-                    <c:v>30</c:v>
-                  </c:pt>
-                  <c:pt idx="31">
-                    <c:v>31</c:v>
-                  </c:pt>
-                  <c:pt idx="32">
-                    <c:v>32</c:v>
-                  </c:pt>
-                  <c:pt idx="33">
-                    <c:v>33</c:v>
-                  </c:pt>
-                  <c:pt idx="34">
-                    <c:v>34</c:v>
-                  </c:pt>
-                  <c:pt idx="35">
-                    <c:v>35</c:v>
-                  </c:pt>
-                  <c:pt idx="36">
-                    <c:v>36</c:v>
-                  </c:pt>
-                  <c:pt idx="37">
-                    <c:v>37</c:v>
-                  </c:pt>
-                  <c:pt idx="38">
-                    <c:v>38</c:v>
-                  </c:pt>
-                  <c:pt idx="39">
-                    <c:v>39</c:v>
-                  </c:pt>
-                  <c:pt idx="40">
-                    <c:v>40</c:v>
-                  </c:pt>
-                </c:lvl>
-              </c:multiLvlStrCache>
-            </c:multiLvlStrRef>
+                <c:pt idx="0">
+                  <c:v>0</c:v>
+                </c:pt>
+                <c:pt idx="1">
+                  <c:v>1</c:v>
+                </c:pt>
+                <c:pt idx="2">
+                  <c:v>2</c:v>
+                </c:pt>
+                <c:pt idx="3">
+                  <c:v>3</c:v>
+                </c:pt>
+                <c:pt idx="4">
+                  <c:v>4</c:v>
+                </c:pt>
+                <c:pt idx="5">
+                  <c:v>5</c:v>
+                </c:pt>
+                <c:pt idx="6">
+                  <c:v>6</c:v>
+                </c:pt>
+                <c:pt idx="7">
+                  <c:v>7</c:v>
+                </c:pt>
+                <c:pt idx="8">
+                  <c:v>8</c:v>
+                </c:pt>
+                <c:pt idx="9">
+                  <c:v>9</c:v>
+                </c:pt>
+                <c:pt idx="10">
+                  <c:v>10</c:v>
+                </c:pt>
+                <c:pt idx="11">
+                  <c:v>11</c:v>
+                </c:pt>
+                <c:pt idx="12">
+                  <c:v>12</c:v>
+                </c:pt>
+                <c:pt idx="13">
+                  <c:v>13</c:v>
+                </c:pt>
+                <c:pt idx="14">
+                  <c:v>14</c:v>
+                </c:pt>
+                <c:pt idx="15">
+                  <c:v>15</c:v>
+                </c:pt>
+                <c:pt idx="16">
+                  <c:v>16</c:v>
+                </c:pt>
+                <c:pt idx="17">
+                  <c:v>17</c:v>
+                </c:pt>
+                <c:pt idx="18">
+                  <c:v>18</c:v>
+                </c:pt>
+                <c:pt idx="19">
+                  <c:v>19</c:v>
+                </c:pt>
+                <c:pt idx="20">
+                  <c:v>20</c:v>
+                </c:pt>
+                <c:pt idx="21">
+                  <c:v>21</c:v>
+                </c:pt>
+                <c:pt idx="22">
+                  <c:v>22</c:v>
+                </c:pt>
+                <c:pt idx="23">
+                  <c:v>23</c:v>
+                </c:pt>
+                <c:pt idx="24">
+                  <c:v>24</c:v>
+                </c:pt>
+                <c:pt idx="25">
+                  <c:v>25</c:v>
+                </c:pt>
+                <c:pt idx="26">
+                  <c:v>26</c:v>
+                </c:pt>
+                <c:pt idx="27">
+                  <c:v>27</c:v>
+                </c:pt>
+                <c:pt idx="28">
+                  <c:v>28</c:v>
+                </c:pt>
+                <c:pt idx="29">
+                  <c:v>29</c:v>
+                </c:pt>
+                <c:pt idx="30">
+                  <c:v>30</c:v>
+                </c:pt>
+                <c:pt idx="31">
+                  <c:v>31</c:v>
+                </c:pt>
+                <c:pt idx="32">
+                  <c:v>32</c:v>
+                </c:pt>
+                <c:pt idx="33">
+                  <c:v>33</c:v>
+                </c:pt>
+                <c:pt idx="34">
+                  <c:v>34</c:v>
+                </c:pt>
+                <c:pt idx="35">
+                  <c:v>35</c:v>
+                </c:pt>
+                <c:pt idx="36">
+                  <c:v>36</c:v>
+                </c:pt>
+                <c:pt idx="37">
+                  <c:v>37</c:v>
+                </c:pt>
+                <c:pt idx="38">
+                  <c:v>38</c:v>
+                </c:pt>
+                <c:pt idx="39">
+                  <c:v>39</c:v>
+                </c:pt>
+                <c:pt idx="40">
+                  <c:v>40</c:v>
+                </c:pt>
+              </c:strCache>
+            </c:strRef>
           </c:cat>
           <c:val>
             <c:numRef>
@@ -2165,16 +1981,16 @@
                 <c:formatCode>General</c:formatCode>
                 <c:ptCount val="41"/>
                 <c:pt idx="0">
-                  <c:v>0.011108996538242306</c:v>
+                  <c:v>1.1108996538242306E-2</c:v>
                 </c:pt>
                 <c:pt idx="1">
-                  <c:v>0.022794180883612347</c:v>
+                  <c:v>2.2794180883612347E-2</c:v>
                 </c:pt>
                 <c:pt idx="2">
-                  <c:v>0.04393693362340742</c:v>
+                  <c:v>4.393693362340742E-2</c:v>
                 </c:pt>
                 <c:pt idx="3">
-                  <c:v>0.07955950871822769</c:v>
+                  <c:v>7.9559508718227687E-2</c:v>
                 </c:pt>
                 <c:pt idx="4">
                   <c:v>0.1353352832366127</c:v>
@@ -2189,31 +2005,31 @@
                   <c:v>0.45783336177161427</c:v>
                 </c:pt>
                 <c:pt idx="8">
-                  <c:v>0.6065306597126334</c:v>
+                  <c:v>0.60653065971263342</c:v>
                 </c:pt>
                 <c:pt idx="9">
-                  <c:v>0.7548396019890073</c:v>
+                  <c:v>0.75483960198900735</c:v>
                 </c:pt>
                 <c:pt idx="10">
-                  <c:v>0.8824969025845955</c:v>
+                  <c:v>0.88249690258459546</c:v>
                 </c:pt>
                 <c:pt idx="11">
-                  <c:v>0.9692332344763441</c:v>
+                  <c:v>0.96923323447634413</c:v>
                 </c:pt>
                 <c:pt idx="12">
                   <c:v>1</c:v>
                 </c:pt>
                 <c:pt idx="13">
-                  <c:v>0.9692332344763441</c:v>
+                  <c:v>0.96923323447634413</c:v>
                 </c:pt>
                 <c:pt idx="14">
-                  <c:v>0.8824969025845955</c:v>
+                  <c:v>0.88249690258459546</c:v>
                 </c:pt>
                 <c:pt idx="15">
-                  <c:v>0.7548396019890073</c:v>
+                  <c:v>0.75483960198900735</c:v>
                 </c:pt>
                 <c:pt idx="16">
-                  <c:v>0.6065306597126334</c:v>
+                  <c:v>0.60653065971263342</c:v>
                 </c:pt>
                 <c:pt idx="17">
                   <c:v>0.45783336177161427</c:v>
@@ -2228,69 +2044,74 @@
                   <c:v>0.1353352832366127</c:v>
                 </c:pt>
                 <c:pt idx="21">
-                  <c:v>0.07955950871822769</c:v>
+                  <c:v>7.9559508718227687E-2</c:v>
                 </c:pt>
                 <c:pt idx="22">
-                  <c:v>0.04393693362340742</c:v>
+                  <c:v>4.393693362340742E-2</c:v>
                 </c:pt>
                 <c:pt idx="23">
-                  <c:v>0.022794180883612347</c:v>
+                  <c:v>2.2794180883612347E-2</c:v>
                 </c:pt>
                 <c:pt idx="24">
-                  <c:v>0.011108996538242306</c:v>
+                  <c:v>1.1108996538242306E-2</c:v>
                 </c:pt>
                 <c:pt idx="25">
-                  <c:v>0.005086069231012701</c:v>
+                  <c:v>5.0860692310127006E-3</c:v>
                 </c:pt>
                 <c:pt idx="26">
-                  <c:v>0.002187491118182885</c:v>
+                  <c:v>2.1874911181828851E-3</c:v>
                 </c:pt>
                 <c:pt idx="27">
-                  <c:v>0.00088382630693505</c:v>
+                  <c:v>8.8382630693504996E-4</c:v>
                 </c:pt>
                 <c:pt idx="28">
-                  <c:v>0.00033546262790251185</c:v>
+                  <c:v>3.3546262790251185E-4</c:v>
                 </c:pt>
                 <c:pt idx="29">
-                  <c:v>0.00011961288358102437</c:v>
+                  <c:v>1.1961288358102437E-4</c:v>
                 </c:pt>
                 <c:pt idx="30">
-                  <c:v>0.00004006529739295107</c:v>
+                  <c:v>4.0065297392951069E-5</c:v>
                 </c:pt>
                 <c:pt idx="31">
-                  <c:v>0.000012607105177048523</c:v>
+                  <c:v>1.2607105177048523E-5</c:v>
                 </c:pt>
                 <c:pt idx="32">
-                  <c:v>0.000003726653172078671</c:v>
+                  <c:v>3.7266531720786709E-6</c:v>
                 </c:pt>
                 <c:pt idx="33">
-                  <c:v>0.0000010348542111093753</c:v>
+                  <c:v>1.0348542111093753E-6</c:v>
                 </c:pt>
                 <c:pt idx="34">
-                  <c:v>2.6995785033630146e-7</c:v>
+                  <c:v>2.6995785033630146E-7</c:v>
                 </c:pt>
                 <c:pt idx="35">
-                  <c:v>6.615601637697701e-8</c:v>
+                  <c:v>6.6156016376977008E-8</c:v>
                 </c:pt>
                 <c:pt idx="36">
-                  <c:v>1.522997974471263e-8</c:v>
+                  <c:v>1.5229979744712629E-8</c:v>
                 </c:pt>
                 <c:pt idx="37">
-                  <c:v>3.293714110306081e-9</c:v>
+                  <c:v>3.2937141103060809E-9</c:v>
                 </c:pt>
                 <c:pt idx="38">
-                  <c:v>6.691586091292783e-10</c:v>
+                  <c:v>6.6915860912927826E-10</c:v>
                 </c:pt>
                 <c:pt idx="39">
-                  <c:v>1.2771115545128334e-10</c:v>
+                  <c:v>1.2771115545128334E-10</c:v>
                 </c:pt>
                 <c:pt idx="40">
-                  <c:v>2.289734845645553e-11</c:v>
+                  <c:v>2.289734845645553E-11</c:v>
                 </c:pt>
               </c:numCache>
             </c:numRef>
           </c:val>
           <c:smooth val="1"/>
+          <c:extLst>
+            <c:ext xmlns:c16="http://schemas.microsoft.com/office/drawing/2014/chart" uri="{C3380CC4-5D6E-409C-BE32-E72D297353CC}">
+              <c16:uniqueId val="{00000000-42AF-2C4F-A761-BBC59A8D8860}"/>
+            </c:ext>
+          </c:extLst>
         </c:ser>
         <c:ser>
           <c:idx val="1"/>
@@ -2307,9 +2128,6 @@
             </c:strRef>
           </c:tx>
           <c:spPr>
-            <a:solidFill>
-              <a:srgbClr val="D9822B"/>
-            </a:solidFill>
             <a:ln w="31750" cap="flat">
               <a:solidFill>
                 <a:srgbClr val="D9822B"/>
@@ -2319,180 +2137,139 @@
             </a:ln>
             <a:effectLst/>
           </c:spPr>
-          <c:invertIfNegative val="0"/>
-          <c:dLbls>
-            <c:numFmt formatCode="#,##0" sourceLinked="0"/>
-            <c:txPr>
-              <a:bodyPr/>
-              <a:lstStyle/>
-              <a:p>
-                <a:pPr>
-                  <a:defRPr b="0" i="0" strike="noStrike" sz="1200" u="none">
-                    <a:solidFill>
-                      <a:srgbClr val="000000"/>
-                    </a:solidFill>
-                    <a:latin typeface="Arial"/>
-                  </a:defRPr>
-                </a:pPr>
-              </a:p>
-            </c:txPr>
-            <c:showLegendKey val="0"/>
-            <c:showVal val="0"/>
-            <c:showCatName val="0"/>
-            <c:showSerName val="0"/>
-            <c:showPercent val="0"/>
-            <c:showBubbleSize val="0"/>
-            <c:showLeaderLines val="0"/>
-          </c:dLbls>
           <c:marker>
             <c:symbol val="none"/>
-            <c:size val="6"/>
-            <c:spPr>
-              <a:solidFill>
-                <a:srgbClr val="D9822B"/>
-              </a:solidFill>
-              <a:ln w="9525" cap="flat">
-                <a:solidFill>
-                  <a:srgbClr val="D9822B"/>
-                </a:solidFill>
-                <a:prstDash val="solid"/>
-                <a:round/>
-              </a:ln>
-              <a:effectLst/>
-            </c:spPr>
           </c:marker>
           <c:cat>
-            <c:multiLvlStrRef>
+            <c:strRef>
               <c:f>Sheet1!$A$2:$A$42</c:f>
-              <c:multiLvlStrCache>
+              <c:strCache>
                 <c:ptCount val="41"/>
-                <c:lvl>
-                  <c:pt idx="0">
-                    <c:v>0</c:v>
-                  </c:pt>
-                  <c:pt idx="1">
-                    <c:v>1</c:v>
-                  </c:pt>
-                  <c:pt idx="2">
-                    <c:v>2</c:v>
-                  </c:pt>
-                  <c:pt idx="3">
-                    <c:v>3</c:v>
-                  </c:pt>
-                  <c:pt idx="4">
-                    <c:v>4</c:v>
-                  </c:pt>
-                  <c:pt idx="5">
-                    <c:v>5</c:v>
-                  </c:pt>
-                  <c:pt idx="6">
-                    <c:v>6</c:v>
-                  </c:pt>
-                  <c:pt idx="7">
-                    <c:v>7</c:v>
-                  </c:pt>
-                  <c:pt idx="8">
-                    <c:v>8</c:v>
-                  </c:pt>
-                  <c:pt idx="9">
-                    <c:v>9</c:v>
-                  </c:pt>
-                  <c:pt idx="10">
-                    <c:v>10</c:v>
-                  </c:pt>
-                  <c:pt idx="11">
-                    <c:v>11</c:v>
-                  </c:pt>
-                  <c:pt idx="12">
-                    <c:v>12</c:v>
-                  </c:pt>
-                  <c:pt idx="13">
-                    <c:v>13</c:v>
-                  </c:pt>
-                  <c:pt idx="14">
-                    <c:v>14</c:v>
-                  </c:pt>
-                  <c:pt idx="15">
-                    <c:v>15</c:v>
-                  </c:pt>
-                  <c:pt idx="16">
-                    <c:v>16</c:v>
-                  </c:pt>
-                  <c:pt idx="17">
-                    <c:v>17</c:v>
-                  </c:pt>
-                  <c:pt idx="18">
-                    <c:v>18</c:v>
-                  </c:pt>
-                  <c:pt idx="19">
-                    <c:v>19</c:v>
-                  </c:pt>
-                  <c:pt idx="20">
-                    <c:v>20</c:v>
-                  </c:pt>
-                  <c:pt idx="21">
-                    <c:v>21</c:v>
-                  </c:pt>
-                  <c:pt idx="22">
-                    <c:v>22</c:v>
-                  </c:pt>
-                  <c:pt idx="23">
-                    <c:v>23</c:v>
-                  </c:pt>
-                  <c:pt idx="24">
-                    <c:v>24</c:v>
-                  </c:pt>
-                  <c:pt idx="25">
-                    <c:v>25</c:v>
-                  </c:pt>
-                  <c:pt idx="26">
-                    <c:v>26</c:v>
-                  </c:pt>
-                  <c:pt idx="27">
-                    <c:v>27</c:v>
-                  </c:pt>
-                  <c:pt idx="28">
-                    <c:v>28</c:v>
-                  </c:pt>
-                  <c:pt idx="29">
-                    <c:v>29</c:v>
-                  </c:pt>
-                  <c:pt idx="30">
-                    <c:v>30</c:v>
-                  </c:pt>
-                  <c:pt idx="31">
-                    <c:v>31</c:v>
-                  </c:pt>
-                  <c:pt idx="32">
-                    <c:v>32</c:v>
-                  </c:pt>
-                  <c:pt idx="33">
-                    <c:v>33</c:v>
-                  </c:pt>
-                  <c:pt idx="34">
-                    <c:v>34</c:v>
-                  </c:pt>
-                  <c:pt idx="35">
-                    <c:v>35</c:v>
-                  </c:pt>
-                  <c:pt idx="36">
-                    <c:v>36</c:v>
-                  </c:pt>
-                  <c:pt idx="37">
-                    <c:v>37</c:v>
-                  </c:pt>
-                  <c:pt idx="38">
-                    <c:v>38</c:v>
-                  </c:pt>
-                  <c:pt idx="39">
-                    <c:v>39</c:v>
-                  </c:pt>
-                  <c:pt idx="40">
-                    <c:v>40</c:v>
-                  </c:pt>
-                </c:lvl>
-              </c:multiLvlStrCache>
-            </c:multiLvlStrRef>
+                <c:pt idx="0">
+                  <c:v>0</c:v>
+                </c:pt>
+                <c:pt idx="1">
+                  <c:v>1</c:v>
+                </c:pt>
+                <c:pt idx="2">
+                  <c:v>2</c:v>
+                </c:pt>
+                <c:pt idx="3">
+                  <c:v>3</c:v>
+                </c:pt>
+                <c:pt idx="4">
+                  <c:v>4</c:v>
+                </c:pt>
+                <c:pt idx="5">
+                  <c:v>5</c:v>
+                </c:pt>
+                <c:pt idx="6">
+                  <c:v>6</c:v>
+                </c:pt>
+                <c:pt idx="7">
+                  <c:v>7</c:v>
+                </c:pt>
+                <c:pt idx="8">
+                  <c:v>8</c:v>
+                </c:pt>
+                <c:pt idx="9">
+                  <c:v>9</c:v>
+                </c:pt>
+                <c:pt idx="10">
+                  <c:v>10</c:v>
+                </c:pt>
+                <c:pt idx="11">
+                  <c:v>11</c:v>
+                </c:pt>
+                <c:pt idx="12">
+                  <c:v>12</c:v>
+                </c:pt>
+                <c:pt idx="13">
+                  <c:v>13</c:v>
+                </c:pt>
+                <c:pt idx="14">
+                  <c:v>14</c:v>
+                </c:pt>
+                <c:pt idx="15">
+                  <c:v>15</c:v>
+                </c:pt>
+                <c:pt idx="16">
+                  <c:v>16</c:v>
+                </c:pt>
+                <c:pt idx="17">
+                  <c:v>17</c:v>
+                </c:pt>
+                <c:pt idx="18">
+                  <c:v>18</c:v>
+                </c:pt>
+                <c:pt idx="19">
+                  <c:v>19</c:v>
+                </c:pt>
+                <c:pt idx="20">
+                  <c:v>20</c:v>
+                </c:pt>
+                <c:pt idx="21">
+                  <c:v>21</c:v>
+                </c:pt>
+                <c:pt idx="22">
+                  <c:v>22</c:v>
+                </c:pt>
+                <c:pt idx="23">
+                  <c:v>23</c:v>
+                </c:pt>
+                <c:pt idx="24">
+                  <c:v>24</c:v>
+                </c:pt>
+                <c:pt idx="25">
+                  <c:v>25</c:v>
+                </c:pt>
+                <c:pt idx="26">
+                  <c:v>26</c:v>
+                </c:pt>
+                <c:pt idx="27">
+                  <c:v>27</c:v>
+                </c:pt>
+                <c:pt idx="28">
+                  <c:v>28</c:v>
+                </c:pt>
+                <c:pt idx="29">
+                  <c:v>29</c:v>
+                </c:pt>
+                <c:pt idx="30">
+                  <c:v>30</c:v>
+                </c:pt>
+                <c:pt idx="31">
+                  <c:v>31</c:v>
+                </c:pt>
+                <c:pt idx="32">
+                  <c:v>32</c:v>
+                </c:pt>
+                <c:pt idx="33">
+                  <c:v>33</c:v>
+                </c:pt>
+                <c:pt idx="34">
+                  <c:v>34</c:v>
+                </c:pt>
+                <c:pt idx="35">
+                  <c:v>35</c:v>
+                </c:pt>
+                <c:pt idx="36">
+                  <c:v>36</c:v>
+                </c:pt>
+                <c:pt idx="37">
+                  <c:v>37</c:v>
+                </c:pt>
+                <c:pt idx="38">
+                  <c:v>38</c:v>
+                </c:pt>
+                <c:pt idx="39">
+                  <c:v>39</c:v>
+                </c:pt>
+                <c:pt idx="40">
+                  <c:v>40</c:v>
+                </c:pt>
+              </c:strCache>
+            </c:strRef>
           </c:cat>
           <c:val>
             <c:numRef>
@@ -2501,37 +2278,37 @@
                 <c:formatCode>General</c:formatCode>
                 <c:ptCount val="41"/>
                 <c:pt idx="0">
-                  <c:v>0.000842701996379742</c:v>
+                  <c:v>8.4270199637974201E-4</c:v>
                 </c:pt>
                 <c:pt idx="1">
-                  <c:v>0.0015312437827280194</c:v>
+                  <c:v>1.5312437827280194E-3</c:v>
                 </c:pt>
                 <c:pt idx="2">
-                  <c:v>0.002706144097630965</c:v>
+                  <c:v>2.7061440976309651E-3</c:v>
                 </c:pt>
                 <c:pt idx="3">
-                  <c:v>0.004651507897918979</c:v>
+                  <c:v>4.6515078979189788E-3</c:v>
                 </c:pt>
                 <c:pt idx="4">
-                  <c:v>0.0077762975767696136</c:v>
+                  <c:v>7.7762975767696136E-3</c:v>
                 </c:pt>
                 <c:pt idx="5">
-                  <c:v>0.012644109393846891</c:v>
+                  <c:v>1.2644109393846891E-2</c:v>
                 </c:pt>
                 <c:pt idx="6">
-                  <c:v>0.019995850549185262</c:v>
+                  <c:v>1.9995850549185262E-2</c:v>
                 </c:pt>
                 <c:pt idx="7">
-                  <c:v>0.030755853536385193</c:v>
+                  <c:v>3.0755853536385193E-2</c:v>
                 </c:pt>
                 <c:pt idx="8">
-                  <c:v>0.046009970031571326</c:v>
+                  <c:v>4.6009970031571326E-2</c:v>
                 </c:pt>
                 <c:pt idx="9">
-                  <c:v>0.06694411138277702</c:v>
+                  <c:v>6.6944111382777019E-2</c:v>
                 </c:pt>
                 <c:pt idx="10">
-                  <c:v>0.09473469826562889</c:v>
+                  <c:v>9.4734698265628886E-2</c:v>
                 </c:pt>
                 <c:pt idx="11">
                   <c:v>0.13038932458839061</c:v>
@@ -2543,7 +2320,7 @@
                   <c:v>0.2272567271508448</c:v>
                 </c:pt>
                 <c:pt idx="14">
-                  <c:v>0.2877786033550312</c:v>
+                  <c:v>0.28777860335503119</c:v>
                 </c:pt>
                 <c:pt idx="15">
                   <c:v>0.35443493165367035</c:v>
@@ -2552,37 +2329,37 @@
                   <c:v>0.42457146179884336</c:v>
                 </c:pt>
                 <c:pt idx="17">
-                  <c:v>0.4946537945004014</c:v>
+                  <c:v>0.49465379450040142</c:v>
                 </c:pt>
                 <c:pt idx="18">
-                  <c:v>0.5605161820417656</c:v>
+                  <c:v>0.56051618204176556</c:v>
                 </c:pt>
                 <c:pt idx="19">
-                  <c:v>0.6177478318092168</c:v>
+                  <c:v>0.61774783180921677</c:v>
                 </c:pt>
                 <c:pt idx="20">
-                  <c:v>0.6621716282347357</c:v>
+                  <c:v>0.66217162823473574</c:v>
                 </c:pt>
                 <c:pt idx="21">
-                  <c:v>0.6903449817207413</c:v>
+                  <c:v>0.69034498172074132</c:v>
                 </c:pt>
                 <c:pt idx="22">
                   <c:v>0.7</c:v>
                 </c:pt>
                 <c:pt idx="23">
-                  <c:v>0.6903449817207413</c:v>
+                  <c:v>0.69034498172074132</c:v>
                 </c:pt>
                 <c:pt idx="24">
-                  <c:v>0.6621716282347357</c:v>
+                  <c:v>0.66217162823473574</c:v>
                 </c:pt>
                 <c:pt idx="25">
-                  <c:v>0.6177478318092168</c:v>
+                  <c:v>0.61774783180921677</c:v>
                 </c:pt>
                 <c:pt idx="26">
-                  <c:v>0.5605161820417656</c:v>
+                  <c:v>0.56051618204176556</c:v>
                 </c:pt>
                 <c:pt idx="27">
-                  <c:v>0.4946537945004014</c:v>
+                  <c:v>0.49465379450040142</c:v>
                 </c:pt>
                 <c:pt idx="28">
                   <c:v>0.42457146179884336</c:v>
@@ -2591,7 +2368,7 @@
                   <c:v>0.35443493165367035</c:v>
                 </c:pt>
                 <c:pt idx="30">
-                  <c:v>0.2877786033550312</c:v>
+                  <c:v>0.28777860335503119</c:v>
                 </c:pt>
                 <c:pt idx="31">
                   <c:v>0.2272567271508448</c:v>
@@ -2603,30 +2380,35 @@
                   <c:v>0.13038932458839061</c:v>
                 </c:pt>
                 <c:pt idx="34">
-                  <c:v>0.09473469826562889</c:v>
+                  <c:v>9.4734698265628886E-2</c:v>
                 </c:pt>
                 <c:pt idx="35">
-                  <c:v>0.06694411138277702</c:v>
+                  <c:v>6.6944111382777019E-2</c:v>
                 </c:pt>
                 <c:pt idx="36">
-                  <c:v>0.046009970031571326</c:v>
+                  <c:v>4.6009970031571326E-2</c:v>
                 </c:pt>
                 <c:pt idx="37">
-                  <c:v>0.030755853536385193</c:v>
+                  <c:v>3.0755853536385193E-2</c:v>
                 </c:pt>
                 <c:pt idx="38">
-                  <c:v>0.019995850549185262</c:v>
+                  <c:v>1.9995850549185262E-2</c:v>
                 </c:pt>
                 <c:pt idx="39">
-                  <c:v>0.012644109393846891</c:v>
+                  <c:v>1.2644109393846891E-2</c:v>
                 </c:pt>
                 <c:pt idx="40">
-                  <c:v>0.0077762975767696136</c:v>
+                  <c:v>7.7762975767696136E-3</c:v>
                 </c:pt>
               </c:numCache>
             </c:numRef>
           </c:val>
           <c:smooth val="1"/>
+          <c:extLst>
+            <c:ext xmlns:c16="http://schemas.microsoft.com/office/drawing/2014/chart" uri="{C3380CC4-5D6E-409C-BE32-E72D297353CC}">
+              <c16:uniqueId val="{00000001-42AF-2C4F-A761-BBC59A8D8860}"/>
+            </c:ext>
+          </c:extLst>
         </c:ser>
         <c:ser>
           <c:idx val="2"/>
@@ -2643,9 +2425,6 @@
             </c:strRef>
           </c:tx>
           <c:spPr>
-            <a:solidFill>
-              <a:srgbClr val="3A7D44"/>
-            </a:solidFill>
             <a:ln w="31750" cap="flat">
               <a:solidFill>
                 <a:srgbClr val="3A7D44"/>
@@ -2655,180 +2434,139 @@
             </a:ln>
             <a:effectLst/>
           </c:spPr>
-          <c:invertIfNegative val="0"/>
-          <c:dLbls>
-            <c:numFmt formatCode="#,##0" sourceLinked="0"/>
-            <c:txPr>
-              <a:bodyPr/>
-              <a:lstStyle/>
-              <a:p>
-                <a:pPr>
-                  <a:defRPr b="0" i="0" strike="noStrike" sz="1200" u="none">
-                    <a:solidFill>
-                      <a:srgbClr val="000000"/>
-                    </a:solidFill>
-                    <a:latin typeface="Arial"/>
-                  </a:defRPr>
-                </a:pPr>
-              </a:p>
-            </c:txPr>
-            <c:showLegendKey val="0"/>
-            <c:showVal val="0"/>
-            <c:showCatName val="0"/>
-            <c:showSerName val="0"/>
-            <c:showPercent val="0"/>
-            <c:showBubbleSize val="0"/>
-            <c:showLeaderLines val="0"/>
-          </c:dLbls>
           <c:marker>
             <c:symbol val="none"/>
-            <c:size val="6"/>
-            <c:spPr>
-              <a:solidFill>
-                <a:srgbClr val="3A7D44"/>
-              </a:solidFill>
-              <a:ln w="9525" cap="flat">
-                <a:solidFill>
-                  <a:srgbClr val="3A7D44"/>
-                </a:solidFill>
-                <a:prstDash val="solid"/>
-                <a:round/>
-              </a:ln>
-              <a:effectLst/>
-            </c:spPr>
           </c:marker>
           <c:cat>
-            <c:multiLvlStrRef>
+            <c:strRef>
               <c:f>Sheet1!$A$2:$A$42</c:f>
-              <c:multiLvlStrCache>
+              <c:strCache>
                 <c:ptCount val="41"/>
-                <c:lvl>
-                  <c:pt idx="0">
-                    <c:v>0</c:v>
-                  </c:pt>
-                  <c:pt idx="1">
-                    <c:v>1</c:v>
-                  </c:pt>
-                  <c:pt idx="2">
-                    <c:v>2</c:v>
-                  </c:pt>
-                  <c:pt idx="3">
-                    <c:v>3</c:v>
-                  </c:pt>
-                  <c:pt idx="4">
-                    <c:v>4</c:v>
-                  </c:pt>
-                  <c:pt idx="5">
-                    <c:v>5</c:v>
-                  </c:pt>
-                  <c:pt idx="6">
-                    <c:v>6</c:v>
-                  </c:pt>
-                  <c:pt idx="7">
-                    <c:v>7</c:v>
-                  </c:pt>
-                  <c:pt idx="8">
-                    <c:v>8</c:v>
-                  </c:pt>
-                  <c:pt idx="9">
-                    <c:v>9</c:v>
-                  </c:pt>
-                  <c:pt idx="10">
-                    <c:v>10</c:v>
-                  </c:pt>
-                  <c:pt idx="11">
-                    <c:v>11</c:v>
-                  </c:pt>
-                  <c:pt idx="12">
-                    <c:v>12</c:v>
-                  </c:pt>
-                  <c:pt idx="13">
-                    <c:v>13</c:v>
-                  </c:pt>
-                  <c:pt idx="14">
-                    <c:v>14</c:v>
-                  </c:pt>
-                  <c:pt idx="15">
-                    <c:v>15</c:v>
-                  </c:pt>
-                  <c:pt idx="16">
-                    <c:v>16</c:v>
-                  </c:pt>
-                  <c:pt idx="17">
-                    <c:v>17</c:v>
-                  </c:pt>
-                  <c:pt idx="18">
-                    <c:v>18</c:v>
-                  </c:pt>
-                  <c:pt idx="19">
-                    <c:v>19</c:v>
-                  </c:pt>
-                  <c:pt idx="20">
-                    <c:v>20</c:v>
-                  </c:pt>
-                  <c:pt idx="21">
-                    <c:v>21</c:v>
-                  </c:pt>
-                  <c:pt idx="22">
-                    <c:v>22</c:v>
-                  </c:pt>
-                  <c:pt idx="23">
-                    <c:v>23</c:v>
-                  </c:pt>
-                  <c:pt idx="24">
-                    <c:v>24</c:v>
-                  </c:pt>
-                  <c:pt idx="25">
-                    <c:v>25</c:v>
-                  </c:pt>
-                  <c:pt idx="26">
-                    <c:v>26</c:v>
-                  </c:pt>
-                  <c:pt idx="27">
-                    <c:v>27</c:v>
-                  </c:pt>
-                  <c:pt idx="28">
-                    <c:v>28</c:v>
-                  </c:pt>
-                  <c:pt idx="29">
-                    <c:v>29</c:v>
-                  </c:pt>
-                  <c:pt idx="30">
-                    <c:v>30</c:v>
-                  </c:pt>
-                  <c:pt idx="31">
-                    <c:v>31</c:v>
-                  </c:pt>
-                  <c:pt idx="32">
-                    <c:v>32</c:v>
-                  </c:pt>
-                  <c:pt idx="33">
-                    <c:v>33</c:v>
-                  </c:pt>
-                  <c:pt idx="34">
-                    <c:v>34</c:v>
-                  </c:pt>
-                  <c:pt idx="35">
-                    <c:v>35</c:v>
-                  </c:pt>
-                  <c:pt idx="36">
-                    <c:v>36</c:v>
-                  </c:pt>
-                  <c:pt idx="37">
-                    <c:v>37</c:v>
-                  </c:pt>
-                  <c:pt idx="38">
-                    <c:v>38</c:v>
-                  </c:pt>
-                  <c:pt idx="39">
-                    <c:v>39</c:v>
-                  </c:pt>
-                  <c:pt idx="40">
-                    <c:v>40</c:v>
-                  </c:pt>
-                </c:lvl>
-              </c:multiLvlStrCache>
-            </c:multiLvlStrRef>
+                <c:pt idx="0">
+                  <c:v>0</c:v>
+                </c:pt>
+                <c:pt idx="1">
+                  <c:v>1</c:v>
+                </c:pt>
+                <c:pt idx="2">
+                  <c:v>2</c:v>
+                </c:pt>
+                <c:pt idx="3">
+                  <c:v>3</c:v>
+                </c:pt>
+                <c:pt idx="4">
+                  <c:v>4</c:v>
+                </c:pt>
+                <c:pt idx="5">
+                  <c:v>5</c:v>
+                </c:pt>
+                <c:pt idx="6">
+                  <c:v>6</c:v>
+                </c:pt>
+                <c:pt idx="7">
+                  <c:v>7</c:v>
+                </c:pt>
+                <c:pt idx="8">
+                  <c:v>8</c:v>
+                </c:pt>
+                <c:pt idx="9">
+                  <c:v>9</c:v>
+                </c:pt>
+                <c:pt idx="10">
+                  <c:v>10</c:v>
+                </c:pt>
+                <c:pt idx="11">
+                  <c:v>11</c:v>
+                </c:pt>
+                <c:pt idx="12">
+                  <c:v>12</c:v>
+                </c:pt>
+                <c:pt idx="13">
+                  <c:v>13</c:v>
+                </c:pt>
+                <c:pt idx="14">
+                  <c:v>14</c:v>
+                </c:pt>
+                <c:pt idx="15">
+                  <c:v>15</c:v>
+                </c:pt>
+                <c:pt idx="16">
+                  <c:v>16</c:v>
+                </c:pt>
+                <c:pt idx="17">
+                  <c:v>17</c:v>
+                </c:pt>
+                <c:pt idx="18">
+                  <c:v>18</c:v>
+                </c:pt>
+                <c:pt idx="19">
+                  <c:v>19</c:v>
+                </c:pt>
+                <c:pt idx="20">
+                  <c:v>20</c:v>
+                </c:pt>
+                <c:pt idx="21">
+                  <c:v>21</c:v>
+                </c:pt>
+                <c:pt idx="22">
+                  <c:v>22</c:v>
+                </c:pt>
+                <c:pt idx="23">
+                  <c:v>23</c:v>
+                </c:pt>
+                <c:pt idx="24">
+                  <c:v>24</c:v>
+                </c:pt>
+                <c:pt idx="25">
+                  <c:v>25</c:v>
+                </c:pt>
+                <c:pt idx="26">
+                  <c:v>26</c:v>
+                </c:pt>
+                <c:pt idx="27">
+                  <c:v>27</c:v>
+                </c:pt>
+                <c:pt idx="28">
+                  <c:v>28</c:v>
+                </c:pt>
+                <c:pt idx="29">
+                  <c:v>29</c:v>
+                </c:pt>
+                <c:pt idx="30">
+                  <c:v>30</c:v>
+                </c:pt>
+                <c:pt idx="31">
+                  <c:v>31</c:v>
+                </c:pt>
+                <c:pt idx="32">
+                  <c:v>32</c:v>
+                </c:pt>
+                <c:pt idx="33">
+                  <c:v>33</c:v>
+                </c:pt>
+                <c:pt idx="34">
+                  <c:v>34</c:v>
+                </c:pt>
+                <c:pt idx="35">
+                  <c:v>35</c:v>
+                </c:pt>
+                <c:pt idx="36">
+                  <c:v>36</c:v>
+                </c:pt>
+                <c:pt idx="37">
+                  <c:v>37</c:v>
+                </c:pt>
+                <c:pt idx="38">
+                  <c:v>38</c:v>
+                </c:pt>
+                <c:pt idx="39">
+                  <c:v>39</c:v>
+                </c:pt>
+                <c:pt idx="40">
+                  <c:v>40</c:v>
+                </c:pt>
+              </c:strCache>
+            </c:strRef>
           </c:cat>
           <c:val>
             <c:numRef>
@@ -2837,82 +2575,82 @@
                 <c:formatCode>General</c:formatCode>
                 <c:ptCount val="41"/>
                 <c:pt idx="0">
-                  <c:v>1.768935441747307e-25</c:v>
+                  <c:v>1.7689354417473069E-25</c:v>
                 </c:pt>
                 <c:pt idx="1">
-                  <c:v>5.857909663921111e-24</c:v>
+                  <c:v>5.8579096639211108E-24</c:v>
                 </c:pt>
                 <c:pt idx="2">
-                  <c:v>1.735874863167526e-22</c:v>
+                  <c:v>1.735874863167526E-22</c:v>
                 </c:pt>
                 <c:pt idx="3">
-                  <c:v>4.60298135862334e-21</c:v>
+                  <c:v>4.6029813586233398E-21</c:v>
                 </c:pt>
                 <c:pt idx="4">
-                  <c:v>1.0922073013132163e-19</c:v>
+                  <c:v>1.0922073013132163E-19</c:v>
                 </c:pt>
                 <c:pt idx="5">
-                  <c:v>2.319081398239483e-18</c:v>
+                  <c:v>2.3190813982394832E-18</c:v>
                 </c:pt>
                 <c:pt idx="6">
-                  <c:v>4.406278738127472e-17</c:v>
+                  <c:v>4.4062787381274719E-17</c:v>
                 </c:pt>
                 <c:pt idx="7">
-                  <c:v>7.49157270928305e-16</c:v>
+                  <c:v>7.4915727092830502E-16</c:v>
                 </c:pt>
                 <c:pt idx="8">
-                  <c:v>1.1397748994184758e-14</c:v>
+                  <c:v>1.1397748994184758E-14</c:v>
                 </c:pt>
                 <c:pt idx="9">
-                  <c:v>1.5517088451319608e-13</c:v>
+                  <c:v>1.5517088451319608E-13</c:v>
                 </c:pt>
                 <c:pt idx="10">
-                  <c:v>1.8903683634590275e-12</c:v>
+                  <c:v>1.8903683634590275E-12</c:v>
                 </c:pt>
                 <c:pt idx="11">
-                  <c:v>2.0607613610809977e-11</c:v>
+                  <c:v>2.0607613610809977E-11</c:v>
                 </c:pt>
                 <c:pt idx="12">
-                  <c:v>2.0102682925828495e-10</c:v>
+                  <c:v>2.0102682925828495E-10</c:v>
                 </c:pt>
                 <c:pt idx="13">
-                  <c:v>1.7547910074155077e-9</c:v>
+                  <c:v>1.7547910074155077E-9</c:v>
                 </c:pt>
                 <c:pt idx="14">
-                  <c:v>1.3706981770241366e-8</c:v>
+                  <c:v>1.3706981770241366E-8</c:v>
                 </c:pt>
                 <c:pt idx="15">
-                  <c:v>9.580834269968422e-8</c:v>
+                  <c:v>9.5808342699684224E-8</c:v>
                 </c:pt>
                 <c:pt idx="16">
-                  <c:v>5.992525322871584e-7</c:v>
+                  <c:v>5.9925253228715835E-7</c:v>
                 </c:pt>
                 <c:pt idx="17">
-                  <c:v>0.000003353987854870804</c:v>
+                  <c:v>3.3539878548708038E-6</c:v>
                 </c:pt>
                 <c:pt idx="18">
-                  <c:v>0.000016798022202168514</c:v>
+                  <c:v>1.6798022202168514E-5</c:v>
                 </c:pt>
                 <c:pt idx="19">
-                  <c:v>0.00007528351250675477</c:v>
+                  <c:v>7.5283512506754772E-5</c:v>
                 </c:pt>
                 <c:pt idx="20">
-                  <c:v>0.0003019163651122607</c:v>
+                  <c:v>3.0191636511226068E-4</c:v>
                 </c:pt>
                 <c:pt idx="21">
-                  <c:v>0.0010834739953453827</c:v>
+                  <c:v>1.0834739953453827E-3</c:v>
                 </c:pt>
                 <c:pt idx="22">
-                  <c:v>0.003479328125525527</c:v>
+                  <c:v>3.4793281255255269E-3</c:v>
                 </c:pt>
                 <c:pt idx="23">
-                  <c:v>0.009998096884418075</c:v>
+                  <c:v>9.998096884418075E-3</c:v>
                 </c:pt>
                 <c:pt idx="24">
-                  <c:v>0.02570895070609534</c:v>
+                  <c:v>2.570895070609534E-2</c:v>
                 </c:pt>
                 <c:pt idx="25">
-                  <c:v>0.05915567575487743</c:v>
+                  <c:v>5.9155675754877429E-2</c:v>
                 </c:pt>
                 <c:pt idx="26">
                   <c:v>0.12180175491295143</c:v>
@@ -2921,31 +2659,31 @@
                   <c:v>0.2244169878995666</c:v>
                 </c:pt>
                 <c:pt idx="28">
-                  <c:v>0.3700010614564687</c:v>
+                  <c:v>0.37000106145646872</c:v>
                 </c:pt>
                 <c:pt idx="29">
-                  <c:v>0.5458775937413701</c:v>
+                  <c:v>0.54587759374137013</c:v>
                 </c:pt>
                 <c:pt idx="30">
-                  <c:v>0.7206636626251273</c:v>
+                  <c:v>0.72066366262512727</c:v>
                 </c:pt>
                 <c:pt idx="31">
-                  <c:v>0.8513635220160889</c:v>
+                  <c:v>0.85136352201608889</c:v>
                 </c:pt>
                 <c:pt idx="32">
                   <c:v>0.9</c:v>
                 </c:pt>
                 <c:pt idx="33">
-                  <c:v>0.8513635220160889</c:v>
+                  <c:v>0.85136352201608889</c:v>
                 </c:pt>
                 <c:pt idx="34">
-                  <c:v>0.7206636626251273</c:v>
+                  <c:v>0.72066366262512727</c:v>
                 </c:pt>
                 <c:pt idx="35">
-                  <c:v>0.5458775937413701</c:v>
+                  <c:v>0.54587759374137013</c:v>
                 </c:pt>
                 <c:pt idx="36">
-                  <c:v>0.3700010614564687</c:v>
+                  <c:v>0.37000106145646872</c:v>
                 </c:pt>
                 <c:pt idx="37">
                   <c:v>0.2244169878995666</c:v>
@@ -2954,15 +2692,20 @@
                   <c:v>0.12180175491295143</c:v>
                 </c:pt>
                 <c:pt idx="39">
-                  <c:v>0.05915567575487743</c:v>
+                  <c:v>5.9155675754877429E-2</c:v>
                 </c:pt>
                 <c:pt idx="40">
-                  <c:v>0.02570895070609534</c:v>
+                  <c:v>2.570895070609534E-2</c:v>
                 </c:pt>
               </c:numCache>
             </c:numRef>
           </c:val>
           <c:smooth val="1"/>
+          <c:extLst>
+            <c:ext xmlns:c16="http://schemas.microsoft.com/office/drawing/2014/chart" uri="{C3380CC4-5D6E-409C-BE32-E72D297353CC}">
+              <c16:uniqueId val="{00000002-42AF-2C4F-A761-BBC59A8D8860}"/>
+            </c:ext>
+          </c:extLst>
         </c:ser>
         <c:ser>
           <c:idx val="3"/>
@@ -2979,9 +2722,6 @@
             </c:strRef>
           </c:tx>
           <c:spPr>
-            <a:solidFill>
-              <a:srgbClr val="0B3C5D"/>
-            </a:solidFill>
             <a:ln w="31750" cap="flat">
               <a:solidFill>
                 <a:srgbClr val="0B3C5D"/>
@@ -2991,180 +2731,139 @@
             </a:ln>
             <a:effectLst/>
           </c:spPr>
-          <c:invertIfNegative val="0"/>
-          <c:dLbls>
-            <c:numFmt formatCode="#,##0" sourceLinked="0"/>
-            <c:txPr>
-              <a:bodyPr/>
-              <a:lstStyle/>
-              <a:p>
-                <a:pPr>
-                  <a:defRPr b="0" i="0" strike="noStrike" sz="1200" u="none">
-                    <a:solidFill>
-                      <a:srgbClr val="000000"/>
-                    </a:solidFill>
-                    <a:latin typeface="Arial"/>
-                  </a:defRPr>
-                </a:pPr>
-              </a:p>
-            </c:txPr>
-            <c:showLegendKey val="0"/>
-            <c:showVal val="0"/>
-            <c:showCatName val="0"/>
-            <c:showSerName val="0"/>
-            <c:showPercent val="0"/>
-            <c:showBubbleSize val="0"/>
-            <c:showLeaderLines val="0"/>
-          </c:dLbls>
           <c:marker>
             <c:symbol val="none"/>
-            <c:size val="6"/>
-            <c:spPr>
-              <a:solidFill>
-                <a:srgbClr val="0B3C5D"/>
-              </a:solidFill>
-              <a:ln w="9525" cap="flat">
-                <a:solidFill>
-                  <a:srgbClr val="0B3C5D"/>
-                </a:solidFill>
-                <a:prstDash val="solid"/>
-                <a:round/>
-              </a:ln>
-              <a:effectLst/>
-            </c:spPr>
           </c:marker>
           <c:cat>
-            <c:multiLvlStrRef>
+            <c:strRef>
               <c:f>Sheet1!$A$2:$A$42</c:f>
-              <c:multiLvlStrCache>
+              <c:strCache>
                 <c:ptCount val="41"/>
-                <c:lvl>
-                  <c:pt idx="0">
-                    <c:v>0</c:v>
-                  </c:pt>
-                  <c:pt idx="1">
-                    <c:v>1</c:v>
-                  </c:pt>
-                  <c:pt idx="2">
-                    <c:v>2</c:v>
-                  </c:pt>
-                  <c:pt idx="3">
-                    <c:v>3</c:v>
-                  </c:pt>
-                  <c:pt idx="4">
-                    <c:v>4</c:v>
-                  </c:pt>
-                  <c:pt idx="5">
-                    <c:v>5</c:v>
-                  </c:pt>
-                  <c:pt idx="6">
-                    <c:v>6</c:v>
-                  </c:pt>
-                  <c:pt idx="7">
-                    <c:v>7</c:v>
-                  </c:pt>
-                  <c:pt idx="8">
-                    <c:v>8</c:v>
-                  </c:pt>
-                  <c:pt idx="9">
-                    <c:v>9</c:v>
-                  </c:pt>
-                  <c:pt idx="10">
-                    <c:v>10</c:v>
-                  </c:pt>
-                  <c:pt idx="11">
-                    <c:v>11</c:v>
-                  </c:pt>
-                  <c:pt idx="12">
-                    <c:v>12</c:v>
-                  </c:pt>
-                  <c:pt idx="13">
-                    <c:v>13</c:v>
-                  </c:pt>
-                  <c:pt idx="14">
-                    <c:v>14</c:v>
-                  </c:pt>
-                  <c:pt idx="15">
-                    <c:v>15</c:v>
-                  </c:pt>
-                  <c:pt idx="16">
-                    <c:v>16</c:v>
-                  </c:pt>
-                  <c:pt idx="17">
-                    <c:v>17</c:v>
-                  </c:pt>
-                  <c:pt idx="18">
-                    <c:v>18</c:v>
-                  </c:pt>
-                  <c:pt idx="19">
-                    <c:v>19</c:v>
-                  </c:pt>
-                  <c:pt idx="20">
-                    <c:v>20</c:v>
-                  </c:pt>
-                  <c:pt idx="21">
-                    <c:v>21</c:v>
-                  </c:pt>
-                  <c:pt idx="22">
-                    <c:v>22</c:v>
-                  </c:pt>
-                  <c:pt idx="23">
-                    <c:v>23</c:v>
-                  </c:pt>
-                  <c:pt idx="24">
-                    <c:v>24</c:v>
-                  </c:pt>
-                  <c:pt idx="25">
-                    <c:v>25</c:v>
-                  </c:pt>
-                  <c:pt idx="26">
-                    <c:v>26</c:v>
-                  </c:pt>
-                  <c:pt idx="27">
-                    <c:v>27</c:v>
-                  </c:pt>
-                  <c:pt idx="28">
-                    <c:v>28</c:v>
-                  </c:pt>
-                  <c:pt idx="29">
-                    <c:v>29</c:v>
-                  </c:pt>
-                  <c:pt idx="30">
-                    <c:v>30</c:v>
-                  </c:pt>
-                  <c:pt idx="31">
-                    <c:v>31</c:v>
-                  </c:pt>
-                  <c:pt idx="32">
-                    <c:v>32</c:v>
-                  </c:pt>
-                  <c:pt idx="33">
-                    <c:v>33</c:v>
-                  </c:pt>
-                  <c:pt idx="34">
-                    <c:v>34</c:v>
-                  </c:pt>
-                  <c:pt idx="35">
-                    <c:v>35</c:v>
-                  </c:pt>
-                  <c:pt idx="36">
-                    <c:v>36</c:v>
-                  </c:pt>
-                  <c:pt idx="37">
-                    <c:v>37</c:v>
-                  </c:pt>
-                  <c:pt idx="38">
-                    <c:v>38</c:v>
-                  </c:pt>
-                  <c:pt idx="39">
-                    <c:v>39</c:v>
-                  </c:pt>
-                  <c:pt idx="40">
-                    <c:v>40</c:v>
-                  </c:pt>
-                </c:lvl>
-              </c:multiLvlStrCache>
-            </c:multiLvlStrRef>
+                <c:pt idx="0">
+                  <c:v>0</c:v>
+                </c:pt>
+                <c:pt idx="1">
+                  <c:v>1</c:v>
+                </c:pt>
+                <c:pt idx="2">
+                  <c:v>2</c:v>
+                </c:pt>
+                <c:pt idx="3">
+                  <c:v>3</c:v>
+                </c:pt>
+                <c:pt idx="4">
+                  <c:v>4</c:v>
+                </c:pt>
+                <c:pt idx="5">
+                  <c:v>5</c:v>
+                </c:pt>
+                <c:pt idx="6">
+                  <c:v>6</c:v>
+                </c:pt>
+                <c:pt idx="7">
+                  <c:v>7</c:v>
+                </c:pt>
+                <c:pt idx="8">
+                  <c:v>8</c:v>
+                </c:pt>
+                <c:pt idx="9">
+                  <c:v>9</c:v>
+                </c:pt>
+                <c:pt idx="10">
+                  <c:v>10</c:v>
+                </c:pt>
+                <c:pt idx="11">
+                  <c:v>11</c:v>
+                </c:pt>
+                <c:pt idx="12">
+                  <c:v>12</c:v>
+                </c:pt>
+                <c:pt idx="13">
+                  <c:v>13</c:v>
+                </c:pt>
+                <c:pt idx="14">
+                  <c:v>14</c:v>
+                </c:pt>
+                <c:pt idx="15">
+                  <c:v>15</c:v>
+                </c:pt>
+                <c:pt idx="16">
+                  <c:v>16</c:v>
+                </c:pt>
+                <c:pt idx="17">
+                  <c:v>17</c:v>
+                </c:pt>
+                <c:pt idx="18">
+                  <c:v>18</c:v>
+                </c:pt>
+                <c:pt idx="19">
+                  <c:v>19</c:v>
+                </c:pt>
+                <c:pt idx="20">
+                  <c:v>20</c:v>
+                </c:pt>
+                <c:pt idx="21">
+                  <c:v>21</c:v>
+                </c:pt>
+                <c:pt idx="22">
+                  <c:v>22</c:v>
+                </c:pt>
+                <c:pt idx="23">
+                  <c:v>23</c:v>
+                </c:pt>
+                <c:pt idx="24">
+                  <c:v>24</c:v>
+                </c:pt>
+                <c:pt idx="25">
+                  <c:v>25</c:v>
+                </c:pt>
+                <c:pt idx="26">
+                  <c:v>26</c:v>
+                </c:pt>
+                <c:pt idx="27">
+                  <c:v>27</c:v>
+                </c:pt>
+                <c:pt idx="28">
+                  <c:v>28</c:v>
+                </c:pt>
+                <c:pt idx="29">
+                  <c:v>29</c:v>
+                </c:pt>
+                <c:pt idx="30">
+                  <c:v>30</c:v>
+                </c:pt>
+                <c:pt idx="31">
+                  <c:v>31</c:v>
+                </c:pt>
+                <c:pt idx="32">
+                  <c:v>32</c:v>
+                </c:pt>
+                <c:pt idx="33">
+                  <c:v>33</c:v>
+                </c:pt>
+                <c:pt idx="34">
+                  <c:v>34</c:v>
+                </c:pt>
+                <c:pt idx="35">
+                  <c:v>35</c:v>
+                </c:pt>
+                <c:pt idx="36">
+                  <c:v>36</c:v>
+                </c:pt>
+                <c:pt idx="37">
+                  <c:v>37</c:v>
+                </c:pt>
+                <c:pt idx="38">
+                  <c:v>38</c:v>
+                </c:pt>
+                <c:pt idx="39">
+                  <c:v>39</c:v>
+                </c:pt>
+                <c:pt idx="40">
+                  <c:v>40</c:v>
+                </c:pt>
+              </c:strCache>
+            </c:strRef>
           </c:cat>
           <c:val>
             <c:numRef>
@@ -3173,22 +2872,22 @@
                 <c:formatCode>General</c:formatCode>
                 <c:ptCount val="41"/>
                 <c:pt idx="0">
-                  <c:v>0.005807308868035076</c:v>
+                  <c:v>5.8073088680350759E-3</c:v>
                 </c:pt>
                 <c:pt idx="1">
-                  <c:v>0.011856463576624579</c:v>
+                  <c:v>1.1856463576624579E-2</c:v>
                 </c:pt>
                 <c:pt idx="2">
-                  <c:v>0.022780310040993</c:v>
+                  <c:v>2.2780310040992999E-2</c:v>
                 </c:pt>
                 <c:pt idx="3">
-                  <c:v>0.04117520672848954</c:v>
+                  <c:v>4.1175206728489538E-2</c:v>
                 </c:pt>
                 <c:pt idx="4">
-                  <c:v>0.07000053089133723</c:v>
+                  <c:v>7.0000530891337231E-2</c:v>
                 </c:pt>
                 <c:pt idx="5">
-                  <c:v>0.1119258162330977</c:v>
+                  <c:v>0.11192581623309771</c:v>
                 </c:pt>
                 <c:pt idx="6">
                   <c:v>0.16832498884393043</c:v>
@@ -3200,31 +2899,31 @@
                   <c:v>0.3170683208657904</c:v>
                 </c:pt>
                 <c:pt idx="9">
-                  <c:v>0.3975030344093678</c:v>
+                  <c:v>0.39750303440936779</c:v>
                 </c:pt>
                 <c:pt idx="10">
                   <c:v>0.46966886077236447</c:v>
                 </c:pt>
                 <c:pt idx="11">
-                  <c:v>0.5237334146188107</c:v>
+                  <c:v>0.52373341461881073</c:v>
                 </c:pt>
                 <c:pt idx="12">
-                  <c:v>0.5523639638834376</c:v>
+                  <c:v>0.55236396388343756</c:v>
                 </c:pt>
                 <c:pt idx="13">
-                  <c:v>0.5527936357343837</c:v>
+                  <c:v>0.55279363573438367</c:v>
                 </c:pt>
                 <c:pt idx="14">
                   <c:v>0.5275820350402034</c:v>
                 </c:pt>
                 <c:pt idx="15">
-                  <c:v>0.4837502996522733</c:v>
+                  <c:v>0.48375029965227329</c:v>
                 </c:pt>
                 <c:pt idx="16">
                   <c:v>0.43063688824647617</c:v>
                 </c:pt>
                 <c:pt idx="17">
-                  <c:v>0.3773134900334985</c:v>
+                  <c:v>0.37731349003349851</c:v>
                 </c:pt>
                 <c:pt idx="18">
                   <c:v>0.33048444789614495</c:v>
@@ -3242,7 +2941,7 @@
                   <c:v>0.23266433243680879</c:v>
                 </c:pt>
                 <c:pt idx="23">
-                  <c:v>0.2205002043349122</c:v>
+                  <c:v>0.22050020433491219</c:v>
                 </c:pt>
                 <c:pt idx="24">
                   <c:v>0.20934777688076095</c:v>
@@ -3275,59 +2974,47 @@
                   <c:v>0.20939001920684053</c:v>
                 </c:pt>
                 <c:pt idx="34">
-                  <c:v>0.1725532769836393</c:v>
+                  <c:v>0.17255327698363929</c:v>
                 </c:pt>
                 <c:pt idx="35">
-                  <c:v>0.1292587852411153</c:v>
+                  <c:v>0.12925878524111531</c:v>
                 </c:pt>
                 <c:pt idx="36">
-                  <c:v>0.08780321091575502</c:v>
+                  <c:v>8.780321091575502E-2</c:v>
                 </c:pt>
                 <c:pt idx="37">
-                  <c:v>0.05411015528768594</c:v>
+                  <c:v>5.4110155287685938E-2</c:v>
                 </c:pt>
                 <c:pt idx="38">
-                  <c:v>0.030359106481925174</c:v>
+                  <c:v>3.0359106481925174E-2</c:v>
                 </c:pt>
                 <c:pt idx="39">
-                  <c:v>0.015624368032985132</c:v>
+                  <c:v>1.5624368032985132E-2</c:v>
                 </c:pt>
                 <c:pt idx="40">
-                  <c:v>0.007474679425698625</c:v>
+                  <c:v>7.4746794256986254E-3</c:v>
                 </c:pt>
               </c:numCache>
             </c:numRef>
           </c:val>
           <c:smooth val="1"/>
+          <c:extLst>
+            <c:ext xmlns:c16="http://schemas.microsoft.com/office/drawing/2014/chart" uri="{C3380CC4-5D6E-409C-BE32-E72D297353CC}">
+              <c16:uniqueId val="{00000003-42AF-2C4F-A761-BBC59A8D8860}"/>
+            </c:ext>
+          </c:extLst>
         </c:ser>
         <c:dLbls>
-          <c:numFmt formatCode="#,##0" sourceLinked="0"/>
-          <c:txPr>
-            <a:bodyPr/>
-            <a:lstStyle/>
-            <a:p>
-              <a:pPr>
-                <a:defRPr b="0" i="0" strike="noStrike" sz="1200" u="none">
-                  <a:solidFill>
-                    <a:srgbClr val="000000"/>
-                  </a:solidFill>
-                  <a:latin typeface="Arial"/>
-                </a:defRPr>
-              </a:pPr>
-            </a:p>
-          </c:txPr>
           <c:showLegendKey val="0"/>
           <c:showVal val="0"/>
           <c:showCatName val="0"/>
           <c:showSerName val="0"/>
           <c:showPercent val="0"/>
           <c:showBubbleSize val="0"/>
-          <c:showLeaderLines val="0"/>
         </c:dLbls>
-        <c:marker val="1"/>
+        <c:smooth val="0"/>
         <c:axId val="2094734554"/>
         <c:axId val="2094734552"/>
-        <c:axId val="2094734556"/>
       </c:lineChart>
       <c:catAx>
         <c:axId val="2094734554"/>
@@ -3351,7 +3038,7 @@
                   </a:defRPr>
                 </a:pPr>
                 <a:r>
-                  <a:rPr b="0" i="0" u="none" strike="noStrike">
+                  <a:rPr lang="fr-FR" b="0" i="0" u="none" strike="noStrike">
                     <a:solidFill>
                       <a:srgbClr val="6B6B6B"/>
                     </a:solidFill>
@@ -3362,7 +3049,6 @@
               </a:p>
             </c:rich>
           </c:tx>
-          <c:layout/>
           <c:overlay val="0"/>
         </c:title>
         <c:numFmt formatCode="General" sourceLinked="1"/>
@@ -3397,8 +3083,9 @@
         <c:crosses val="autoZero"/>
         <c:auto val="1"/>
         <c:lblAlgn val="ctr"/>
+        <c:lblOffset val="100"/>
+        <c:tickLblSkip val="10"/>
         <c:noMultiLvlLbl val="1"/>
-        <c:tickLblSkip val="10"/>
       </c:catAx>
       <c:valAx>
         <c:axId val="2094734552"/>
@@ -3433,7 +3120,7 @@
                   </a:defRPr>
                 </a:pPr>
                 <a:r>
-                  <a:rPr b="0" i="0" u="none" strike="noStrike">
+                  <a:rPr lang="fr-FR" b="0" i="0" u="none" strike="noStrike">
                     <a:solidFill>
                       <a:srgbClr val="6B6B6B"/>
                     </a:solidFill>
@@ -3444,7 +3131,6 @@
               </a:p>
             </c:rich>
           </c:tx>
-          <c:layout/>
           <c:overlay val="0"/>
         </c:title>
         <c:numFmt formatCode="General" sourceLinked="0"/>
@@ -3495,7 +3181,7 @@
         <a:lstStyle/>
         <a:p>
           <a:pPr>
-            <a:defRPr sz="1000">      </a:defRPr>
+            <a:defRPr sz="1000"/>
           </a:pPr>
           <a:endParaRPr lang="en-US"/>
         </a:p>
@@ -3503,6 +3189,7 @@
     </c:legend>
     <c:plotVisOnly val="1"/>
     <c:dispBlanksAs val="span"/>
+    <c:showDLblsOverMax val="1"/>
   </c:chart>
   <c:spPr>
     <a:noFill/>
@@ -3518,9 +3205,11 @@
 </file>
 
 <file path=ppt/charts/chart5.xml><?xml version="1.0" encoding="utf-8"?>
-<c:chartSpace xmlns:c="http://schemas.openxmlformats.org/drawingml/2006/chart" xmlns:a="http://schemas.openxmlformats.org/drawingml/2006/main" xmlns:r="http://schemas.openxmlformats.org/officeDocument/2006/relationships">
+<c:chartSpace xmlns:c="http://schemas.openxmlformats.org/drawingml/2006/chart" xmlns:a="http://schemas.openxmlformats.org/drawingml/2006/main" xmlns:r="http://schemas.openxmlformats.org/officeDocument/2006/relationships" xmlns:c16r2="http://schemas.microsoft.com/office/drawing/2015/06/chart">
   <c:date1904 val="0"/>
+  <c:lang val="fr-FR"/>
   <c:roundedCorners val="1"/>
+  <c:style val="2"/>
   <c:chart>
     <c:title>
       <c:tx>
@@ -3537,7 +3226,7 @@
               </a:defRPr>
             </a:pPr>
             <a:r>
-              <a:rPr sz="1200" b="0" i="0" u="none" strike="noStrike">
+              <a:rPr lang="fr-FR" sz="1200" b="0" i="0" u="none" strike="noStrike">
                 <a:solidFill>
                   <a:srgbClr val="0B3C5D"/>
                 </a:solidFill>
@@ -3548,7 +3237,6 @@
           </a:p>
         </c:rich>
       </c:tx>
-      <c:layout/>
       <c:overlay val="0"/>
     </c:title>
     <c:autoTitleDeleted val="0"/>
@@ -3581,18 +3269,26 @@
           <c:invertIfNegative val="0"/>
           <c:dLbls>
             <c:numFmt formatCode="#,##0" sourceLinked="0"/>
+            <c:spPr>
+              <a:noFill/>
+              <a:ln>
+                <a:noFill/>
+              </a:ln>
+              <a:effectLst/>
+            </c:spPr>
             <c:txPr>
               <a:bodyPr/>
               <a:lstStyle/>
               <a:p>
                 <a:pPr>
-                  <a:defRPr b="0" i="0" strike="noStrike" sz="900" u="none">
+                  <a:defRPr sz="900" b="0" i="0" u="none" strike="noStrike">
                     <a:solidFill>
                       <a:srgbClr val="FFFFFF"/>
                     </a:solidFill>
                     <a:latin typeface="Arial"/>
                   </a:defRPr>
                 </a:pPr>
+                <a:endParaRPr lang="fr-FR"/>
               </a:p>
             </c:txPr>
             <c:dLblPos val="ctr"/>
@@ -3603,25 +3299,28 @@
             <c:showPercent val="0"/>
             <c:showBubbleSize val="0"/>
             <c:showLeaderLines val="0"/>
+            <c:extLst>
+              <c:ext xmlns:c15="http://schemas.microsoft.com/office/drawing/2012/chart" uri="{CE6537A1-D6FC-4f65-9D91-7224C49458BB}">
+                <c15:showLeaderLines val="0"/>
+              </c:ext>
+            </c:extLst>
           </c:dLbls>
           <c:cat>
-            <c:multiLvlStrRef>
+            <c:strRef>
               <c:f>Sheet1!$A$2:$A$4</c:f>
-              <c:multiLvlStrCache>
+              <c:strCache>
                 <c:ptCount val="3"/>
-                <c:lvl>
-                  <c:pt idx="0">
-                    <c:v>Body length</c:v>
-                  </c:pt>
-                  <c:pt idx="1">
-                    <c:v>Body depth ratio</c:v>
-                  </c:pt>
-                  <c:pt idx="2">
-                    <c:v>Mouth position</c:v>
-                  </c:pt>
-                </c:lvl>
-              </c:multiLvlStrCache>
-            </c:multiLvlStrRef>
+                <c:pt idx="0">
+                  <c:v>Body length</c:v>
+                </c:pt>
+                <c:pt idx="1">
+                  <c:v>Body depth ratio</c:v>
+                </c:pt>
+                <c:pt idx="2">
+                  <c:v>Mouth position</c:v>
+                </c:pt>
+              </c:strCache>
+            </c:strRef>
           </c:cat>
           <c:val>
             <c:numRef>
@@ -3641,6 +3340,11 @@
               </c:numCache>
             </c:numRef>
           </c:val>
+          <c:extLst>
+            <c:ext xmlns:c16="http://schemas.microsoft.com/office/drawing/2014/chart" uri="{C3380CC4-5D6E-409C-BE32-E72D297353CC}">
+              <c16:uniqueId val="{00000000-13E1-2C4A-8639-82A9E3BA6F6E}"/>
+            </c:ext>
+          </c:extLst>
         </c:ser>
         <c:ser>
           <c:idx val="1"/>
@@ -3665,18 +3369,26 @@
           <c:invertIfNegative val="0"/>
           <c:dLbls>
             <c:numFmt formatCode="#,##0" sourceLinked="0"/>
+            <c:spPr>
+              <a:noFill/>
+              <a:ln>
+                <a:noFill/>
+              </a:ln>
+              <a:effectLst/>
+            </c:spPr>
             <c:txPr>
               <a:bodyPr/>
               <a:lstStyle/>
               <a:p>
                 <a:pPr>
-                  <a:defRPr b="0" i="0" strike="noStrike" sz="900" u="none">
+                  <a:defRPr sz="900" b="0" i="0" u="none" strike="noStrike">
                     <a:solidFill>
                       <a:srgbClr val="FFFFFF"/>
                     </a:solidFill>
                     <a:latin typeface="Arial"/>
                   </a:defRPr>
                 </a:pPr>
+                <a:endParaRPr lang="fr-FR"/>
               </a:p>
             </c:txPr>
             <c:dLblPos val="ctr"/>
@@ -3687,25 +3399,28 @@
             <c:showPercent val="0"/>
             <c:showBubbleSize val="0"/>
             <c:showLeaderLines val="0"/>
+            <c:extLst>
+              <c:ext xmlns:c15="http://schemas.microsoft.com/office/drawing/2012/chart" uri="{CE6537A1-D6FC-4f65-9D91-7224C49458BB}">
+                <c15:showLeaderLines val="0"/>
+              </c:ext>
+            </c:extLst>
           </c:dLbls>
           <c:cat>
-            <c:multiLvlStrRef>
+            <c:strRef>
               <c:f>Sheet1!$A$2:$A$4</c:f>
-              <c:multiLvlStrCache>
+              <c:strCache>
                 <c:ptCount val="3"/>
-                <c:lvl>
-                  <c:pt idx="0">
-                    <c:v>Body length</c:v>
-                  </c:pt>
-                  <c:pt idx="1">
-                    <c:v>Body depth ratio</c:v>
-                  </c:pt>
-                  <c:pt idx="2">
-                    <c:v>Mouth position</c:v>
-                  </c:pt>
-                </c:lvl>
-              </c:multiLvlStrCache>
-            </c:multiLvlStrRef>
+                <c:pt idx="0">
+                  <c:v>Body length</c:v>
+                </c:pt>
+                <c:pt idx="1">
+                  <c:v>Body depth ratio</c:v>
+                </c:pt>
+                <c:pt idx="2">
+                  <c:v>Mouth position</c:v>
+                </c:pt>
+              </c:strCache>
+            </c:strRef>
           </c:cat>
           <c:val>
             <c:numRef>
@@ -3725,6 +3440,11 @@
               </c:numCache>
             </c:numRef>
           </c:val>
+          <c:extLst>
+            <c:ext xmlns:c16="http://schemas.microsoft.com/office/drawing/2014/chart" uri="{C3380CC4-5D6E-409C-BE32-E72D297353CC}">
+              <c16:uniqueId val="{00000001-13E1-2C4A-8639-82A9E3BA6F6E}"/>
+            </c:ext>
+          </c:extLst>
         </c:ser>
         <c:ser>
           <c:idx val="2"/>
@@ -3749,18 +3469,26 @@
           <c:invertIfNegative val="0"/>
           <c:dLbls>
             <c:numFmt formatCode="#,##0" sourceLinked="0"/>
+            <c:spPr>
+              <a:noFill/>
+              <a:ln>
+                <a:noFill/>
+              </a:ln>
+              <a:effectLst/>
+            </c:spPr>
             <c:txPr>
               <a:bodyPr/>
               <a:lstStyle/>
               <a:p>
                 <a:pPr>
-                  <a:defRPr b="0" i="0" strike="noStrike" sz="900" u="none">
+                  <a:defRPr sz="900" b="0" i="0" u="none" strike="noStrike">
                     <a:solidFill>
                       <a:srgbClr val="FFFFFF"/>
                     </a:solidFill>
                     <a:latin typeface="Arial"/>
                   </a:defRPr>
                 </a:pPr>
+                <a:endParaRPr lang="fr-FR"/>
               </a:p>
             </c:txPr>
             <c:dLblPos val="ctr"/>
@@ -3771,25 +3499,28 @@
             <c:showPercent val="0"/>
             <c:showBubbleSize val="0"/>
             <c:showLeaderLines val="0"/>
+            <c:extLst>
+              <c:ext xmlns:c15="http://schemas.microsoft.com/office/drawing/2012/chart" uri="{CE6537A1-D6FC-4f65-9D91-7224C49458BB}">
+                <c15:showLeaderLines val="0"/>
+              </c:ext>
+            </c:extLst>
           </c:dLbls>
           <c:cat>
-            <c:multiLvlStrRef>
+            <c:strRef>
               <c:f>Sheet1!$A$2:$A$4</c:f>
-              <c:multiLvlStrCache>
+              <c:strCache>
                 <c:ptCount val="3"/>
-                <c:lvl>
-                  <c:pt idx="0">
-                    <c:v>Body length</c:v>
-                  </c:pt>
-                  <c:pt idx="1">
-                    <c:v>Body depth ratio</c:v>
-                  </c:pt>
-                  <c:pt idx="2">
-                    <c:v>Mouth position</c:v>
-                  </c:pt>
-                </c:lvl>
-              </c:multiLvlStrCache>
-            </c:multiLvlStrRef>
+                <c:pt idx="0">
+                  <c:v>Body length</c:v>
+                </c:pt>
+                <c:pt idx="1">
+                  <c:v>Body depth ratio</c:v>
+                </c:pt>
+                <c:pt idx="2">
+                  <c:v>Mouth position</c:v>
+                </c:pt>
+              </c:strCache>
+            </c:strRef>
           </c:cat>
           <c:val>
             <c:numRef>
@@ -3809,23 +3540,13 @@
               </c:numCache>
             </c:numRef>
           </c:val>
+          <c:extLst>
+            <c:ext xmlns:c16="http://schemas.microsoft.com/office/drawing/2014/chart" uri="{C3380CC4-5D6E-409C-BE32-E72D297353CC}">
+              <c16:uniqueId val="{00000002-13E1-2C4A-8639-82A9E3BA6F6E}"/>
+            </c:ext>
+          </c:extLst>
         </c:ser>
         <c:dLbls>
-          <c:numFmt formatCode="#,##0" sourceLinked="0"/>
-          <c:txPr>
-            <a:bodyPr/>
-            <a:lstStyle/>
-            <a:p>
-              <a:pPr>
-                <a:defRPr b="0" i="0" strike="noStrike" sz="900" u="none">
-                  <a:solidFill>
-                    <a:srgbClr val="FFFFFF"/>
-                  </a:solidFill>
-                  <a:latin typeface="Arial"/>
-                </a:defRPr>
-              </a:pPr>
-            </a:p>
-          </c:txPr>
           <c:dLblPos val="ctr"/>
           <c:showLegendKey val="0"/>
           <c:showVal val="1"/>
@@ -3833,13 +3554,11 @@
           <c:showSerName val="0"/>
           <c:showPercent val="0"/>
           <c:showBubbleSize val="0"/>
-          <c:showLeaderLines val="0"/>
         </c:dLbls>
         <c:gapWidth val="50"/>
         <c:overlap val="100"/>
         <c:axId val="2094734554"/>
         <c:axId val="2094734552"/>
-        <c:axId val="2094734556"/>
       </c:barChart>
       <c:catAx>
         <c:axId val="2094734554"/>
@@ -3880,6 +3599,7 @@
         <c:crosses val="autoZero"/>
         <c:auto val="1"/>
         <c:lblAlgn val="ctr"/>
+        <c:lblOffset val="100"/>
         <c:noMultiLvlLbl val="1"/>
       </c:catAx>
       <c:valAx>
@@ -3948,7 +3668,7 @@
         <a:lstStyle/>
         <a:p>
           <a:pPr>
-            <a:defRPr sz="1000">      </a:defRPr>
+            <a:defRPr sz="1000"/>
           </a:pPr>
           <a:endParaRPr lang="en-US"/>
         </a:p>
@@ -3956,6 +3676,7 @@
     </c:legend>
     <c:plotVisOnly val="1"/>
     <c:dispBlanksAs val="span"/>
+    <c:showDLblsOverMax val="1"/>
   </c:chart>
   <c:spPr>
     <a:noFill/>
@@ -3971,9 +3692,11 @@
 </file>
 
 <file path=ppt/charts/chart6.xml><?xml version="1.0" encoding="utf-8"?>
-<c:chartSpace xmlns:c="http://schemas.openxmlformats.org/drawingml/2006/chart" xmlns:a="http://schemas.openxmlformats.org/drawingml/2006/main" xmlns:r="http://schemas.openxmlformats.org/officeDocument/2006/relationships">
+<c:chartSpace xmlns:c="http://schemas.openxmlformats.org/drawingml/2006/chart" xmlns:a="http://schemas.openxmlformats.org/drawingml/2006/main" xmlns:r="http://schemas.openxmlformats.org/officeDocument/2006/relationships" xmlns:c16r2="http://schemas.microsoft.com/office/drawing/2015/06/chart">
   <c:date1904 val="0"/>
+  <c:lang val="fr-FR"/>
   <c:roundedCorners val="1"/>
+  <c:style val="2"/>
   <c:chart>
     <c:title>
       <c:tx>
@@ -3990,7 +3713,7 @@
               </a:defRPr>
             </a:pPr>
             <a:r>
-              <a:rPr sz="1200" b="0" i="0" u="none" strike="noStrike">
+              <a:rPr lang="fr-FR" sz="1200" b="0" i="0" u="none" strike="noStrike">
                 <a:solidFill>
                   <a:srgbClr val="0B3C5D"/>
                 </a:solidFill>
@@ -4001,13 +3724,13 @@
           </a:p>
         </c:rich>
       </c:tx>
-      <c:layout/>
       <c:overlay val="0"/>
     </c:title>
     <c:autoTitleDeleted val="0"/>
     <c:plotArea>
       <c:layout/>
       <c:lineChart>
+        <c:grouping val="standard"/>
         <c:varyColors val="0"/>
         <c:ser>
           <c:idx val="0"/>
@@ -4024,9 +3747,6 @@
             </c:strRef>
           </c:tx>
           <c:spPr>
-            <a:solidFill>
-              <a:srgbClr val="1D6F9E"/>
-            </a:solidFill>
             <a:ln w="31750" cap="flat">
               <a:solidFill>
                 <a:srgbClr val="1D6F9E"/>
@@ -4036,180 +3756,139 @@
             </a:ln>
             <a:effectLst/>
           </c:spPr>
-          <c:invertIfNegative val="0"/>
-          <c:dLbls>
-            <c:numFmt formatCode="#,##0" sourceLinked="0"/>
-            <c:txPr>
-              <a:bodyPr/>
-              <a:lstStyle/>
-              <a:p>
-                <a:pPr>
-                  <a:defRPr b="0" i="0" strike="noStrike" sz="1200" u="none">
-                    <a:solidFill>
-                      <a:srgbClr val="000000"/>
-                    </a:solidFill>
-                    <a:latin typeface="Arial"/>
-                  </a:defRPr>
-                </a:pPr>
-              </a:p>
-            </c:txPr>
-            <c:showLegendKey val="0"/>
-            <c:showVal val="0"/>
-            <c:showCatName val="0"/>
-            <c:showSerName val="0"/>
-            <c:showPercent val="0"/>
-            <c:showBubbleSize val="0"/>
-            <c:showLeaderLines val="0"/>
-          </c:dLbls>
           <c:marker>
             <c:symbol val="none"/>
-            <c:size val="6"/>
-            <c:spPr>
-              <a:solidFill>
-                <a:srgbClr val="1D6F9E"/>
-              </a:solidFill>
-              <a:ln w="9525" cap="flat">
-                <a:solidFill>
-                  <a:srgbClr val="1D6F9E"/>
-                </a:solidFill>
-                <a:prstDash val="solid"/>
-                <a:round/>
-              </a:ln>
-              <a:effectLst/>
-            </c:spPr>
           </c:marker>
           <c:cat>
-            <c:multiLvlStrRef>
+            <c:strRef>
               <c:f>Sheet1!$A$2:$A$42</c:f>
-              <c:multiLvlStrCache>
+              <c:strCache>
                 <c:ptCount val="41"/>
-                <c:lvl>
-                  <c:pt idx="0">
-                    <c:v>0</c:v>
-                  </c:pt>
-                  <c:pt idx="1">
-                    <c:v>1</c:v>
-                  </c:pt>
-                  <c:pt idx="2">
-                    <c:v>2</c:v>
-                  </c:pt>
-                  <c:pt idx="3">
-                    <c:v>3</c:v>
-                  </c:pt>
-                  <c:pt idx="4">
-                    <c:v>4</c:v>
-                  </c:pt>
-                  <c:pt idx="5">
-                    <c:v>5</c:v>
-                  </c:pt>
-                  <c:pt idx="6">
-                    <c:v>6</c:v>
-                  </c:pt>
-                  <c:pt idx="7">
-                    <c:v>7</c:v>
-                  </c:pt>
-                  <c:pt idx="8">
-                    <c:v>8</c:v>
-                  </c:pt>
-                  <c:pt idx="9">
-                    <c:v>9</c:v>
-                  </c:pt>
-                  <c:pt idx="10">
-                    <c:v>10</c:v>
-                  </c:pt>
-                  <c:pt idx="11">
-                    <c:v>11</c:v>
-                  </c:pt>
-                  <c:pt idx="12">
-                    <c:v>12</c:v>
-                  </c:pt>
-                  <c:pt idx="13">
-                    <c:v>13</c:v>
-                  </c:pt>
-                  <c:pt idx="14">
-                    <c:v>14</c:v>
-                  </c:pt>
-                  <c:pt idx="15">
-                    <c:v>15</c:v>
-                  </c:pt>
-                  <c:pt idx="16">
-                    <c:v>16</c:v>
-                  </c:pt>
-                  <c:pt idx="17">
-                    <c:v>17</c:v>
-                  </c:pt>
-                  <c:pt idx="18">
-                    <c:v>18</c:v>
-                  </c:pt>
-                  <c:pt idx="19">
-                    <c:v>19</c:v>
-                  </c:pt>
-                  <c:pt idx="20">
-                    <c:v>20</c:v>
-                  </c:pt>
-                  <c:pt idx="21">
-                    <c:v>21</c:v>
-                  </c:pt>
-                  <c:pt idx="22">
-                    <c:v>22</c:v>
-                  </c:pt>
-                  <c:pt idx="23">
-                    <c:v>23</c:v>
-                  </c:pt>
-                  <c:pt idx="24">
-                    <c:v>24</c:v>
-                  </c:pt>
-                  <c:pt idx="25">
-                    <c:v>25</c:v>
-                  </c:pt>
-                  <c:pt idx="26">
-                    <c:v>26</c:v>
-                  </c:pt>
-                  <c:pt idx="27">
-                    <c:v>27</c:v>
-                  </c:pt>
-                  <c:pt idx="28">
-                    <c:v>28</c:v>
-                  </c:pt>
-                  <c:pt idx="29">
-                    <c:v>29</c:v>
-                  </c:pt>
-                  <c:pt idx="30">
-                    <c:v>30</c:v>
-                  </c:pt>
-                  <c:pt idx="31">
-                    <c:v>31</c:v>
-                  </c:pt>
-                  <c:pt idx="32">
-                    <c:v>32</c:v>
-                  </c:pt>
-                  <c:pt idx="33">
-                    <c:v>33</c:v>
-                  </c:pt>
-                  <c:pt idx="34">
-                    <c:v>34</c:v>
-                  </c:pt>
-                  <c:pt idx="35">
-                    <c:v>35</c:v>
-                  </c:pt>
-                  <c:pt idx="36">
-                    <c:v>36</c:v>
-                  </c:pt>
-                  <c:pt idx="37">
-                    <c:v>37</c:v>
-                  </c:pt>
-                  <c:pt idx="38">
-                    <c:v>38</c:v>
-                  </c:pt>
-                  <c:pt idx="39">
-                    <c:v>39</c:v>
-                  </c:pt>
-                  <c:pt idx="40">
-                    <c:v>40</c:v>
-                  </c:pt>
-                </c:lvl>
-              </c:multiLvlStrCache>
-            </c:multiLvlStrRef>
+                <c:pt idx="0">
+                  <c:v>0</c:v>
+                </c:pt>
+                <c:pt idx="1">
+                  <c:v>1</c:v>
+                </c:pt>
+                <c:pt idx="2">
+                  <c:v>2</c:v>
+                </c:pt>
+                <c:pt idx="3">
+                  <c:v>3</c:v>
+                </c:pt>
+                <c:pt idx="4">
+                  <c:v>4</c:v>
+                </c:pt>
+                <c:pt idx="5">
+                  <c:v>5</c:v>
+                </c:pt>
+                <c:pt idx="6">
+                  <c:v>6</c:v>
+                </c:pt>
+                <c:pt idx="7">
+                  <c:v>7</c:v>
+                </c:pt>
+                <c:pt idx="8">
+                  <c:v>8</c:v>
+                </c:pt>
+                <c:pt idx="9">
+                  <c:v>9</c:v>
+                </c:pt>
+                <c:pt idx="10">
+                  <c:v>10</c:v>
+                </c:pt>
+                <c:pt idx="11">
+                  <c:v>11</c:v>
+                </c:pt>
+                <c:pt idx="12">
+                  <c:v>12</c:v>
+                </c:pt>
+                <c:pt idx="13">
+                  <c:v>13</c:v>
+                </c:pt>
+                <c:pt idx="14">
+                  <c:v>14</c:v>
+                </c:pt>
+                <c:pt idx="15">
+                  <c:v>15</c:v>
+                </c:pt>
+                <c:pt idx="16">
+                  <c:v>16</c:v>
+                </c:pt>
+                <c:pt idx="17">
+                  <c:v>17</c:v>
+                </c:pt>
+                <c:pt idx="18">
+                  <c:v>18</c:v>
+                </c:pt>
+                <c:pt idx="19">
+                  <c:v>19</c:v>
+                </c:pt>
+                <c:pt idx="20">
+                  <c:v>20</c:v>
+                </c:pt>
+                <c:pt idx="21">
+                  <c:v>21</c:v>
+                </c:pt>
+                <c:pt idx="22">
+                  <c:v>22</c:v>
+                </c:pt>
+                <c:pt idx="23">
+                  <c:v>23</c:v>
+                </c:pt>
+                <c:pt idx="24">
+                  <c:v>24</c:v>
+                </c:pt>
+                <c:pt idx="25">
+                  <c:v>25</c:v>
+                </c:pt>
+                <c:pt idx="26">
+                  <c:v>26</c:v>
+                </c:pt>
+                <c:pt idx="27">
+                  <c:v>27</c:v>
+                </c:pt>
+                <c:pt idx="28">
+                  <c:v>28</c:v>
+                </c:pt>
+                <c:pt idx="29">
+                  <c:v>29</c:v>
+                </c:pt>
+                <c:pt idx="30">
+                  <c:v>30</c:v>
+                </c:pt>
+                <c:pt idx="31">
+                  <c:v>31</c:v>
+                </c:pt>
+                <c:pt idx="32">
+                  <c:v>32</c:v>
+                </c:pt>
+                <c:pt idx="33">
+                  <c:v>33</c:v>
+                </c:pt>
+                <c:pt idx="34">
+                  <c:v>34</c:v>
+                </c:pt>
+                <c:pt idx="35">
+                  <c:v>35</c:v>
+                </c:pt>
+                <c:pt idx="36">
+                  <c:v>36</c:v>
+                </c:pt>
+                <c:pt idx="37">
+                  <c:v>37</c:v>
+                </c:pt>
+                <c:pt idx="38">
+                  <c:v>38</c:v>
+                </c:pt>
+                <c:pt idx="39">
+                  <c:v>39</c:v>
+                </c:pt>
+                <c:pt idx="40">
+                  <c:v>40</c:v>
+                </c:pt>
+              </c:strCache>
+            </c:strRef>
           </c:cat>
           <c:val>
             <c:numRef>
@@ -4218,31 +3897,31 @@
                 <c:formatCode>General</c:formatCode>
                 <c:ptCount val="41"/>
                 <c:pt idx="0">
-                  <c:v>0.0028016380348484847</c:v>
+                  <c:v>2.8016380348484847E-3</c:v>
                 </c:pt>
                 <c:pt idx="1">
-                  <c:v>0.004525807866766719</c:v>
+                  <c:v>4.5258078667667189E-3</c:v>
                 </c:pt>
                 <c:pt idx="2">
-                  <c:v>0.007163364470919217</c:v>
+                  <c:v>7.163364470919217E-3</c:v>
                 </c:pt>
                 <c:pt idx="3">
-                  <c:v>0.011108996538242306</c:v>
+                  <c:v>1.1108996538242306E-2</c:v>
                 </c:pt>
                 <c:pt idx="4">
-                  <c:v>0.01687988414878991</c:v>
+                  <c:v>1.6879884148789909E-2</c:v>
                 </c:pt>
                 <c:pt idx="5">
-                  <c:v>0.025130488985274417</c:v>
+                  <c:v>2.5130488985274417E-2</c:v>
                 </c:pt>
                 <c:pt idx="6">
-                  <c:v>0.03665804195337801</c:v>
+                  <c:v>3.6658041953378011E-2</c:v>
                 </c:pt>
                 <c:pt idx="7">
-                  <c:v>0.05239314106982558</c:v>
+                  <c:v>5.239314106982558E-2</c:v>
                 </c:pt>
                 <c:pt idx="8">
-                  <c:v>0.0733696513683829</c:v>
+                  <c:v>7.3369651368382902E-2</c:v>
                 </c:pt>
                 <c:pt idx="9">
                   <c:v>0.10066889977289777</c:v>
@@ -4257,73 +3936,73 @@
                   <c:v>0.23006629899380907</c:v>
                 </c:pt>
                 <c:pt idx="13">
-                  <c:v>0.2909238070461482</c:v>
+                  <c:v>0.29092380704614818</c:v>
                 </c:pt>
                 <c:pt idx="14">
-                  <c:v>0.360447788597821</c:v>
+                  <c:v>0.36044778859782101</c:v>
                 </c:pt>
                 <c:pt idx="15">
-                  <c:v>0.4375647377002692</c:v>
+                  <c:v>0.43756473770026921</c:v>
                 </c:pt>
                 <c:pt idx="16">
-                  <c:v>0.5204501210207021</c:v>
+                  <c:v>0.52045012102070209</c:v>
                 </c:pt>
                 <c:pt idx="17">
-                  <c:v>0.6065306597126334</c:v>
+                  <c:v>0.60653065971263342</c:v>
                 </c:pt>
                 <c:pt idx="18">
-                  <c:v>0.6925693242051977</c:v>
+                  <c:v>0.69256932420519768</c:v>
                 </c:pt>
                 <c:pt idx="19">
-                  <c:v>0.7748374288832494</c:v>
+                  <c:v>0.77483742888324936</c:v>
                 </c:pt>
                 <c:pt idx="20">
-                  <c:v>0.8493658165683124</c:v>
+                  <c:v>0.84936581656831245</c:v>
                 </c:pt>
                 <c:pt idx="21">
                   <c:v>0.9122540768285452</c:v>
                 </c:pt>
                 <c:pt idx="22">
-                  <c:v>0.9600054412854777</c:v>
+                  <c:v>0.96000544128547771</c:v>
                 </c:pt>
                 <c:pt idx="23">
-                  <c:v>0.9898478033787338</c:v>
+                  <c:v>0.98984780337873379</c:v>
                 </c:pt>
                 <c:pt idx="24">
                   <c:v>1</c:v>
                 </c:pt>
                 <c:pt idx="25">
-                  <c:v>0.9898478033787338</c:v>
+                  <c:v>0.98984780337873379</c:v>
                 </c:pt>
                 <c:pt idx="26">
-                  <c:v>0.9600054412854777</c:v>
+                  <c:v>0.96000544128547771</c:v>
                 </c:pt>
                 <c:pt idx="27">
                   <c:v>0.9122540768285452</c:v>
                 </c:pt>
                 <c:pt idx="28">
-                  <c:v>0.8493658165683124</c:v>
+                  <c:v>0.84936581656831245</c:v>
                 </c:pt>
                 <c:pt idx="29">
-                  <c:v>0.7748374288832494</c:v>
+                  <c:v>0.77483742888324936</c:v>
                 </c:pt>
                 <c:pt idx="30">
-                  <c:v>0.6925693242051977</c:v>
+                  <c:v>0.69256932420519768</c:v>
                 </c:pt>
                 <c:pt idx="31">
-                  <c:v>0.6065306597126334</c:v>
+                  <c:v>0.60653065971263342</c:v>
                 </c:pt>
                 <c:pt idx="32">
-                  <c:v>0.5204501210207021</c:v>
+                  <c:v>0.52045012102070209</c:v>
                 </c:pt>
                 <c:pt idx="33">
-                  <c:v>0.4375647377002692</c:v>
+                  <c:v>0.43756473770026921</c:v>
                 </c:pt>
                 <c:pt idx="34">
-                  <c:v>0.360447788597821</c:v>
+                  <c:v>0.36044778859782101</c:v>
                 </c:pt>
                 <c:pt idx="35">
-                  <c:v>0.2909238070461482</c:v>
+                  <c:v>0.29092380704614818</c:v>
                 </c:pt>
                 <c:pt idx="36">
                   <c:v>0.23006629899380907</c:v>
@@ -4338,12 +4017,17 @@
                   <c:v>0.10066889977289777</c:v>
                 </c:pt>
                 <c:pt idx="40">
-                  <c:v>0.0733696513683829</c:v>
+                  <c:v>7.3369651368382902E-2</c:v>
                 </c:pt>
               </c:numCache>
             </c:numRef>
           </c:val>
           <c:smooth val="1"/>
+          <c:extLst>
+            <c:ext xmlns:c16="http://schemas.microsoft.com/office/drawing/2014/chart" uri="{C3380CC4-5D6E-409C-BE32-E72D297353CC}">
+              <c16:uniqueId val="{00000000-97B7-4445-A94B-442B6F64E24E}"/>
+            </c:ext>
+          </c:extLst>
         </c:ser>
         <c:ser>
           <c:idx val="1"/>
@@ -4360,9 +4044,6 @@
             </c:strRef>
           </c:tx>
           <c:spPr>
-            <a:solidFill>
-              <a:srgbClr val="B23A48"/>
-            </a:solidFill>
             <a:ln w="31750" cap="flat">
               <a:solidFill>
                 <a:srgbClr val="B23A48"/>
@@ -4372,180 +4053,139 @@
             </a:ln>
             <a:effectLst/>
           </c:spPr>
-          <c:invertIfNegative val="0"/>
-          <c:dLbls>
-            <c:numFmt formatCode="#,##0" sourceLinked="0"/>
-            <c:txPr>
-              <a:bodyPr/>
-              <a:lstStyle/>
-              <a:p>
-                <a:pPr>
-                  <a:defRPr b="0" i="0" strike="noStrike" sz="1200" u="none">
-                    <a:solidFill>
-                      <a:srgbClr val="000000"/>
-                    </a:solidFill>
-                    <a:latin typeface="Arial"/>
-                  </a:defRPr>
-                </a:pPr>
-              </a:p>
-            </c:txPr>
-            <c:showLegendKey val="0"/>
-            <c:showVal val="0"/>
-            <c:showCatName val="0"/>
-            <c:showSerName val="0"/>
-            <c:showPercent val="0"/>
-            <c:showBubbleSize val="0"/>
-            <c:showLeaderLines val="0"/>
-          </c:dLbls>
           <c:marker>
             <c:symbol val="none"/>
-            <c:size val="6"/>
-            <c:spPr>
-              <a:solidFill>
-                <a:srgbClr val="B23A48"/>
-              </a:solidFill>
-              <a:ln w="9525" cap="flat">
-                <a:solidFill>
-                  <a:srgbClr val="B23A48"/>
-                </a:solidFill>
-                <a:prstDash val="solid"/>
-                <a:round/>
-              </a:ln>
-              <a:effectLst/>
-            </c:spPr>
           </c:marker>
           <c:cat>
-            <c:multiLvlStrRef>
+            <c:strRef>
               <c:f>Sheet1!$A$2:$A$42</c:f>
-              <c:multiLvlStrCache>
+              <c:strCache>
                 <c:ptCount val="41"/>
-                <c:lvl>
-                  <c:pt idx="0">
-                    <c:v>0</c:v>
-                  </c:pt>
-                  <c:pt idx="1">
-                    <c:v>1</c:v>
-                  </c:pt>
-                  <c:pt idx="2">
-                    <c:v>2</c:v>
-                  </c:pt>
-                  <c:pt idx="3">
-                    <c:v>3</c:v>
-                  </c:pt>
-                  <c:pt idx="4">
-                    <c:v>4</c:v>
-                  </c:pt>
-                  <c:pt idx="5">
-                    <c:v>5</c:v>
-                  </c:pt>
-                  <c:pt idx="6">
-                    <c:v>6</c:v>
-                  </c:pt>
-                  <c:pt idx="7">
-                    <c:v>7</c:v>
-                  </c:pt>
-                  <c:pt idx="8">
-                    <c:v>8</c:v>
-                  </c:pt>
-                  <c:pt idx="9">
-                    <c:v>9</c:v>
-                  </c:pt>
-                  <c:pt idx="10">
-                    <c:v>10</c:v>
-                  </c:pt>
-                  <c:pt idx="11">
-                    <c:v>11</c:v>
-                  </c:pt>
-                  <c:pt idx="12">
-                    <c:v>12</c:v>
-                  </c:pt>
-                  <c:pt idx="13">
-                    <c:v>13</c:v>
-                  </c:pt>
-                  <c:pt idx="14">
-                    <c:v>14</c:v>
-                  </c:pt>
-                  <c:pt idx="15">
-                    <c:v>15</c:v>
-                  </c:pt>
-                  <c:pt idx="16">
-                    <c:v>16</c:v>
-                  </c:pt>
-                  <c:pt idx="17">
-                    <c:v>17</c:v>
-                  </c:pt>
-                  <c:pt idx="18">
-                    <c:v>18</c:v>
-                  </c:pt>
-                  <c:pt idx="19">
-                    <c:v>19</c:v>
-                  </c:pt>
-                  <c:pt idx="20">
-                    <c:v>20</c:v>
-                  </c:pt>
-                  <c:pt idx="21">
-                    <c:v>21</c:v>
-                  </c:pt>
-                  <c:pt idx="22">
-                    <c:v>22</c:v>
-                  </c:pt>
-                  <c:pt idx="23">
-                    <c:v>23</c:v>
-                  </c:pt>
-                  <c:pt idx="24">
-                    <c:v>24</c:v>
-                  </c:pt>
-                  <c:pt idx="25">
-                    <c:v>25</c:v>
-                  </c:pt>
-                  <c:pt idx="26">
-                    <c:v>26</c:v>
-                  </c:pt>
-                  <c:pt idx="27">
-                    <c:v>27</c:v>
-                  </c:pt>
-                  <c:pt idx="28">
-                    <c:v>28</c:v>
-                  </c:pt>
-                  <c:pt idx="29">
-                    <c:v>29</c:v>
-                  </c:pt>
-                  <c:pt idx="30">
-                    <c:v>30</c:v>
-                  </c:pt>
-                  <c:pt idx="31">
-                    <c:v>31</c:v>
-                  </c:pt>
-                  <c:pt idx="32">
-                    <c:v>32</c:v>
-                  </c:pt>
-                  <c:pt idx="33">
-                    <c:v>33</c:v>
-                  </c:pt>
-                  <c:pt idx="34">
-                    <c:v>34</c:v>
-                  </c:pt>
-                  <c:pt idx="35">
-                    <c:v>35</c:v>
-                  </c:pt>
-                  <c:pt idx="36">
-                    <c:v>36</c:v>
-                  </c:pt>
-                  <c:pt idx="37">
-                    <c:v>37</c:v>
-                  </c:pt>
-                  <c:pt idx="38">
-                    <c:v>38</c:v>
-                  </c:pt>
-                  <c:pt idx="39">
-                    <c:v>39</c:v>
-                  </c:pt>
-                  <c:pt idx="40">
-                    <c:v>40</c:v>
-                  </c:pt>
-                </c:lvl>
-              </c:multiLvlStrCache>
-            </c:multiLvlStrRef>
+                <c:pt idx="0">
+                  <c:v>0</c:v>
+                </c:pt>
+                <c:pt idx="1">
+                  <c:v>1</c:v>
+                </c:pt>
+                <c:pt idx="2">
+                  <c:v>2</c:v>
+                </c:pt>
+                <c:pt idx="3">
+                  <c:v>3</c:v>
+                </c:pt>
+                <c:pt idx="4">
+                  <c:v>4</c:v>
+                </c:pt>
+                <c:pt idx="5">
+                  <c:v>5</c:v>
+                </c:pt>
+                <c:pt idx="6">
+                  <c:v>6</c:v>
+                </c:pt>
+                <c:pt idx="7">
+                  <c:v>7</c:v>
+                </c:pt>
+                <c:pt idx="8">
+                  <c:v>8</c:v>
+                </c:pt>
+                <c:pt idx="9">
+                  <c:v>9</c:v>
+                </c:pt>
+                <c:pt idx="10">
+                  <c:v>10</c:v>
+                </c:pt>
+                <c:pt idx="11">
+                  <c:v>11</c:v>
+                </c:pt>
+                <c:pt idx="12">
+                  <c:v>12</c:v>
+                </c:pt>
+                <c:pt idx="13">
+                  <c:v>13</c:v>
+                </c:pt>
+                <c:pt idx="14">
+                  <c:v>14</c:v>
+                </c:pt>
+                <c:pt idx="15">
+                  <c:v>15</c:v>
+                </c:pt>
+                <c:pt idx="16">
+                  <c:v>16</c:v>
+                </c:pt>
+                <c:pt idx="17">
+                  <c:v>17</c:v>
+                </c:pt>
+                <c:pt idx="18">
+                  <c:v>18</c:v>
+                </c:pt>
+                <c:pt idx="19">
+                  <c:v>19</c:v>
+                </c:pt>
+                <c:pt idx="20">
+                  <c:v>20</c:v>
+                </c:pt>
+                <c:pt idx="21">
+                  <c:v>21</c:v>
+                </c:pt>
+                <c:pt idx="22">
+                  <c:v>22</c:v>
+                </c:pt>
+                <c:pt idx="23">
+                  <c:v>23</c:v>
+                </c:pt>
+                <c:pt idx="24">
+                  <c:v>24</c:v>
+                </c:pt>
+                <c:pt idx="25">
+                  <c:v>25</c:v>
+                </c:pt>
+                <c:pt idx="26">
+                  <c:v>26</c:v>
+                </c:pt>
+                <c:pt idx="27">
+                  <c:v>27</c:v>
+                </c:pt>
+                <c:pt idx="28">
+                  <c:v>28</c:v>
+                </c:pt>
+                <c:pt idx="29">
+                  <c:v>29</c:v>
+                </c:pt>
+                <c:pt idx="30">
+                  <c:v>30</c:v>
+                </c:pt>
+                <c:pt idx="31">
+                  <c:v>31</c:v>
+                </c:pt>
+                <c:pt idx="32">
+                  <c:v>32</c:v>
+                </c:pt>
+                <c:pt idx="33">
+                  <c:v>33</c:v>
+                </c:pt>
+                <c:pt idx="34">
+                  <c:v>34</c:v>
+                </c:pt>
+                <c:pt idx="35">
+                  <c:v>35</c:v>
+                </c:pt>
+                <c:pt idx="36">
+                  <c:v>36</c:v>
+                </c:pt>
+                <c:pt idx="37">
+                  <c:v>37</c:v>
+                </c:pt>
+                <c:pt idx="38">
+                  <c:v>38</c:v>
+                </c:pt>
+                <c:pt idx="39">
+                  <c:v>39</c:v>
+                </c:pt>
+                <c:pt idx="40">
+                  <c:v>40</c:v>
+                </c:pt>
+              </c:strCache>
+            </c:strRef>
           </c:cat>
           <c:val>
             <c:numRef>
@@ -4554,25 +4194,25 @@
                 <c:formatCode>General</c:formatCode>
                 <c:ptCount val="41"/>
                 <c:pt idx="0">
-                  <c:v>0.0017981666618475832</c:v>
+                  <c:v>1.7981666618475832E-3</c:v>
                 </c:pt>
                 <c:pt idx="1">
-                  <c:v>0.0038659201394728076</c:v>
+                  <c:v>3.8659201394728076E-3</c:v>
                 </c:pt>
                 <c:pt idx="2">
-                  <c:v>0.007910959733930247</c:v>
+                  <c:v>7.9109597339302468E-3</c:v>
                 </c:pt>
                 <c:pt idx="3">
-                  <c:v>0.015408445571188785</c:v>
+                  <c:v>1.5408445571188785E-2</c:v>
                 </c:pt>
                 <c:pt idx="4">
-                  <c:v>0.028565500784550377</c:v>
+                  <c:v>2.8565500784550377E-2</c:v>
                 </c:pt>
                 <c:pt idx="5">
-                  <c:v>0.05040553336275365</c:v>
+                  <c:v>5.0405533362753649E-2</c:v>
                 </c:pt>
                 <c:pt idx="6">
-                  <c:v>0.08465798862252998</c:v>
+                  <c:v>8.4657988622529975E-2</c:v>
                 </c:pt>
                 <c:pt idx="7">
                   <c:v>0.1353352832366127</c:v>
@@ -4587,37 +4227,37 @@
                   <c:v>0.41111229050718745</c:v>
                 </c:pt>
                 <c:pt idx="11">
-                  <c:v>0.5394075072376266</c:v>
+                  <c:v>0.53940750723762665</c:v>
                 </c:pt>
                 <c:pt idx="12">
-                  <c:v>0.6736384553447268</c:v>
+                  <c:v>0.67363845534472677</c:v>
                 </c:pt>
                 <c:pt idx="13">
-                  <c:v>0.8007374029168081</c:v>
+                  <c:v>0.80073740291680806</c:v>
                 </c:pt>
                 <c:pt idx="14">
-                  <c:v>0.9059551911095096</c:v>
+                  <c:v>0.90595519110950962</c:v>
                 </c:pt>
                 <c:pt idx="15">
-                  <c:v>0.9756109800648459</c:v>
+                  <c:v>0.97561098006484592</c:v>
                 </c:pt>
                 <c:pt idx="16">
                   <c:v>1</c:v>
                 </c:pt>
                 <c:pt idx="17">
-                  <c:v>0.9756109800648459</c:v>
+                  <c:v>0.97561098006484592</c:v>
                 </c:pt>
                 <c:pt idx="18">
-                  <c:v>0.9059551911095096</c:v>
+                  <c:v>0.90595519110950962</c:v>
                 </c:pt>
                 <c:pt idx="19">
-                  <c:v>0.8007374029168081</c:v>
+                  <c:v>0.80073740291680806</c:v>
                 </c:pt>
                 <c:pt idx="20">
-                  <c:v>0.6736384553447268</c:v>
+                  <c:v>0.67363845534472677</c:v>
                 </c:pt>
                 <c:pt idx="21">
-                  <c:v>0.5394075072376266</c:v>
+                  <c:v>0.53940750723762665</c:v>
                 </c:pt>
                 <c:pt idx="22">
                   <c:v>0.41111229050718745</c:v>
@@ -4632,83 +4272,71 @@
                   <c:v>0.1353352832366127</c:v>
                 </c:pt>
                 <c:pt idx="26">
-                  <c:v>0.08465798862252998</c:v>
+                  <c:v>8.4657988622529975E-2</c:v>
                 </c:pt>
                 <c:pt idx="27">
-                  <c:v>0.05040553336275365</c:v>
+                  <c:v>5.0405533362753649E-2</c:v>
                 </c:pt>
                 <c:pt idx="28">
-                  <c:v>0.028565500784550377</c:v>
+                  <c:v>2.8565500784550377E-2</c:v>
                 </c:pt>
                 <c:pt idx="29">
-                  <c:v>0.015408445571188785</c:v>
+                  <c:v>1.5408445571188785E-2</c:v>
                 </c:pt>
                 <c:pt idx="30">
-                  <c:v>0.007910959733930247</c:v>
+                  <c:v>7.9109597339302468E-3</c:v>
                 </c:pt>
                 <c:pt idx="31">
-                  <c:v>0.0038659201394728076</c:v>
+                  <c:v>3.8659201394728076E-3</c:v>
                 </c:pt>
                 <c:pt idx="32">
-                  <c:v>0.0017981666618475832</c:v>
+                  <c:v>1.7981666618475832E-3</c:v>
                 </c:pt>
                 <c:pt idx="33">
-                  <c:v>0.0007960866914957304</c:v>
+                  <c:v>7.9608669149573035E-4</c:v>
                 </c:pt>
                 <c:pt idx="34">
-                  <c:v>0.00033546262790251185</c:v>
+                  <c:v>3.3546262790251185E-4</c:v>
                 </c:pt>
                 <c:pt idx="35">
-                  <c:v>0.00013454925108033938</c:v>
+                  <c:v>1.3454925108033938E-4</c:v>
                 </c:pt>
                 <c:pt idx="36">
-                  <c:v>0.00005136553118975947</c:v>
+                  <c:v>5.1365531189759469E-5</c:v>
                 </c:pt>
                 <c:pt idx="37">
-                  <c:v>0.00001866446911352057</c:v>
+                  <c:v>1.8664469113520571E-5</c:v>
                 </c:pt>
                 <c:pt idx="38">
-                  <c:v>0.0000064552469066326796</c:v>
+                  <c:v>6.4552469066326796E-6</c:v>
                 </c:pt>
                 <c:pt idx="39">
-                  <c:v>0.000002125022016232153</c:v>
+                  <c:v>2.1250220162321529E-6</c:v>
                 </c:pt>
                 <c:pt idx="40">
-                  <c:v>6.658361469857315e-7</c:v>
+                  <c:v>6.658361469857315E-7</c:v>
                 </c:pt>
               </c:numCache>
             </c:numRef>
           </c:val>
           <c:smooth val="1"/>
+          <c:extLst>
+            <c:ext xmlns:c16="http://schemas.microsoft.com/office/drawing/2014/chart" uri="{C3380CC4-5D6E-409C-BE32-E72D297353CC}">
+              <c16:uniqueId val="{00000001-97B7-4445-A94B-442B6F64E24E}"/>
+            </c:ext>
+          </c:extLst>
         </c:ser>
         <c:dLbls>
-          <c:numFmt formatCode="#,##0" sourceLinked="0"/>
-          <c:txPr>
-            <a:bodyPr/>
-            <a:lstStyle/>
-            <a:p>
-              <a:pPr>
-                <a:defRPr b="0" i="0" strike="noStrike" sz="1200" u="none">
-                  <a:solidFill>
-                    <a:srgbClr val="000000"/>
-                  </a:solidFill>
-                  <a:latin typeface="Arial"/>
-                </a:defRPr>
-              </a:pPr>
-            </a:p>
-          </c:txPr>
           <c:showLegendKey val="0"/>
           <c:showVal val="0"/>
           <c:showCatName val="0"/>
           <c:showSerName val="0"/>
           <c:showPercent val="0"/>
           <c:showBubbleSize val="0"/>
-          <c:showLeaderLines val="0"/>
         </c:dLbls>
-        <c:marker val="1"/>
+        <c:smooth val="0"/>
         <c:axId val="2094734554"/>
         <c:axId val="2094734552"/>
-        <c:axId val="2094734556"/>
       </c:lineChart>
       <c:catAx>
         <c:axId val="2094734554"/>
@@ -4732,7 +4360,7 @@
                   </a:defRPr>
                 </a:pPr>
                 <a:r>
-                  <a:rPr b="0" i="0" u="none" strike="noStrike">
+                  <a:rPr lang="fr-FR" b="0" i="0" u="none" strike="noStrike">
                     <a:solidFill>
                       <a:srgbClr val="6B6B6B"/>
                     </a:solidFill>
@@ -4743,7 +4371,6 @@
               </a:p>
             </c:rich>
           </c:tx>
-          <c:layout/>
           <c:overlay val="0"/>
         </c:title>
         <c:numFmt formatCode="General" sourceLinked="1"/>
@@ -4778,8 +4405,9 @@
         <c:crosses val="autoZero"/>
         <c:auto val="1"/>
         <c:lblAlgn val="ctr"/>
+        <c:lblOffset val="100"/>
+        <c:tickLblSkip val="10"/>
         <c:noMultiLvlLbl val="1"/>
-        <c:tickLblSkip val="10"/>
       </c:catAx>
       <c:valAx>
         <c:axId val="2094734552"/>
@@ -4814,7 +4442,7 @@
                   </a:defRPr>
                 </a:pPr>
                 <a:r>
-                  <a:rPr b="0" i="0" u="none" strike="noStrike">
+                  <a:rPr lang="fr-FR" b="0" i="0" u="none" strike="noStrike">
                     <a:solidFill>
                       <a:srgbClr val="6B6B6B"/>
                     </a:solidFill>
@@ -4825,7 +4453,6 @@
               </a:p>
             </c:rich>
           </c:tx>
-          <c:layout/>
           <c:overlay val="0"/>
         </c:title>
         <c:numFmt formatCode="General" sourceLinked="0"/>
@@ -4876,7 +4503,7 @@
         <a:lstStyle/>
         <a:p>
           <a:pPr>
-            <a:defRPr sz="1000">      </a:defRPr>
+            <a:defRPr sz="1000"/>
           </a:pPr>
           <a:endParaRPr lang="en-US"/>
         </a:p>
@@ -4884,6 +4511,7 @@
     </c:legend>
     <c:plotVisOnly val="1"/>
     <c:dispBlanksAs val="span"/>
+    <c:showDLblsOverMax val="1"/>
   </c:chart>
   <c:spPr>
     <a:noFill/>
@@ -4920,234 +4548,10 @@
           <a:chExt cx="0" cy="0"/>
         </a:xfrm>
       </p:grpSpPr>
-      <p:sp>
-        <p:nvSpPr>
-          <p:cNvPr id="2" name="Header Placeholder 1"/>
-          <p:cNvSpPr>
-            <a:spLocks noGrp="1"/>
-          </p:cNvSpPr>
-          <p:nvPr>
-            <p:ph type="hdr" sz="quarter"/>
-          </p:nvPr>
-        </p:nvSpPr>
-        <p:spPr>
-          <a:xfrm>
-            <a:off x="0" y="0"/>
-            <a:ext cx="2971800" cy="458788"/>
-          </a:xfrm>
-          <a:prstGeom prst="rect">
-            <a:avLst/>
-          </a:prstGeom>
-        </p:spPr>
-        <p:txBody>
-          <a:bodyPr vert="horz" lIns="91440" tIns="45720" rIns="91440" bIns="45720" rtlCol="0"/>
-          <a:lstStyle>
-            <a:lvl1pPr algn="l">
-              <a:defRPr sz="1200"/>
-            </a:lvl1pPr>
-          </a:lstStyle>
-          <a:p>
-            <a:endParaRPr lang="en-US"/>
-          </a:p>
-        </p:txBody>
-      </p:sp>
-      <p:sp>
-        <p:nvSpPr>
-          <p:cNvPr id="3" name="Date Placeholder 2"/>
-          <p:cNvSpPr>
-            <a:spLocks noGrp="1"/>
-          </p:cNvSpPr>
-          <p:nvPr>
-            <p:ph type="dt" idx="1"/>
-          </p:nvPr>
-        </p:nvSpPr>
-        <p:spPr>
-          <a:xfrm>
-            <a:off x="3884613" y="0"/>
-            <a:ext cx="2971800" cy="458788"/>
-          </a:xfrm>
-          <a:prstGeom prst="rect">
-            <a:avLst/>
-          </a:prstGeom>
-        </p:spPr>
-        <p:txBody>
-          <a:bodyPr vert="horz" lIns="91440" tIns="45720" rIns="91440" bIns="45720" rtlCol="0"/>
-          <a:lstStyle>
-            <a:lvl1pPr algn="r">
-              <a:defRPr sz="1200"/>
-            </a:lvl1pPr>
-          </a:lstStyle>
-          <a:p>
-            <a:fld id="{5282F153-3F37-0F45-9E97-73ACFA13230C}" type="datetimeFigureOut">
-              <a:rPr lang="en-US"/>
-              <a:t>7/23/19</a:t>
-            </a:fld>
-            <a:endParaRPr lang="en-US"/>
-          </a:p>
-        </p:txBody>
-      </p:sp>
-      <p:sp>
-        <p:nvSpPr>
-          <p:cNvPr id="4" name="Slide Image Placeholder 3"/>
-          <p:cNvSpPr>
-            <a:spLocks noGrp="1" noRot="1" noChangeAspect="1"/>
-          </p:cNvSpPr>
-          <p:nvPr>
-            <p:ph type="sldImg" idx="2"/>
-          </p:nvPr>
-        </p:nvSpPr>
-        <p:spPr>
-          <a:xfrm>
-            <a:off x="685800" y="1143000"/>
-            <a:ext cx="5486400" cy="3086100"/>
-          </a:xfrm>
-          <a:prstGeom prst="rect">
-            <a:avLst/>
-          </a:prstGeom>
-          <a:noFill/>
-          <a:ln w="12700">
-            <a:solidFill>
-              <a:prstClr val="black"/>
-            </a:solidFill>
-          </a:ln>
-        </p:spPr>
-        <p:txBody>
-          <a:bodyPr vert="horz" lIns="91440" tIns="45720" rIns="91440" bIns="45720" rtlCol="0" anchor="ctr"/>
-          <a:lstStyle/>
-          <a:p>
-            <a:endParaRPr lang="en-US"/>
-          </a:p>
-        </p:txBody>
-      </p:sp>
-      <p:sp>
-        <p:nvSpPr>
-          <p:cNvPr id="5" name="Notes Placeholder 4"/>
-          <p:cNvSpPr>
-            <a:spLocks noGrp="1"/>
-          </p:cNvSpPr>
-          <p:nvPr>
-            <p:ph type="body" sz="quarter" idx="3"/>
-          </p:nvPr>
-        </p:nvSpPr>
-        <p:spPr>
-          <a:xfrm>
-            <a:off x="685800" y="4400550"/>
-            <a:ext cx="5486400" cy="3600450"/>
-          </a:xfrm>
-          <a:prstGeom prst="rect">
-            <a:avLst/>
-          </a:prstGeom>
-        </p:spPr>
-        <p:txBody>
-          <a:bodyPr vert="horz" lIns="91440" tIns="45720" rIns="91440" bIns="45720" rtlCol="0"/>
-          <a:lstStyle/>
-          <a:p>
-            <a:pPr lvl="0"/>
-            <a:r>
-              <a:rPr lang="en-US"/>
-              <a:t>Click to edit Master text styles</a:t>
-            </a:r>
-          </a:p>
-          <a:p>
-            <a:pPr lvl="1"/>
-            <a:r>
-              <a:rPr lang="en-US"/>
-              <a:t>Second level</a:t>
-            </a:r>
-          </a:p>
-          <a:p>
-            <a:pPr lvl="2"/>
-            <a:r>
-              <a:rPr lang="en-US"/>
-              <a:t>Third level</a:t>
-            </a:r>
-          </a:p>
-          <a:p>
-            <a:pPr lvl="3"/>
-            <a:r>
-              <a:rPr lang="en-US"/>
-              <a:t>Fourth level</a:t>
-            </a:r>
-          </a:p>
-          <a:p>
-            <a:pPr lvl="4"/>
-            <a:r>
-              <a:rPr lang="en-US"/>
-              <a:t>Fifth level</a:t>
-            </a:r>
-          </a:p>
-        </p:txBody>
-      </p:sp>
-      <p:sp>
-        <p:nvSpPr>
-          <p:cNvPr id="6" name="Footer Placeholder 5"/>
-          <p:cNvSpPr>
-            <a:spLocks noGrp="1"/>
-          </p:cNvSpPr>
-          <p:nvPr>
-            <p:ph type="ftr" sz="quarter" idx="4"/>
-          </p:nvPr>
-        </p:nvSpPr>
-        <p:spPr>
-          <a:xfrm>
-            <a:off x="0" y="8685213"/>
-            <a:ext cx="2971800" cy="458787"/>
-          </a:xfrm>
-          <a:prstGeom prst="rect">
-            <a:avLst/>
-          </a:prstGeom>
-        </p:spPr>
-        <p:txBody>
-          <a:bodyPr vert="horz" lIns="91440" tIns="45720" rIns="91440" bIns="45720" rtlCol="0" anchor="b"/>
-          <a:lstStyle>
-            <a:lvl1pPr algn="l">
-              <a:defRPr sz="1200"/>
-            </a:lvl1pPr>
-          </a:lstStyle>
-          <a:p>
-            <a:endParaRPr lang="en-US"/>
-          </a:p>
-        </p:txBody>
-      </p:sp>
-      <p:sp>
-        <p:nvSpPr>
-          <p:cNvPr id="7" name="Slide Number Placeholder 6"/>
-          <p:cNvSpPr>
-            <a:spLocks noGrp="1"/>
-          </p:cNvSpPr>
-          <p:nvPr>
-            <p:ph type="sldNum" sz="quarter" idx="5"/>
-          </p:nvPr>
-        </p:nvSpPr>
-        <p:spPr>
-          <a:xfrm>
-            <a:off x="3884613" y="8685213"/>
-            <a:ext cx="2971800" cy="458787"/>
-          </a:xfrm>
-          <a:prstGeom prst="rect">
-            <a:avLst/>
-          </a:prstGeom>
-        </p:spPr>
-        <p:txBody>
-          <a:bodyPr vert="horz" lIns="91440" tIns="45720" rIns="91440" bIns="45720" rtlCol="0" anchor="b"/>
-          <a:lstStyle>
-            <a:lvl1pPr algn="r">
-              <a:defRPr sz="1200"/>
-            </a:lvl1pPr>
-          </a:lstStyle>
-          <a:p>
-            <a:fld id="{CE5E9CC1-C706-0F49-92D6-E571CC5EEA8F}" type="slidenum">
-              <a:rPr lang="en-US"/>
-              <a:t>‹#›</a:t>
-            </a:fld>
-            <a:endParaRPr lang="en-US"/>
-          </a:p>
-        </p:txBody>
-      </p:sp>
     </p:spTree>
     <p:extLst>
       <p:ext uri="{BB962C8B-B14F-4D97-AF65-F5344CB8AC3E}">
-        <p14:creationId xmlns:p14="http://schemas.microsoft.com/office/powerpoint/2010/main" val="1024086991"/>
+        <p14:creationId xmlns:p14="http://schemas.microsoft.com/office/powerpoint/2010/main" val="4237736760"/>
       </p:ext>
     </p:extLst>
   </p:cSld>
@@ -5291,10 +4695,6 @@
           <a:bodyPr/>
           <a:lstStyle/>
           <a:p>
-            <a:r>
-              <a:rPr lang="en-US" dirty="0"/>
-              <a:t/>
-            </a:r>
             <a:endParaRPr lang="en-US" dirty="0"/>
           </a:p>
         </p:txBody>
@@ -5379,14 +4779,6 @@
           <a:bodyPr/>
           <a:lstStyle/>
           <a:p>
-            <a:r>
-              <a:rPr lang="en-US" dirty="0"/>
-              <a:t>Some practical guidance, because this is where projects succeed or fail.
-Sampling design first. The number of individuals per species matters more than the number of traits: as a rule of thumb, ten to fifteen individuals per population and several populations per species give a usable estimate of within- and between-population variance; a single individual per species gives a mean of unknown quality. Stratify by size class if ontogeny is a concern, and record sex when it can be determined.
-Traits next. Not all traits vary equally within species: size-related traits and diet vary a lot, some shape ratios less. Measure traits as ratios or size-correct them, otherwise ontogeny will dominate everything; for shape, geometric morphometrics — landmarks, Procrustes superimposition, then shape coordinates — separates size from shape explicitly.
-Measurement protocol. Individual-level data multiply the number of measurements, so repeatability becomes an issue: standardised photographs, a scale bar, a written landmark protocol, and a quantification of operator error — measure a subset twice, or by two people, and compute intra-class correlations. An effect of habitat on shape smaller than the difference between two operators is not a result.
-Analysis. Mixed models for variance partitioning and trait–environment relationships at several levels; TPD or hypervolume methods for functional diversity with individuals; geometric morphometrics in geomorph for shape. All of this is in R, and all of it is reproducible if you script it from the start.</a:t>
-            </a:r>
             <a:endParaRPr lang="en-US" dirty="0"/>
           </a:p>
         </p:txBody>
@@ -5471,14 +4863,6 @@
           <a:bodyPr/>
           <a:lstStyle/>
           <a:p>
-            <a:r>
-              <a:rPr lang="en-US" dirty="0"/>
-              <a:t>I want to close by connecting this block to the extinction discussion of Block 2, because the two are the same story at different levels.
-Species do not disappear all at once: they lose populations first, and their trait distributions narrow before they vanish. Fisheries provide the clearest example: size-selective harvesting removes the largest individuals, populations mature earlier and smaller, and within a few decades the size distribution of exploited stocks has shifted — Jørgensen and colleagues, in Science in 2007, called this managing evolving fish stocks. From the point of view of this course, that is a loss of intraspecific functional variance: the large individuals that ate large prey, produced the most eggs and moved the furthest are gone, while the species is still on the list.
-The same logic applies to river fragmentation and habitat loss: the populations of a widespread species that occupied the fast-flowing or the large-river habitats are the first to go, and with them a part of the species' functional range that the species mean never showed. So when we ask, as in Block 2, which functions are lost when threatened species disappear, we should add: which functions are already being lost within species that are not yet threatened. The tools of this block — individual-level traits, variance partitioning, TPD — are what make that question answerable. I find this one of the most exciting open questions in functional ecology, and it is one where freshwater fishes, with their indeterminate growth, their population structure and their exposure to harvesting and fragmentation, are an ideal system.
---- INSTRUCTOR NOTE ---
-If time allows, ask the room: "In the two-rivers example of slide 2, would measuring individuals rather than species change which river you consider more diverse?" 2 min.</a:t>
-            </a:r>
             <a:endParaRPr lang="en-US" dirty="0"/>
           </a:p>
         </p:txBody>
@@ -5563,10 +4947,6 @@
           <a:bodyPr/>
           <a:lstStyle/>
           <a:p>
-            <a:r>
-              <a:rPr lang="en-US" dirty="0"/>
-              <a:t>In short. Traits are properties of individuals, and the species mean is a modelling choice with consequences. Intraspecific variability is large — a quarter of within-community variation on average in plants, and more for fish body size — and it is structured by ontogeny, plasticity and local adaptation, so it carries ecological information. Ignoring it overestimates the distinctness of species, hides the intraspecific part of the response to the environment, and misses effects on ecosystem functioning that are as large as those of species replacement. The tools exist — individual-level sampling, variance partitioning with mixed models, trait probability densities — and they open a question that connects directly with conservation: functional variance is lost within species long before species are lost.</a:t>
-            </a:r>
             <a:endParaRPr lang="en-US" dirty="0"/>
           </a:p>
         </p:txBody>
@@ -5651,11 +5031,6 @@
           <a:bodyPr/>
           <a:lstStyle/>
           <a:p>
-            <a:r>
-              <a:rPr lang="en-US" dirty="0"/>
-              <a:t>Welcome back for the last block. Everything we have done so far represented a species by a single point: its mean trait value. I told you in Block 1 that this was a choice. This block is about what that choice hides, and about what happens when we put the variance back.
-Go back to the definition of a functional trait: a feature measurable at the individual level. Traits are properties of individuals; the species mean is a summary that we compute for convenience. Individuals of the same species differ in body size, in body shape, in diet, in thermal tolerance — sometimes as much as two different species do. Violle and colleagues called the rediscovery of this fact "the return of the variance", in a 2012 paper in Trends in Ecology and Evolution, and the title captures the situation well: community ecology spent two decades building trait-based tools on species means, and is now adding the variance back, one method at a time.</a:t>
-            </a:r>
             <a:endParaRPr lang="en-US" dirty="0"/>
           </a:p>
         </p:txBody>
@@ -5740,11 +5115,6 @@
           <a:bodyPr/>
           <a:lstStyle/>
           <a:p>
-            <a:r>
-              <a:rPr lang="en-US" dirty="0"/>
-              <a:t>The first question is quantitative: how much variation is there within species, relative to the variation between species? For plants we have a good answer: Siefert and colleagues compiled more than six hundred studies in 2015 and found that intraspecific variation represents on average a quarter of the total trait variation within communities, and about a third of the variation among communities. So for the average trait, three quarters of the variation is between species — the species mean is not a bad summary — but a quarter is inside species, and that is far too much to ignore, especially along environmental gradients where it is precisely the intraspecific part that responds.
-For fishes the picture is, if anything, more extreme, for a reason that plants share only partly: indeterminate growth. A single fish species spans one or two orders of magnitude in body mass between the juvenile and the adult, and body size drives everything — prey size, predators, metabolism, habitat use. A juvenile pike and an adult pike are not the same functional entity. Body shape also varies within species with habitat: fishes from fast-flowing reaches are more streamlined than conspecifics from still water; lake fish differ in body depth and fin position between littoral and pelagic habitats. And diet varies among individuals to the point that Bolnick and colleagues, in 2003, documented individual specialisation — individuals using a small subset of the population's niche — in more than a hundred species, fishes prominent among them.</a:t>
-            </a:r>
             <a:endParaRPr lang="en-US" dirty="0"/>
           </a:p>
         </p:txBody>
@@ -5829,12 +5199,6 @@
           <a:bodyPr/>
           <a:lstStyle/>
           <a:p>
-            <a:r>
-              <a:rPr lang="en-US" dirty="0"/>
-              <a:t>The second question is structural: where does the variance sit, and what produces it?
-Trait variation is organised hierarchically. Between species, obviously. Between populations of the same species, living in different rivers or lakes. Between individuals within a population. And even within an individual over time — a fish grows, and its shape changes with it. Messier and colleagues, in 2010, showed for leaf traits that a large share of the variance sits at the lowest levels, within populations, and this is what makes sampling design so important: measuring one individual per species tells you nothing about that structure.
-Three processes generate the variance. Ontogeny: individuals change as they develop, and for fishes this is the largest source of variation in size and often in shape and diet. Phenotypic plasticity: the same genotype produces different phenotypes in different environments — the streamlined body in fast current is partly plastic, reversible within a generation. And genetic differentiation between populations: local adaptation, which builds up over generations, so that populations in different habitats differ even when reared in common conditions. Sex adds a fourth axis in many species. Distinguishing plasticity from adaptation requires experiments — common gardens, transplants — but for our purposes the important point is that all three produce structured, not random, variance: variance that tracks the environment and therefore carries ecological information.</a:t>
-            </a:r>
             <a:endParaRPr lang="en-US" dirty="0"/>
           </a:p>
         </p:txBody>
@@ -5919,13 +5283,6 @@
           <a:bodyPr/>
           <a:lstStyle/>
           <a:p>
-            <a:r>
-              <a:rPr lang="en-US" dirty="0"/>
-              <a:t>Why should a community ecologist care? Bolnick and colleagues answered in 2011 with a list of mechanisms; I will keep three.
-First, functional overlap. Two species whose means are far apart look functionally distinct; if each has a wide distribution of individuals, they overlap, share resources, and compete — the mean-based picture overestimates the distinctness of species and therefore overestimates complementarity. Conversely, individuals within a species that use different resources reduce competition within the species, which is Bolnick's individual specialisation and a route to coexistence that species means cannot represent.
-Second, response to the environment. When conditions change, a population can respond by shifting its trait distribution — through plasticity or selection — before any species is replaced. Along a gradient, part of the community's trait response is therefore intraspecific, and a study using species means will attribute the whole response to species turnover and miss this component. For fishes facing warming or flow alteration, this intraspecific response is probably the first one we should expect to see.
-Third, the assembly questions of Block 2 change. Whether a community is clustered or overdispersed depends on distances between species; if those distances are computed between means, wide overlapping distributions make communities look more overdispersed than they are. Null models built on species means test a hypothesis about means.</a:t>
-            </a:r>
             <a:endParaRPr lang="en-US" dirty="0"/>
           </a:p>
         </p:txBody>
@@ -6010,11 +5367,6 @@
           <a:bodyPr/>
           <a:lstStyle/>
           <a:p>
-            <a:r>
-              <a:rPr lang="en-US" dirty="0"/>
-              <a:t>The consequences reach ecosystem functioning. In 2018 Des Roches and colleagues compiled experiments that manipulated either the identity of a species or the variation within a species — different populations, genotypes or phenotypes of the same species — and compared the effects on community and ecosystem responses. The result was that intraspecific effects were of the same order of magnitude as the effects of replacing one species by another, and in some cases larger. Fish were well represented among the systems — stickleback, guppies, alewife — because these are precisely the species in which population differences in morphology and diet are well documented.
-Closer to home, Raffard, Santoul, Cucherousset and Blanchet, in Toulouse, published in 2019 a meta-analysis of the community and ecosystem consequences of intraspecific diversity — the number of genotypes or phenotypes within a species — and found consistent, positive effects on ecosystem functions, again comparable to those of species diversity. The message is that a species is not a functional unit: its populations do different things, and losing populations — which happens long before a species goes extinct — has functional consequences. Keep this in mind for the conservation discussion.</a:t>
-            </a:r>
             <a:endParaRPr lang="en-US" dirty="0"/>
           </a:p>
         </p:txBody>
@@ -6099,11 +5451,6 @@
           <a:bodyPr/>
           <a:lstStyle/>
           <a:p>
-            <a:r>
-              <a:rPr lang="en-US" dirty="0"/>
-              <a:t>How do we bring the variance into the tools of Blocks 1 and 2? The cleanest framework is the trait probability density, proposed by Carmona, de Bello, Mason and Lepš in 2016. A species is no longer a point but a probability distribution over the functional space — the density of trait values across its individuals, estimated by a kernel from the measured individuals, or, if only a mean and a variance are available, by a normal distribution. A community is the abundance-weighted sum of the species densities: a distribution over the space. And the three components of functional diversity are recomputed on that distribution: richness as the volume where the density is above a threshold, evenness as the regularity of the density, divergence as its concentration away from the centre.
-This does several things at once. It integrates intraspecific variability naturally — two species with the same mean but wide overlapping distributions are close, as they should be. It removes the sensitivity of the convex hull to a single outlier. It works with any number of species. And it scales across levels: the same object describes an individual, a population, a species, a community or a region, so that you can partition functional diversity across those levels. The R package is TPD; funspace, which some of you will try on Thursday, uses the same logic for visualisation. If you go on to work with individual-level data, this is the framework to learn.</a:t>
-            </a:r>
             <a:endParaRPr lang="en-US" dirty="0"/>
           </a:p>
         </p:txBody>
@@ -6188,12 +5535,6 @@
           <a:bodyPr/>
           <a:lstStyle/>
           <a:p>
-            <a:r>
-              <a:rPr lang="en-US" dirty="0"/>
-              <a:t>If you measure traits on individuals, the first analysis is always a partition of the variance. Two tools.
-The first is a variance decomposition of functional diversity itself, proposed by de Bello and colleagues in 2011: the total functional diversity of a community, computed on individuals, is split into a between-species component — what you would get from species means — a within-species component, and their covariation. The ratio tells you directly how much your mean-based analysis misses, and it varies enormously between traits: for body size in fishes the within-species part can dominate.
-The second is a hierarchical mixed model: the trait as response, random intercepts for species, for population nested in species, and the residual as within-population variation. The variance components give the share of variation at each level, and you can add fixed effects — habitat, temperature — to ask which level responds to the environment. This is a standard lmer model, and it is what I use in my own work on fish morphology: with several populations per species and a dozen individuals per population, you can ask whether body shape tracks the habitat within species, whether all species respond in the same direction, and how much of the community-level response is intraspecific.</a:t>
-            </a:r>
             <a:endParaRPr lang="en-US" dirty="0"/>
           </a:p>
         </p:txBody>
@@ -6278,13 +5619,6 @@
           <a:bodyPr/>
           <a:lstStyle/>
           <a:p>
-            <a:r>
-              <a:rPr lang="en-US" dirty="0"/>
-              <a:t>Let me show you what this looks like for fishes. Here, several species, each represented by many individuals from several populations, placed in a morphological space built on individuals rather than on species means. Three things to notice. First, the clouds of the species are wide, and they overlap: species that would be distinct points in a mean-based space share regions of the space. Second, within a species, individuals from different habitats occupy different parts of the cloud — the intraspecific variation is structured by the environment, not random. Third, the direction of that structure is often shared among species: fast-flowing habitats pull all species towards more streamlined shapes, which is what you expect from a common selective or plastic response to flow.
-The consequence for the analyses of Block 2 is direct: a community-level trait–environment relationship computed on species means captures only the turnover part of this response, and a community may appear functionally stable while its populations are shifting. This is one of the reasons why we invest in individual-level morphometrics — landmarks, geometric morphometrics — for fishes, and why the question of how many individuals to measure per species is not a detail.
---- INSTRUCTOR NOTE ---
-Replace the placeholder with a figure from your own data; if none is ready, use a published example (e.g. shape divergence between lake and stream populations of a cyprinid or stickleback). Keep the three observations — wide clouds, structured by habitat, shared direction — whatever the figure.</a:t>
-            </a:r>
             <a:endParaRPr lang="en-US" dirty="0"/>
           </a:p>
         </p:txBody>
@@ -6358,6 +5692,11 @@
 <file path=ppt/slideMasters/slideMaster1.xml><?xml version="1.0" encoding="utf-8"?>
 <p:sldMaster xmlns:a="http://schemas.openxmlformats.org/drawingml/2006/main" xmlns:r="http://schemas.openxmlformats.org/officeDocument/2006/relationships" xmlns:p="http://schemas.openxmlformats.org/presentationml/2006/main">
   <p:cSld>
+    <p:bg>
+      <p:bgRef idx="1001">
+        <a:schemeClr val="bg1"/>
+      </p:bgRef>
+    </p:bg>
     <p:spTree>
       <p:nvGrpSpPr>
         <p:cNvPr id="1" name=""/>
@@ -6640,6 +5979,7 @@
         <a:solidFill>
           <a:srgbClr val="0B3C5D"/>
         </a:solidFill>
+        <a:effectLst/>
       </p:bgPr>
     </p:bg>
     <p:spTree>
@@ -6677,7 +6017,7 @@
           <a:bodyPr wrap="square" lIns="0" tIns="0" rIns="0" bIns="0" rtlCol="0" anchor="b"/>
           <a:lstStyle/>
           <a:p>
-            <a:pPr indent="0" marL="0">
+            <a:pPr marL="0" indent="0">
               <a:buNone/>
             </a:pPr>
             <a:r>
@@ -6716,7 +6056,7 @@
           <a:bodyPr wrap="square" lIns="0" tIns="0" rIns="0" bIns="0" rtlCol="0" anchor="t"/>
           <a:lstStyle/>
           <a:p>
-            <a:pPr indent="0" marL="0">
+            <a:pPr marL="0" indent="0">
               <a:buNone/>
             </a:pPr>
             <a:r>
@@ -6755,7 +6095,7 @@
           <a:bodyPr wrap="square" lIns="0" tIns="0" rIns="0" bIns="0" rtlCol="0" anchor="ctr"/>
           <a:lstStyle/>
           <a:p>
-            <a:pPr indent="0" marL="0">
+            <a:pPr marL="0" indent="0">
               <a:buNone/>
             </a:pPr>
             <a:r>
@@ -6789,6 +6129,7 @@
         <a:solidFill>
           <a:srgbClr val="FFFFFF"/>
         </a:solidFill>
+        <a:effectLst/>
       </p:bgPr>
     </p:bg>
     <p:spTree>
@@ -6826,7 +6167,7 @@
           <a:bodyPr wrap="square" lIns="0" tIns="0" rIns="0" bIns="0" rtlCol="0" anchor="ctr"/>
           <a:lstStyle/>
           <a:p>
-            <a:pPr indent="0" marL="0">
+            <a:pPr marL="0" indent="0">
               <a:buNone/>
             </a:pPr>
             <a:r>
@@ -6865,7 +6206,7 @@
           <a:bodyPr wrap="square" lIns="0" tIns="0" rIns="0" bIns="0" rtlCol="0" anchor="ctr"/>
           <a:lstStyle/>
           <a:p>
-            <a:pPr indent="0" marL="0">
+            <a:pPr marL="0" indent="0">
               <a:buNone/>
             </a:pPr>
             <a:r>
@@ -6904,7 +6245,7 @@
           <a:bodyPr wrap="square" lIns="0" tIns="0" rIns="0" bIns="0" rtlCol="0" anchor="ctr"/>
           <a:lstStyle/>
           <a:p>
-            <a:pPr algn="r" indent="0" marL="0">
+            <a:pPr marL="0" indent="0" algn="r">
               <a:buNone/>
             </a:pPr>
             <a:r>
@@ -6948,6 +6289,13 @@
             <a:prstDash val="solid"/>
           </a:ln>
         </p:spPr>
+        <p:txBody>
+          <a:bodyPr/>
+          <a:lstStyle/>
+          <a:p>
+            <a:endParaRPr lang="en-GB"/>
+          </a:p>
+        </p:txBody>
       </p:sp>
       <p:sp>
         <p:nvSpPr>
@@ -6970,7 +6318,7 @@
           <a:bodyPr wrap="square" lIns="0" tIns="0" rIns="0" bIns="0" rtlCol="0" anchor="ctr"/>
           <a:lstStyle/>
           <a:p>
-            <a:pPr indent="0" marL="0">
+            <a:pPr marL="0" indent="0">
               <a:buNone/>
             </a:pPr>
             <a:r>
@@ -7009,7 +6357,7 @@
           <a:bodyPr wrap="square" lIns="0" tIns="0" rIns="0" bIns="0" rtlCol="0" anchor="t"/>
           <a:lstStyle/>
           <a:p>
-            <a:pPr indent="0" marL="0">
+            <a:pPr marL="0" indent="0">
               <a:buNone/>
             </a:pPr>
             <a:r>
@@ -7053,6 +6401,13 @@
             <a:prstDash val="solid"/>
           </a:ln>
         </p:spPr>
+        <p:txBody>
+          <a:bodyPr/>
+          <a:lstStyle/>
+          <a:p>
+            <a:endParaRPr lang="en-GB"/>
+          </a:p>
+        </p:txBody>
       </p:sp>
       <p:sp>
         <p:nvSpPr>
@@ -7075,7 +6430,7 @@
           <a:bodyPr wrap="square" lIns="0" tIns="0" rIns="0" bIns="0" rtlCol="0" anchor="ctr"/>
           <a:lstStyle/>
           <a:p>
-            <a:pPr indent="0" marL="0">
+            <a:pPr marL="0" indent="0">
               <a:buNone/>
             </a:pPr>
             <a:r>
@@ -7114,7 +6469,7 @@
           <a:bodyPr wrap="square" lIns="0" tIns="0" rIns="0" bIns="0" rtlCol="0" anchor="t"/>
           <a:lstStyle/>
           <a:p>
-            <a:pPr indent="0" marL="0">
+            <a:pPr marL="0" indent="0">
               <a:buNone/>
             </a:pPr>
             <a:r>
@@ -7158,6 +6513,13 @@
             <a:prstDash val="solid"/>
           </a:ln>
         </p:spPr>
+        <p:txBody>
+          <a:bodyPr/>
+          <a:lstStyle/>
+          <a:p>
+            <a:endParaRPr lang="en-GB"/>
+          </a:p>
+        </p:txBody>
       </p:sp>
       <p:sp>
         <p:nvSpPr>
@@ -7180,7 +6542,7 @@
           <a:bodyPr wrap="square" lIns="0" tIns="0" rIns="0" bIns="0" rtlCol="0" anchor="ctr"/>
           <a:lstStyle/>
           <a:p>
-            <a:pPr indent="0" marL="0">
+            <a:pPr marL="0" indent="0">
               <a:buNone/>
             </a:pPr>
             <a:r>
@@ -7219,7 +6581,7 @@
           <a:bodyPr wrap="square" lIns="0" tIns="0" rIns="0" bIns="0" rtlCol="0" anchor="t"/>
           <a:lstStyle/>
           <a:p>
-            <a:pPr indent="0" marL="0">
+            <a:pPr marL="0" indent="0">
               <a:buNone/>
             </a:pPr>
             <a:r>
@@ -7263,6 +6625,13 @@
             <a:prstDash val="solid"/>
           </a:ln>
         </p:spPr>
+        <p:txBody>
+          <a:bodyPr/>
+          <a:lstStyle/>
+          <a:p>
+            <a:endParaRPr lang="en-GB"/>
+          </a:p>
+        </p:txBody>
       </p:sp>
       <p:sp>
         <p:nvSpPr>
@@ -7285,7 +6654,7 @@
           <a:bodyPr wrap="square" lIns="0" tIns="0" rIns="0" bIns="0" rtlCol="0" anchor="ctr"/>
           <a:lstStyle/>
           <a:p>
-            <a:pPr indent="0" marL="0">
+            <a:pPr marL="0" indent="0">
               <a:buNone/>
             </a:pPr>
             <a:r>
@@ -7324,7 +6693,7 @@
           <a:bodyPr wrap="square" lIns="0" tIns="0" rIns="0" bIns="0" rtlCol="0" anchor="t"/>
           <a:lstStyle/>
           <a:p>
-            <a:pPr indent="0" marL="0">
+            <a:pPr marL="0" indent="0">
               <a:buNone/>
             </a:pPr>
             <a:r>
@@ -7368,6 +6737,13 @@
             <a:prstDash val="solid"/>
           </a:ln>
         </p:spPr>
+        <p:txBody>
+          <a:bodyPr/>
+          <a:lstStyle/>
+          <a:p>
+            <a:endParaRPr lang="en-GB"/>
+          </a:p>
+        </p:txBody>
       </p:sp>
       <p:sp>
         <p:nvSpPr>
@@ -7390,7 +6766,7 @@
           <a:bodyPr wrap="square" lIns="50800" tIns="50800" rIns="50800" bIns="50800" rtlCol="0" anchor="ctr"/>
           <a:lstStyle/>
           <a:p>
-            <a:pPr indent="0" marL="0">
+            <a:pPr marL="0" indent="0">
               <a:buNone/>
             </a:pPr>
             <a:r>
@@ -7424,6 +6800,7 @@
         <a:solidFill>
           <a:srgbClr val="FFFFFF"/>
         </a:solidFill>
+        <a:effectLst/>
       </p:bgPr>
     </p:bg>
     <p:spTree>
@@ -7461,7 +6838,7 @@
           <a:bodyPr wrap="square" lIns="0" tIns="0" rIns="0" bIns="0" rtlCol="0" anchor="ctr"/>
           <a:lstStyle/>
           <a:p>
-            <a:pPr indent="0" marL="0">
+            <a:pPr marL="0" indent="0">
               <a:buNone/>
             </a:pPr>
             <a:r>
@@ -7500,7 +6877,7 @@
           <a:bodyPr wrap="square" lIns="0" tIns="0" rIns="0" bIns="0" rtlCol="0" anchor="ctr"/>
           <a:lstStyle/>
           <a:p>
-            <a:pPr indent="0" marL="0">
+            <a:pPr marL="0" indent="0">
               <a:buNone/>
             </a:pPr>
             <a:r>
@@ -7539,7 +6916,7 @@
           <a:bodyPr wrap="square" lIns="0" tIns="0" rIns="0" bIns="0" rtlCol="0" anchor="ctr"/>
           <a:lstStyle/>
           <a:p>
-            <a:pPr algn="r" indent="0" marL="0">
+            <a:pPr marL="0" indent="0" algn="r">
               <a:buNone/>
             </a:pPr>
             <a:r>
@@ -7559,7 +6936,7 @@
       </p:sp>
       <p:graphicFrame>
         <p:nvGraphicFramePr>
-          <p:cNvPr id="5" name="Chart 0" descr=""/>
+          <p:cNvPr id="5" name="Chart 0"/>
           <p:cNvGraphicFramePr/>
           <p:nvPr/>
         </p:nvGraphicFramePr>
@@ -7567,9 +6944,9 @@
           <a:off x="548640" y="1371600"/>
           <a:ext cx="5669280" cy="4023360"/>
         </p:xfrm>
-        <a:graphic xmlns:a="http://schemas.openxmlformats.org/drawingml/2006/main">
+        <a:graphic>
           <a:graphicData uri="http://schemas.openxmlformats.org/drawingml/2006/chart">
-            <c:chart xmlns:c="http://schemas.openxmlformats.org/drawingml/2006/chart" r:id="rId1"/>
+            <c:chart xmlns:c="http://schemas.openxmlformats.org/drawingml/2006/chart" xmlns:r="http://schemas.openxmlformats.org/officeDocument/2006/relationships" r:id="rId3"/>
           </a:graphicData>
         </a:graphic>
       </p:graphicFrame>
@@ -7705,6 +7082,13 @@
             <a:prstDash val="solid"/>
           </a:ln>
         </p:spPr>
+        <p:txBody>
+          <a:bodyPr/>
+          <a:lstStyle/>
+          <a:p>
+            <a:endParaRPr lang="en-GB"/>
+          </a:p>
+        </p:txBody>
       </p:sp>
       <p:sp>
         <p:nvSpPr>
@@ -7727,7 +7111,7 @@
           <a:bodyPr wrap="square" lIns="50800" tIns="50800" rIns="50800" bIns="50800" rtlCol="0" anchor="ctr"/>
           <a:lstStyle/>
           <a:p>
-            <a:pPr indent="0" marL="0">
+            <a:pPr marL="0" indent="0">
               <a:buNone/>
             </a:pPr>
             <a:r>
@@ -7761,6 +7145,7 @@
         <a:solidFill>
           <a:srgbClr val="FFFFFF"/>
         </a:solidFill>
+        <a:effectLst/>
       </p:bgPr>
     </p:bg>
     <p:spTree>
@@ -7798,7 +7183,7 @@
           <a:bodyPr wrap="square" lIns="0" tIns="0" rIns="0" bIns="0" rtlCol="0" anchor="ctr"/>
           <a:lstStyle/>
           <a:p>
-            <a:pPr indent="0" marL="0">
+            <a:pPr marL="0" indent="0">
               <a:buNone/>
             </a:pPr>
             <a:r>
@@ -7837,7 +7222,7 @@
           <a:bodyPr wrap="square" lIns="0" tIns="0" rIns="0" bIns="0" rtlCol="0" anchor="ctr"/>
           <a:lstStyle/>
           <a:p>
-            <a:pPr indent="0" marL="0">
+            <a:pPr marL="0" indent="0">
               <a:buNone/>
             </a:pPr>
             <a:r>
@@ -7876,7 +7261,7 @@
           <a:bodyPr wrap="square" lIns="0" tIns="0" rIns="0" bIns="0" rtlCol="0" anchor="ctr"/>
           <a:lstStyle/>
           <a:p>
-            <a:pPr algn="r" indent="0" marL="0">
+            <a:pPr marL="0" indent="0" algn="r">
               <a:buNone/>
             </a:pPr>
             <a:r>
@@ -7920,6 +7305,13 @@
             <a:prstDash val="solid"/>
           </a:ln>
         </p:spPr>
+        <p:txBody>
+          <a:bodyPr/>
+          <a:lstStyle/>
+          <a:p>
+            <a:endParaRPr lang="en-GB"/>
+          </a:p>
+        </p:txBody>
       </p:sp>
       <p:sp>
         <p:nvSpPr>
@@ -7942,7 +7334,7 @@
           <a:bodyPr wrap="square" lIns="25400" tIns="25400" rIns="25400" bIns="25400" rtlCol="0" anchor="ctr"/>
           <a:lstStyle/>
           <a:p>
-            <a:pPr algn="ctr" indent="0" marL="0">
+            <a:pPr marL="0" indent="0" algn="ctr">
               <a:buNone/>
             </a:pPr>
             <a:r>
@@ -7981,7 +7373,7 @@
           <a:bodyPr wrap="square" lIns="0" tIns="0" rIns="0" bIns="0" rtlCol="0" anchor="ctr"/>
           <a:lstStyle/>
           <a:p>
-            <a:pPr indent="0" marL="0">
+            <a:pPr marL="0" indent="0">
               <a:buNone/>
             </a:pPr>
             <a:r>
@@ -8025,6 +7417,13 @@
             <a:prstDash val="solid"/>
           </a:ln>
         </p:spPr>
+        <p:txBody>
+          <a:bodyPr/>
+          <a:lstStyle/>
+          <a:p>
+            <a:endParaRPr lang="en-GB"/>
+          </a:p>
+        </p:txBody>
       </p:sp>
       <p:sp>
         <p:nvSpPr>
@@ -8047,7 +7446,7 @@
           <a:bodyPr wrap="square" lIns="25400" tIns="25400" rIns="25400" bIns="25400" rtlCol="0" anchor="ctr"/>
           <a:lstStyle/>
           <a:p>
-            <a:pPr algn="ctr" indent="0" marL="0">
+            <a:pPr marL="0" indent="0" algn="ctr">
               <a:buNone/>
             </a:pPr>
             <a:r>
@@ -8086,7 +7485,7 @@
           <a:bodyPr wrap="square" lIns="0" tIns="0" rIns="0" bIns="0" rtlCol="0" anchor="ctr"/>
           <a:lstStyle/>
           <a:p>
-            <a:pPr indent="0" marL="0">
+            <a:pPr marL="0" indent="0">
               <a:buNone/>
             </a:pPr>
             <a:r>
@@ -8130,6 +7529,13 @@
             <a:prstDash val="solid"/>
           </a:ln>
         </p:spPr>
+        <p:txBody>
+          <a:bodyPr/>
+          <a:lstStyle/>
+          <a:p>
+            <a:endParaRPr lang="en-GB"/>
+          </a:p>
+        </p:txBody>
       </p:sp>
       <p:sp>
         <p:nvSpPr>
@@ -8152,7 +7558,7 @@
           <a:bodyPr wrap="square" lIns="25400" tIns="25400" rIns="25400" bIns="25400" rtlCol="0" anchor="ctr"/>
           <a:lstStyle/>
           <a:p>
-            <a:pPr algn="ctr" indent="0" marL="0">
+            <a:pPr marL="0" indent="0" algn="ctr">
               <a:buNone/>
             </a:pPr>
             <a:r>
@@ -8191,7 +7597,7 @@
           <a:bodyPr wrap="square" lIns="0" tIns="0" rIns="0" bIns="0" rtlCol="0" anchor="ctr"/>
           <a:lstStyle/>
           <a:p>
-            <a:pPr indent="0" marL="0">
+            <a:pPr marL="0" indent="0">
               <a:buNone/>
             </a:pPr>
             <a:r>
@@ -8235,6 +7641,13 @@
             <a:prstDash val="solid"/>
           </a:ln>
         </p:spPr>
+        <p:txBody>
+          <a:bodyPr/>
+          <a:lstStyle/>
+          <a:p>
+            <a:endParaRPr lang="en-GB"/>
+          </a:p>
+        </p:txBody>
       </p:sp>
       <p:sp>
         <p:nvSpPr>
@@ -8257,7 +7670,7 @@
           <a:bodyPr wrap="square" lIns="25400" tIns="25400" rIns="25400" bIns="25400" rtlCol="0" anchor="ctr"/>
           <a:lstStyle/>
           <a:p>
-            <a:pPr algn="ctr" indent="0" marL="0">
+            <a:pPr marL="0" indent="0" algn="ctr">
               <a:buNone/>
             </a:pPr>
             <a:r>
@@ -8296,7 +7709,7 @@
           <a:bodyPr wrap="square" lIns="0" tIns="0" rIns="0" bIns="0" rtlCol="0" anchor="ctr"/>
           <a:lstStyle/>
           <a:p>
-            <a:pPr indent="0" marL="0">
+            <a:pPr marL="0" indent="0">
               <a:buNone/>
             </a:pPr>
             <a:r>
@@ -8330,6 +7743,7 @@
         <a:solidFill>
           <a:srgbClr val="FFFFFF"/>
         </a:solidFill>
+        <a:effectLst/>
       </p:bgPr>
     </p:bg>
     <p:spTree>
@@ -8367,7 +7781,7 @@
           <a:bodyPr wrap="square" lIns="0" tIns="0" rIns="0" bIns="0" rtlCol="0" anchor="ctr"/>
           <a:lstStyle/>
           <a:p>
-            <a:pPr indent="0" marL="0">
+            <a:pPr marL="0" indent="0">
               <a:buNone/>
             </a:pPr>
             <a:r>
@@ -8406,7 +7820,7 @@
           <a:bodyPr wrap="square" lIns="0" tIns="0" rIns="0" bIns="0" rtlCol="0" anchor="ctr"/>
           <a:lstStyle/>
           <a:p>
-            <a:pPr indent="0" marL="0">
+            <a:pPr marL="0" indent="0">
               <a:buNone/>
             </a:pPr>
             <a:r>
@@ -8445,7 +7859,7 @@
           <a:bodyPr wrap="square" lIns="0" tIns="0" rIns="0" bIns="0" rtlCol="0" anchor="ctr"/>
           <a:lstStyle/>
           <a:p>
-            <a:pPr algn="r" indent="0" marL="0">
+            <a:pPr marL="0" indent="0" algn="r">
               <a:buNone/>
             </a:pPr>
             <a:r>
@@ -8489,6 +7903,13 @@
             <a:prstDash val="solid"/>
           </a:ln>
         </p:spPr>
+        <p:txBody>
+          <a:bodyPr/>
+          <a:lstStyle/>
+          <a:p>
+            <a:endParaRPr lang="en-GB"/>
+          </a:p>
+        </p:txBody>
       </p:sp>
       <p:sp>
         <p:nvSpPr>
@@ -8511,7 +7932,7 @@
           <a:bodyPr wrap="square" lIns="0" tIns="0" rIns="0" bIns="0" rtlCol="0" anchor="ctr"/>
           <a:lstStyle/>
           <a:p>
-            <a:pPr indent="0" marL="0">
+            <a:pPr marL="0" indent="0">
               <a:buNone/>
             </a:pPr>
             <a:r>
@@ -8525,9 +7946,6 @@
               </a:rPr>
               <a:t>“Any morphological, physiological or phenological feature </a:t>
             </a:r>
-            <a:pPr indent="0" marL="0">
-              <a:buNone/>
-            </a:pPr>
             <a:r>
               <a:rPr lang="en-US" sz="2000" b="1" i="1" dirty="0">
                 <a:solidFill>
@@ -8539,9 +7957,6 @@
               </a:rPr>
               <a:t>measurable at the individual level</a:t>
             </a:r>
-            <a:pPr indent="0" marL="0">
-              <a:buNone/>
-            </a:pPr>
             <a:r>
               <a:rPr lang="en-US" sz="2000" i="1" dirty="0">
                 <a:solidFill>
@@ -8559,7 +7974,7 @@
       </p:sp>
       <p:graphicFrame>
         <p:nvGraphicFramePr>
-          <p:cNvPr id="7" name="Chart 0" descr=""/>
+          <p:cNvPr id="7" name="Chart 0"/>
           <p:cNvGraphicFramePr/>
           <p:nvPr/>
         </p:nvGraphicFramePr>
@@ -8567,9 +7982,9 @@
           <a:off x="548640" y="2560320"/>
           <a:ext cx="5669280" cy="3017520"/>
         </p:xfrm>
-        <a:graphic xmlns:a="http://schemas.openxmlformats.org/drawingml/2006/main">
+        <a:graphic>
           <a:graphicData uri="http://schemas.openxmlformats.org/drawingml/2006/chart">
-            <c:chart xmlns:c="http://schemas.openxmlformats.org/drawingml/2006/chart" r:id="rId1"/>
+            <c:chart xmlns:c="http://schemas.openxmlformats.org/drawingml/2006/chart" xmlns:r="http://schemas.openxmlformats.org/officeDocument/2006/relationships" r:id="rId3"/>
           </a:graphicData>
         </a:graphic>
       </p:graphicFrame>
@@ -8597,6 +8012,13 @@
             <a:prstDash val="solid"/>
           </a:ln>
         </p:spPr>
+        <p:txBody>
+          <a:bodyPr/>
+          <a:lstStyle/>
+          <a:p>
+            <a:endParaRPr lang="en-GB"/>
+          </a:p>
+        </p:txBody>
       </p:sp>
       <p:sp>
         <p:nvSpPr>
@@ -8619,7 +8041,7 @@
           <a:bodyPr wrap="square" lIns="0" tIns="0" rIns="0" bIns="0" rtlCol="0" anchor="ctr"/>
           <a:lstStyle/>
           <a:p>
-            <a:pPr indent="0" marL="0">
+            <a:pPr marL="0" indent="0">
               <a:buNone/>
             </a:pPr>
             <a:r>
@@ -8759,6 +8181,7 @@
         <a:solidFill>
           <a:srgbClr val="FFFFFF"/>
         </a:solidFill>
+        <a:effectLst/>
       </p:bgPr>
     </p:bg>
     <p:spTree>
@@ -8796,7 +8219,7 @@
           <a:bodyPr wrap="square" lIns="0" tIns="0" rIns="0" bIns="0" rtlCol="0" anchor="ctr"/>
           <a:lstStyle/>
           <a:p>
-            <a:pPr indent="0" marL="0">
+            <a:pPr marL="0" indent="0">
               <a:buNone/>
             </a:pPr>
             <a:r>
@@ -8835,7 +8258,7 @@
           <a:bodyPr wrap="square" lIns="0" tIns="0" rIns="0" bIns="0" rtlCol="0" anchor="ctr"/>
           <a:lstStyle/>
           <a:p>
-            <a:pPr indent="0" marL="0">
+            <a:pPr marL="0" indent="0">
               <a:buNone/>
             </a:pPr>
             <a:r>
@@ -8874,7 +8297,7 @@
           <a:bodyPr wrap="square" lIns="0" tIns="0" rIns="0" bIns="0" rtlCol="0" anchor="ctr"/>
           <a:lstStyle/>
           <a:p>
-            <a:pPr algn="r" indent="0" marL="0">
+            <a:pPr marL="0" indent="0" algn="r">
               <a:buNone/>
             </a:pPr>
             <a:r>
@@ -8894,7 +8317,7 @@
       </p:sp>
       <p:graphicFrame>
         <p:nvGraphicFramePr>
-          <p:cNvPr id="5" name="Chart 0" descr=""/>
+          <p:cNvPr id="5" name="Chart 0"/>
           <p:cNvGraphicFramePr/>
           <p:nvPr/>
         </p:nvGraphicFramePr>
@@ -8902,9 +8325,9 @@
           <a:off x="548640" y="1371600"/>
           <a:ext cx="5120640" cy="3657600"/>
         </p:xfrm>
-        <a:graphic xmlns:a="http://schemas.openxmlformats.org/drawingml/2006/main">
+        <a:graphic>
           <a:graphicData uri="http://schemas.openxmlformats.org/drawingml/2006/chart">
-            <c:chart xmlns:c="http://schemas.openxmlformats.org/drawingml/2006/chart" r:id="rId1"/>
+            <c:chart xmlns:c="http://schemas.openxmlformats.org/drawingml/2006/chart" xmlns:r="http://schemas.openxmlformats.org/officeDocument/2006/relationships" r:id="rId3"/>
           </a:graphicData>
         </a:graphic>
       </p:graphicFrame>
@@ -8929,7 +8352,7 @@
           <a:bodyPr wrap="square" lIns="0" tIns="0" rIns="0" bIns="0" rtlCol="0" anchor="ctr"/>
           <a:lstStyle/>
           <a:p>
-            <a:pPr indent="0" marL="0">
+            <a:pPr marL="0" indent="0">
               <a:buNone/>
             </a:pPr>
             <a:r>
@@ -8968,7 +8391,7 @@
           <a:bodyPr wrap="square" lIns="0" tIns="0" rIns="0" bIns="0" rtlCol="0" anchor="ctr"/>
           <a:lstStyle/>
           <a:p>
-            <a:pPr indent="0" marL="0">
+            <a:pPr marL="0" indent="0">
               <a:buNone/>
             </a:pPr>
             <a:r>
@@ -9108,6 +8531,7 @@
         <a:solidFill>
           <a:srgbClr val="FFFFFF"/>
         </a:solidFill>
+        <a:effectLst/>
       </p:bgPr>
     </p:bg>
     <p:spTree>
@@ -9145,7 +8569,7 @@
           <a:bodyPr wrap="square" lIns="0" tIns="0" rIns="0" bIns="0" rtlCol="0" anchor="ctr"/>
           <a:lstStyle/>
           <a:p>
-            <a:pPr indent="0" marL="0">
+            <a:pPr marL="0" indent="0">
               <a:buNone/>
             </a:pPr>
             <a:r>
@@ -9184,7 +8608,7 @@
           <a:bodyPr wrap="square" lIns="0" tIns="0" rIns="0" bIns="0" rtlCol="0" anchor="ctr"/>
           <a:lstStyle/>
           <a:p>
-            <a:pPr indent="0" marL="0">
+            <a:pPr marL="0" indent="0">
               <a:buNone/>
             </a:pPr>
             <a:r>
@@ -9223,7 +8647,7 @@
           <a:bodyPr wrap="square" lIns="0" tIns="0" rIns="0" bIns="0" rtlCol="0" anchor="ctr"/>
           <a:lstStyle/>
           <a:p>
-            <a:pPr algn="r" indent="0" marL="0">
+            <a:pPr marL="0" indent="0" algn="r">
               <a:buNone/>
             </a:pPr>
             <a:r>
@@ -9267,6 +8691,13 @@
             <a:prstDash val="solid"/>
           </a:ln>
         </p:spPr>
+        <p:txBody>
+          <a:bodyPr/>
+          <a:lstStyle/>
+          <a:p>
+            <a:endParaRPr lang="en-GB"/>
+          </a:p>
+        </p:txBody>
       </p:sp>
       <p:sp>
         <p:nvSpPr>
@@ -9289,7 +8720,7 @@
           <a:bodyPr wrap="square" lIns="25400" tIns="25400" rIns="25400" bIns="25400" rtlCol="0" anchor="ctr"/>
           <a:lstStyle/>
           <a:p>
-            <a:pPr algn="ctr" indent="0" marL="0">
+            <a:pPr marL="0" indent="0" algn="ctr">
               <a:buNone/>
             </a:pPr>
             <a:r>
@@ -9333,6 +8764,13 @@
             <a:prstDash val="solid"/>
           </a:ln>
         </p:spPr>
+        <p:txBody>
+          <a:bodyPr/>
+          <a:lstStyle/>
+          <a:p>
+            <a:endParaRPr lang="en-GB"/>
+          </a:p>
+        </p:txBody>
       </p:sp>
       <p:sp>
         <p:nvSpPr>
@@ -9355,7 +8793,7 @@
           <a:bodyPr wrap="square" lIns="25400" tIns="25400" rIns="25400" bIns="25400" rtlCol="0" anchor="ctr"/>
           <a:lstStyle/>
           <a:p>
-            <a:pPr algn="ctr" indent="0" marL="0">
+            <a:pPr marL="0" indent="0" algn="ctr">
               <a:buNone/>
             </a:pPr>
             <a:r>
@@ -9399,6 +8837,13 @@
             <a:prstDash val="solid"/>
           </a:ln>
         </p:spPr>
+        <p:txBody>
+          <a:bodyPr/>
+          <a:lstStyle/>
+          <a:p>
+            <a:endParaRPr lang="en-GB"/>
+          </a:p>
+        </p:txBody>
       </p:sp>
       <p:sp>
         <p:nvSpPr>
@@ -9421,7 +8866,7 @@
           <a:bodyPr wrap="square" lIns="25400" tIns="25400" rIns="25400" bIns="25400" rtlCol="0" anchor="ctr"/>
           <a:lstStyle/>
           <a:p>
-            <a:pPr algn="ctr" indent="0" marL="0">
+            <a:pPr marL="0" indent="0" algn="ctr">
               <a:buNone/>
             </a:pPr>
             <a:r>
@@ -9465,6 +8910,13 @@
             <a:prstDash val="solid"/>
           </a:ln>
         </p:spPr>
+        <p:txBody>
+          <a:bodyPr/>
+          <a:lstStyle/>
+          <a:p>
+            <a:endParaRPr lang="en-GB"/>
+          </a:p>
+        </p:txBody>
       </p:sp>
       <p:sp>
         <p:nvSpPr>
@@ -9487,7 +8939,7 @@
           <a:bodyPr wrap="square" lIns="25400" tIns="25400" rIns="25400" bIns="25400" rtlCol="0" anchor="ctr"/>
           <a:lstStyle/>
           <a:p>
-            <a:pPr algn="ctr" indent="0" marL="0">
+            <a:pPr marL="0" indent="0" algn="ctr">
               <a:buNone/>
             </a:pPr>
             <a:r>
@@ -9526,7 +8978,7 @@
           <a:bodyPr wrap="square" lIns="0" tIns="0" rIns="0" bIns="0" rtlCol="0" anchor="ctr"/>
           <a:lstStyle/>
           <a:p>
-            <a:pPr indent="0" marL="0">
+            <a:pPr marL="0" indent="0">
               <a:buNone/>
             </a:pPr>
             <a:r>
@@ -9570,6 +9022,13 @@
             <a:prstDash val="solid"/>
           </a:ln>
         </p:spPr>
+        <p:txBody>
+          <a:bodyPr/>
+          <a:lstStyle/>
+          <a:p>
+            <a:endParaRPr lang="en-GB"/>
+          </a:p>
+        </p:txBody>
       </p:sp>
       <p:sp>
         <p:nvSpPr>
@@ -9592,7 +9051,7 @@
           <a:bodyPr wrap="square" lIns="0" tIns="0" rIns="0" bIns="0" rtlCol="0" anchor="ctr"/>
           <a:lstStyle/>
           <a:p>
-            <a:pPr indent="0" marL="0">
+            <a:pPr marL="0" indent="0">
               <a:buNone/>
             </a:pPr>
             <a:r>
@@ -9631,7 +9090,7 @@
           <a:bodyPr wrap="square" lIns="0" tIns="0" rIns="0" bIns="0" rtlCol="0" anchor="t"/>
           <a:lstStyle/>
           <a:p>
-            <a:pPr indent="0" marL="0">
+            <a:pPr marL="0" indent="0">
               <a:buNone/>
             </a:pPr>
             <a:r>
@@ -9675,6 +9134,13 @@
             <a:prstDash val="solid"/>
           </a:ln>
         </p:spPr>
+        <p:txBody>
+          <a:bodyPr/>
+          <a:lstStyle/>
+          <a:p>
+            <a:endParaRPr lang="en-GB"/>
+          </a:p>
+        </p:txBody>
       </p:sp>
       <p:sp>
         <p:nvSpPr>
@@ -9697,7 +9163,7 @@
           <a:bodyPr wrap="square" lIns="0" tIns="0" rIns="0" bIns="0" rtlCol="0" anchor="ctr"/>
           <a:lstStyle/>
           <a:p>
-            <a:pPr indent="0" marL="0">
+            <a:pPr marL="0" indent="0">
               <a:buNone/>
             </a:pPr>
             <a:r>
@@ -9736,7 +9202,7 @@
           <a:bodyPr wrap="square" lIns="0" tIns="0" rIns="0" bIns="0" rtlCol="0" anchor="t"/>
           <a:lstStyle/>
           <a:p>
-            <a:pPr indent="0" marL="0">
+            <a:pPr marL="0" indent="0">
               <a:buNone/>
             </a:pPr>
             <a:r>
@@ -9780,6 +9246,13 @@
             <a:prstDash val="solid"/>
           </a:ln>
         </p:spPr>
+        <p:txBody>
+          <a:bodyPr/>
+          <a:lstStyle/>
+          <a:p>
+            <a:endParaRPr lang="en-GB"/>
+          </a:p>
+        </p:txBody>
       </p:sp>
       <p:sp>
         <p:nvSpPr>
@@ -9802,7 +9275,7 @@
           <a:bodyPr wrap="square" lIns="0" tIns="0" rIns="0" bIns="0" rtlCol="0" anchor="ctr"/>
           <a:lstStyle/>
           <a:p>
-            <a:pPr indent="0" marL="0">
+            <a:pPr marL="0" indent="0">
               <a:buNone/>
             </a:pPr>
             <a:r>
@@ -9841,7 +9314,7 @@
           <a:bodyPr wrap="square" lIns="0" tIns="0" rIns="0" bIns="0" rtlCol="0" anchor="t"/>
           <a:lstStyle/>
           <a:p>
-            <a:pPr indent="0" marL="0">
+            <a:pPr marL="0" indent="0">
               <a:buNone/>
             </a:pPr>
             <a:r>
@@ -9885,6 +9358,13 @@
             <a:prstDash val="solid"/>
           </a:ln>
         </p:spPr>
+        <p:txBody>
+          <a:bodyPr/>
+          <a:lstStyle/>
+          <a:p>
+            <a:endParaRPr lang="en-GB"/>
+          </a:p>
+        </p:txBody>
       </p:sp>
       <p:sp>
         <p:nvSpPr>
@@ -9907,7 +9387,7 @@
           <a:bodyPr wrap="square" lIns="0" tIns="0" rIns="0" bIns="0" rtlCol="0" anchor="ctr"/>
           <a:lstStyle/>
           <a:p>
-            <a:pPr indent="0" marL="0">
+            <a:pPr marL="0" indent="0">
               <a:buNone/>
             </a:pPr>
             <a:r>
@@ -9946,7 +9426,7 @@
           <a:bodyPr wrap="square" lIns="0" tIns="0" rIns="0" bIns="0" rtlCol="0" anchor="t"/>
           <a:lstStyle/>
           <a:p>
-            <a:pPr indent="0" marL="0">
+            <a:pPr marL="0" indent="0">
               <a:buNone/>
             </a:pPr>
             <a:r>
@@ -9990,6 +9470,13 @@
             <a:prstDash val="solid"/>
           </a:ln>
         </p:spPr>
+        <p:txBody>
+          <a:bodyPr/>
+          <a:lstStyle/>
+          <a:p>
+            <a:endParaRPr lang="en-GB"/>
+          </a:p>
+        </p:txBody>
       </p:sp>
       <p:sp>
         <p:nvSpPr>
@@ -10012,7 +9499,7 @@
           <a:bodyPr wrap="square" lIns="50800" tIns="50800" rIns="50800" bIns="50800" rtlCol="0" anchor="ctr"/>
           <a:lstStyle/>
           <a:p>
-            <a:pPr indent="0" marL="0">
+            <a:pPr marL="0" indent="0">
               <a:buNone/>
             </a:pPr>
             <a:r>
@@ -10046,6 +9533,7 @@
         <a:solidFill>
           <a:srgbClr val="FFFFFF"/>
         </a:solidFill>
+        <a:effectLst/>
       </p:bgPr>
     </p:bg>
     <p:spTree>
@@ -10083,7 +9571,7 @@
           <a:bodyPr wrap="square" lIns="0" tIns="0" rIns="0" bIns="0" rtlCol="0" anchor="ctr"/>
           <a:lstStyle/>
           <a:p>
-            <a:pPr indent="0" marL="0">
+            <a:pPr marL="0" indent="0">
               <a:buNone/>
             </a:pPr>
             <a:r>
@@ -10122,7 +9610,7 @@
           <a:bodyPr wrap="square" lIns="0" tIns="0" rIns="0" bIns="0" rtlCol="0" anchor="ctr"/>
           <a:lstStyle/>
           <a:p>
-            <a:pPr indent="0" marL="0">
+            <a:pPr marL="0" indent="0">
               <a:buNone/>
             </a:pPr>
             <a:r>
@@ -10161,7 +9649,7 @@
           <a:bodyPr wrap="square" lIns="0" tIns="0" rIns="0" bIns="0" rtlCol="0" anchor="ctr"/>
           <a:lstStyle/>
           <a:p>
-            <a:pPr algn="r" indent="0" marL="0">
+            <a:pPr marL="0" indent="0" algn="r">
               <a:buNone/>
             </a:pPr>
             <a:r>
@@ -10181,7 +9669,7 @@
       </p:sp>
       <p:graphicFrame>
         <p:nvGraphicFramePr>
-          <p:cNvPr id="5" name="Chart 0" descr=""/>
+          <p:cNvPr id="5" name="Chart 0"/>
           <p:cNvGraphicFramePr/>
           <p:nvPr/>
         </p:nvGraphicFramePr>
@@ -10189,9 +9677,9 @@
           <a:off x="548640" y="1371600"/>
           <a:ext cx="5669280" cy="4023360"/>
         </p:xfrm>
-        <a:graphic xmlns:a="http://schemas.openxmlformats.org/drawingml/2006/main">
+        <a:graphic>
           <a:graphicData uri="http://schemas.openxmlformats.org/drawingml/2006/chart">
-            <c:chart xmlns:c="http://schemas.openxmlformats.org/drawingml/2006/chart" r:id="rId1"/>
+            <c:chart xmlns:c="http://schemas.openxmlformats.org/drawingml/2006/chart" xmlns:r="http://schemas.openxmlformats.org/officeDocument/2006/relationships" r:id="rId3"/>
           </a:graphicData>
         </a:graphic>
       </p:graphicFrame>
@@ -10219,6 +9707,13 @@
             <a:prstDash val="solid"/>
           </a:ln>
         </p:spPr>
+        <p:txBody>
+          <a:bodyPr/>
+          <a:lstStyle/>
+          <a:p>
+            <a:endParaRPr lang="en-GB"/>
+          </a:p>
+        </p:txBody>
       </p:sp>
       <p:sp>
         <p:nvSpPr>
@@ -10244,6 +9739,13 @@
             <a:prstDash val="solid"/>
           </a:ln>
         </p:spPr>
+        <p:txBody>
+          <a:bodyPr/>
+          <a:lstStyle/>
+          <a:p>
+            <a:endParaRPr lang="en-GB"/>
+          </a:p>
+        </p:txBody>
       </p:sp>
       <p:sp>
         <p:nvSpPr>
@@ -10372,7 +9874,7 @@
           <a:bodyPr wrap="square" lIns="0" tIns="0" rIns="0" bIns="0" rtlCol="0" anchor="ctr"/>
           <a:lstStyle/>
           <a:p>
-            <a:pPr indent="0" marL="0">
+            <a:pPr marL="0" indent="0">
               <a:buNone/>
             </a:pPr>
             <a:r>
@@ -10406,6 +9908,7 @@
         <a:solidFill>
           <a:srgbClr val="FFFFFF"/>
         </a:solidFill>
+        <a:effectLst/>
       </p:bgPr>
     </p:bg>
     <p:spTree>
@@ -10443,7 +9946,7 @@
           <a:bodyPr wrap="square" lIns="0" tIns="0" rIns="0" bIns="0" rtlCol="0" anchor="ctr"/>
           <a:lstStyle/>
           <a:p>
-            <a:pPr indent="0" marL="0">
+            <a:pPr marL="0" indent="0">
               <a:buNone/>
             </a:pPr>
             <a:r>
@@ -10482,7 +9985,7 @@
           <a:bodyPr wrap="square" lIns="0" tIns="0" rIns="0" bIns="0" rtlCol="0" anchor="ctr"/>
           <a:lstStyle/>
           <a:p>
-            <a:pPr indent="0" marL="0">
+            <a:pPr marL="0" indent="0">
               <a:buNone/>
             </a:pPr>
             <a:r>
@@ -10521,7 +10024,7 @@
           <a:bodyPr wrap="square" lIns="0" tIns="0" rIns="0" bIns="0" rtlCol="0" anchor="ctr"/>
           <a:lstStyle/>
           <a:p>
-            <a:pPr algn="r" indent="0" marL="0">
+            <a:pPr marL="0" indent="0" algn="r">
               <a:buNone/>
             </a:pPr>
             <a:r>
@@ -10536,87 +10039,6 @@
               <a:t>38</a:t>
             </a:r>
             <a:endParaRPr lang="en-US" sz="1000" dirty="0"/>
-          </a:p>
-        </p:txBody>
-      </p:sp>
-      <p:sp>
-        <p:nvSpPr>
-          <p:cNvPr id="5" name="Shape 3"/>
-          <p:cNvSpPr/>
-          <p:nvPr/>
-        </p:nvSpPr>
-        <p:spPr>
-          <a:xfrm>
-            <a:off x="548640" y="1371600"/>
-            <a:ext cx="5669280" cy="4023360"/>
-          </a:xfrm>
-          <a:prstGeom prst="rect">
-            <a:avLst/>
-          </a:prstGeom>
-          <a:solidFill>
-            <a:srgbClr val="F3F4F6"/>
-          </a:solidFill>
-          <a:ln w="12700">
-            <a:solidFill>
-              <a:srgbClr val="BBBBBB"/>
-            </a:solidFill>
-            <a:prstDash val="dash"/>
-          </a:ln>
-        </p:spPr>
-      </p:sp>
-      <p:sp>
-        <p:nvSpPr>
-          <p:cNvPr id="6" name="Text 4"/>
-          <p:cNvSpPr txBox="1"/>
-          <p:nvPr/>
-        </p:nvSpPr>
-        <p:spPr>
-          <a:xfrm>
-            <a:off x="731520" y="1371600"/>
-            <a:ext cx="5303520" cy="4023360"/>
-          </a:xfrm>
-          <a:prstGeom prst="rect">
-            <a:avLst/>
-          </a:prstGeom>
-          <a:noFill/>
-          <a:ln/>
-        </p:spPr>
-        <p:txBody>
-          <a:bodyPr wrap="square" rtlCol="0" anchor="ctr"/>
-          <a:lstStyle/>
-          <a:p>
-            <a:pPr algn="ctr" indent="0" marL="0">
-              <a:buNone/>
-            </a:pPr>
-            <a:r>
-              <a:rPr lang="en-US" sz="1200" i="1" dirty="0">
-                <a:solidFill>
-                  <a:srgbClr val="6B6B6B"/>
-                </a:solidFill>
-                <a:latin typeface="Calibri" pitchFamily="34" charset="0"/>
-                <a:ea typeface="Calibri" pitchFamily="34" charset="-122"/>
-                <a:cs typeface="Calibri" pitchFamily="34" charset="-120"/>
-              </a:rPr>
-              <a:t>[Figure to insert]</a:t>
-            </a:r>
-            <a:endParaRPr lang="en-US" sz="1200" dirty="0"/>
-          </a:p>
-          <a:p>
-            <a:pPr algn="ctr" indent="0" marL="0">
-              <a:buNone/>
-            </a:pPr>
-            <a:r>
-              <a:rPr lang="en-US" sz="1200" i="1" dirty="0">
-                <a:solidFill>
-                  <a:srgbClr val="6B6B6B"/>
-                </a:solidFill>
-                <a:latin typeface="Calibri" pitchFamily="34" charset="0"/>
-                <a:ea typeface="Calibri" pitchFamily="34" charset="-122"/>
-                <a:cs typeface="Calibri" pitchFamily="34" charset="-120"/>
-              </a:rPr>
-              <a:t>Des Roches et al. (2018) Nat. Ecol. Evol. — effect sizes of intraspecific variation vs species replacement on community and ecosystem responses</a:t>
-            </a:r>
-            <a:endParaRPr lang="en-US" sz="1200" dirty="0"/>
           </a:p>
         </p:txBody>
       </p:sp>
@@ -10646,6 +10068,13 @@
             <a:prstDash val="solid"/>
           </a:ln>
         </p:spPr>
+        <p:txBody>
+          <a:bodyPr/>
+          <a:lstStyle/>
+          <a:p>
+            <a:endParaRPr lang="en-GB"/>
+          </a:p>
+        </p:txBody>
       </p:sp>
       <p:sp>
         <p:nvSpPr>
@@ -10668,7 +10097,7 @@
           <a:bodyPr wrap="square" lIns="0" tIns="0" rIns="0" bIns="0" rtlCol="0" anchor="ctr"/>
           <a:lstStyle/>
           <a:p>
-            <a:pPr indent="0" marL="0">
+            <a:pPr marL="0" indent="0">
               <a:buNone/>
             </a:pPr>
             <a:r>
@@ -10707,7 +10136,7 @@
           <a:bodyPr wrap="square" lIns="0" tIns="0" rIns="0" bIns="0" rtlCol="0" anchor="t"/>
           <a:lstStyle/>
           <a:p>
-            <a:pPr indent="0" marL="0">
+            <a:pPr marL="0" indent="0">
               <a:buNone/>
             </a:pPr>
             <a:r>
@@ -10751,6 +10180,13 @@
             <a:prstDash val="solid"/>
           </a:ln>
         </p:spPr>
+        <p:txBody>
+          <a:bodyPr/>
+          <a:lstStyle/>
+          <a:p>
+            <a:endParaRPr lang="en-GB"/>
+          </a:p>
+        </p:txBody>
       </p:sp>
       <p:sp>
         <p:nvSpPr>
@@ -10773,7 +10209,7 @@
           <a:bodyPr wrap="square" lIns="0" tIns="0" rIns="0" bIns="0" rtlCol="0" anchor="ctr"/>
           <a:lstStyle/>
           <a:p>
-            <a:pPr indent="0" marL="0">
+            <a:pPr marL="0" indent="0">
               <a:buNone/>
             </a:pPr>
             <a:r>
@@ -10812,7 +10248,7 @@
           <a:bodyPr wrap="square" lIns="0" tIns="0" rIns="0" bIns="0" rtlCol="0" anchor="t"/>
           <a:lstStyle/>
           <a:p>
-            <a:pPr indent="0" marL="0">
+            <a:pPr marL="0" indent="0">
               <a:buNone/>
             </a:pPr>
             <a:r>
@@ -10856,6 +10292,13 @@
             <a:prstDash val="solid"/>
           </a:ln>
         </p:spPr>
+        <p:txBody>
+          <a:bodyPr/>
+          <a:lstStyle/>
+          <a:p>
+            <a:endParaRPr lang="en-GB"/>
+          </a:p>
+        </p:txBody>
       </p:sp>
       <p:sp>
         <p:nvSpPr>
@@ -10878,7 +10321,7 @@
           <a:bodyPr wrap="square" lIns="50800" tIns="50800" rIns="50800" bIns="50800" rtlCol="0" anchor="ctr"/>
           <a:lstStyle/>
           <a:p>
-            <a:pPr indent="0" marL="0">
+            <a:pPr marL="0" indent="0">
               <a:buNone/>
             </a:pPr>
             <a:r>
@@ -10896,6 +10339,36 @@
           </a:p>
         </p:txBody>
       </p:sp>
+      <p:pic>
+        <p:nvPicPr>
+          <p:cNvPr id="15" name="Image 14">
+            <a:extLst>
+              <a:ext uri="{FF2B5EF4-FFF2-40B4-BE49-F238E27FC236}">
+                <a16:creationId xmlns:a16="http://schemas.microsoft.com/office/drawing/2014/main" id="{3118387B-E057-575B-3967-45FCDCEC166F}"/>
+              </a:ext>
+            </a:extLst>
+          </p:cNvPr>
+          <p:cNvPicPr>
+            <a:picLocks noChangeAspect="1"/>
+          </p:cNvPicPr>
+          <p:nvPr/>
+        </p:nvPicPr>
+        <p:blipFill>
+          <a:blip r:embed="rId3"/>
+          <a:stretch>
+            <a:fillRect/>
+          </a:stretch>
+        </p:blipFill>
+        <p:spPr>
+          <a:xfrm>
+            <a:off x="1014213" y="1331166"/>
+            <a:ext cx="4170736" cy="4063794"/>
+          </a:xfrm>
+          <a:prstGeom prst="rect">
+            <a:avLst/>
+          </a:prstGeom>
+        </p:spPr>
+      </p:pic>
     </p:spTree>
   </p:cSld>
   <p:clrMapOvr>
@@ -10912,6 +10385,7 @@
         <a:solidFill>
           <a:srgbClr val="FFFFFF"/>
         </a:solidFill>
+        <a:effectLst/>
       </p:bgPr>
     </p:bg>
     <p:spTree>
@@ -10949,7 +10423,7 @@
           <a:bodyPr wrap="square" lIns="0" tIns="0" rIns="0" bIns="0" rtlCol="0" anchor="ctr"/>
           <a:lstStyle/>
           <a:p>
-            <a:pPr indent="0" marL="0">
+            <a:pPr marL="0" indent="0">
               <a:buNone/>
             </a:pPr>
             <a:r>
@@ -10988,7 +10462,7 @@
           <a:bodyPr wrap="square" lIns="0" tIns="0" rIns="0" bIns="0" rtlCol="0" anchor="ctr"/>
           <a:lstStyle/>
           <a:p>
-            <a:pPr indent="0" marL="0">
+            <a:pPr marL="0" indent="0">
               <a:buNone/>
             </a:pPr>
             <a:r>
@@ -11027,7 +10501,7 @@
           <a:bodyPr wrap="square" lIns="0" tIns="0" rIns="0" bIns="0" rtlCol="0" anchor="ctr"/>
           <a:lstStyle/>
           <a:p>
-            <a:pPr algn="r" indent="0" marL="0">
+            <a:pPr marL="0" indent="0" algn="r">
               <a:buNone/>
             </a:pPr>
             <a:r>
@@ -11047,7 +10521,7 @@
       </p:sp>
       <p:graphicFrame>
         <p:nvGraphicFramePr>
-          <p:cNvPr id="5" name="Chart 0" descr=""/>
+          <p:cNvPr id="5" name="Chart 0"/>
           <p:cNvGraphicFramePr/>
           <p:nvPr/>
         </p:nvGraphicFramePr>
@@ -11055,9 +10529,9 @@
           <a:off x="548640" y="1371600"/>
           <a:ext cx="5852160" cy="4206240"/>
         </p:xfrm>
-        <a:graphic xmlns:a="http://schemas.openxmlformats.org/drawingml/2006/main">
+        <a:graphic>
           <a:graphicData uri="http://schemas.openxmlformats.org/drawingml/2006/chart">
-            <c:chart xmlns:c="http://schemas.openxmlformats.org/drawingml/2006/chart" r:id="rId1"/>
+            <c:chart xmlns:c="http://schemas.openxmlformats.org/drawingml/2006/chart" xmlns:r="http://schemas.openxmlformats.org/officeDocument/2006/relationships" r:id="rId3"/>
           </a:graphicData>
         </a:graphic>
       </p:graphicFrame>
@@ -11183,6 +10657,7 @@
         <a:solidFill>
           <a:srgbClr val="FFFFFF"/>
         </a:solidFill>
+        <a:effectLst/>
       </p:bgPr>
     </p:bg>
     <p:spTree>
@@ -11220,7 +10695,7 @@
           <a:bodyPr wrap="square" lIns="0" tIns="0" rIns="0" bIns="0" rtlCol="0" anchor="ctr"/>
           <a:lstStyle/>
           <a:p>
-            <a:pPr indent="0" marL="0">
+            <a:pPr marL="0" indent="0">
               <a:buNone/>
             </a:pPr>
             <a:r>
@@ -11259,7 +10734,7 @@
           <a:bodyPr wrap="square" lIns="0" tIns="0" rIns="0" bIns="0" rtlCol="0" anchor="ctr"/>
           <a:lstStyle/>
           <a:p>
-            <a:pPr indent="0" marL="0">
+            <a:pPr marL="0" indent="0">
               <a:buNone/>
             </a:pPr>
             <a:r>
@@ -11298,7 +10773,7 @@
           <a:bodyPr wrap="square" lIns="0" tIns="0" rIns="0" bIns="0" rtlCol="0" anchor="ctr"/>
           <a:lstStyle/>
           <a:p>
-            <a:pPr algn="r" indent="0" marL="0">
+            <a:pPr marL="0" indent="0" algn="r">
               <a:buNone/>
             </a:pPr>
             <a:r>
@@ -11318,7 +10793,7 @@
       </p:sp>
       <p:graphicFrame>
         <p:nvGraphicFramePr>
-          <p:cNvPr id="5" name="Chart 0" descr=""/>
+          <p:cNvPr id="5" name="Chart 0"/>
           <p:cNvGraphicFramePr/>
           <p:nvPr/>
         </p:nvGraphicFramePr>
@@ -11326,9 +10801,9 @@
           <a:off x="548640" y="1371600"/>
           <a:ext cx="5852160" cy="4206240"/>
         </p:xfrm>
-        <a:graphic xmlns:a="http://schemas.openxmlformats.org/drawingml/2006/main">
+        <a:graphic>
           <a:graphicData uri="http://schemas.openxmlformats.org/drawingml/2006/chart">
-            <c:chart xmlns:c="http://schemas.openxmlformats.org/drawingml/2006/chart" r:id="rId1"/>
+            <c:chart xmlns:c="http://schemas.openxmlformats.org/drawingml/2006/chart" xmlns:r="http://schemas.openxmlformats.org/officeDocument/2006/relationships" r:id="rId3"/>
           </a:graphicData>
         </a:graphic>
       </p:graphicFrame>
@@ -11353,7 +10828,7 @@
           <a:bodyPr wrap="square" lIns="0" tIns="0" rIns="0" bIns="0" rtlCol="0" anchor="ctr"/>
           <a:lstStyle/>
           <a:p>
-            <a:pPr indent="0" marL="0">
+            <a:pPr marL="0" indent="0">
               <a:buNone/>
             </a:pPr>
             <a:r>
@@ -11392,7 +10867,7 @@
           <a:bodyPr wrap="square" lIns="0" tIns="0" rIns="0" bIns="0" rtlCol="0" anchor="t"/>
           <a:lstStyle/>
           <a:p>
-            <a:pPr indent="0" marL="0">
+            <a:pPr marL="0" indent="0">
               <a:buNone/>
             </a:pPr>
             <a:r>
@@ -11431,7 +10906,7 @@
           <a:bodyPr wrap="square" lIns="0" tIns="0" rIns="0" bIns="0" rtlCol="0" anchor="ctr"/>
           <a:lstStyle/>
           <a:p>
-            <a:pPr indent="0" marL="0">
+            <a:pPr marL="0" indent="0">
               <a:buNone/>
             </a:pPr>
             <a:r>
@@ -11475,6 +10950,13 @@
             <a:prstDash val="solid"/>
           </a:ln>
         </p:spPr>
+        <p:txBody>
+          <a:bodyPr/>
+          <a:lstStyle/>
+          <a:p>
+            <a:endParaRPr lang="en-GB"/>
+          </a:p>
+        </p:txBody>
       </p:sp>
       <p:sp>
         <p:nvSpPr>
@@ -11497,7 +10979,7 @@
           <a:bodyPr wrap="square" lIns="0" tIns="0" rIns="0" bIns="0" rtlCol="0" anchor="ctr"/>
           <a:lstStyle/>
           <a:p>
-            <a:pPr indent="0" marL="0">
+            <a:pPr marL="0" indent="0">
               <a:buNone/>
             </a:pPr>
             <a:r>
@@ -11536,7 +11018,7 @@
           <a:bodyPr wrap="square" lIns="0" tIns="0" rIns="0" bIns="0" rtlCol="0" anchor="t"/>
           <a:lstStyle/>
           <a:p>
-            <a:pPr indent="0" marL="0">
+            <a:pPr marL="0" indent="0">
               <a:buNone/>
             </a:pPr>
             <a:r>
@@ -11570,6 +11052,7 @@
         <a:solidFill>
           <a:srgbClr val="FFFFFF"/>
         </a:solidFill>
+        <a:effectLst/>
       </p:bgPr>
     </p:bg>
     <p:spTree>
@@ -11607,7 +11090,7 @@
           <a:bodyPr wrap="square" lIns="0" tIns="0" rIns="0" bIns="0" rtlCol="0" anchor="ctr"/>
           <a:lstStyle/>
           <a:p>
-            <a:pPr indent="0" marL="0">
+            <a:pPr marL="0" indent="0">
               <a:buNone/>
             </a:pPr>
             <a:r>
@@ -11646,7 +11129,7 @@
           <a:bodyPr wrap="square" lIns="0" tIns="0" rIns="0" bIns="0" rtlCol="0" anchor="ctr"/>
           <a:lstStyle/>
           <a:p>
-            <a:pPr indent="0" marL="0">
+            <a:pPr marL="0" indent="0">
               <a:buNone/>
             </a:pPr>
             <a:r>
@@ -11685,7 +11168,7 @@
           <a:bodyPr wrap="square" lIns="0" tIns="0" rIns="0" bIns="0" rtlCol="0" anchor="ctr"/>
           <a:lstStyle/>
           <a:p>
-            <a:pPr algn="r" indent="0" marL="0">
+            <a:pPr marL="0" indent="0" algn="r">
               <a:buNone/>
             </a:pPr>
             <a:r>
@@ -11700,87 +11183,6 @@
               <a:t>41</a:t>
             </a:r>
             <a:endParaRPr lang="en-US" sz="1000" dirty="0"/>
-          </a:p>
-        </p:txBody>
-      </p:sp>
-      <p:sp>
-        <p:nvSpPr>
-          <p:cNvPr id="5" name="Shape 3"/>
-          <p:cNvSpPr/>
-          <p:nvPr/>
-        </p:nvSpPr>
-        <p:spPr>
-          <a:xfrm>
-            <a:off x="548640" y="1371600"/>
-            <a:ext cx="6583680" cy="4480560"/>
-          </a:xfrm>
-          <a:prstGeom prst="rect">
-            <a:avLst/>
-          </a:prstGeom>
-          <a:solidFill>
-            <a:srgbClr val="F3F4F6"/>
-          </a:solidFill>
-          <a:ln w="12700">
-            <a:solidFill>
-              <a:srgbClr val="BBBBBB"/>
-            </a:solidFill>
-            <a:prstDash val="dash"/>
-          </a:ln>
-        </p:spPr>
-      </p:sp>
-      <p:sp>
-        <p:nvSpPr>
-          <p:cNvPr id="6" name="Text 4"/>
-          <p:cNvSpPr txBox="1"/>
-          <p:nvPr/>
-        </p:nvSpPr>
-        <p:spPr>
-          <a:xfrm>
-            <a:off x="731520" y="1371600"/>
-            <a:ext cx="6217920" cy="4480560"/>
-          </a:xfrm>
-          <a:prstGeom prst="rect">
-            <a:avLst/>
-          </a:prstGeom>
-          <a:noFill/>
-          <a:ln/>
-        </p:spPr>
-        <p:txBody>
-          <a:bodyPr wrap="square" rtlCol="0" anchor="ctr"/>
-          <a:lstStyle/>
-          <a:p>
-            <a:pPr algn="ctr" indent="0" marL="0">
-              <a:buNone/>
-            </a:pPr>
-            <a:r>
-              <a:rPr lang="en-US" sz="1200" i="1" dirty="0">
-                <a:solidFill>
-                  <a:srgbClr val="6B6B6B"/>
-                </a:solidFill>
-                <a:latin typeface="Calibri" pitchFamily="34" charset="0"/>
-                <a:ea typeface="Calibri" pitchFamily="34" charset="-122"/>
-                <a:cs typeface="Calibri" pitchFamily="34" charset="-120"/>
-              </a:rPr>
-              <a:t>[Figure to insert]</a:t>
-            </a:r>
-            <a:endParaRPr lang="en-US" sz="1200" dirty="0"/>
-          </a:p>
-          <a:p>
-            <a:pPr algn="ctr" indent="0" marL="0">
-              <a:buNone/>
-            </a:pPr>
-            <a:r>
-              <a:rPr lang="en-US" sz="1200" i="1" dirty="0">
-                <a:solidFill>
-                  <a:srgbClr val="6B6B6B"/>
-                </a:solidFill>
-                <a:latin typeface="Calibri" pitchFamily="34" charset="0"/>
-                <a:ea typeface="Calibri" pitchFamily="34" charset="-122"/>
-                <a:cs typeface="Calibri" pitchFamily="34" charset="-120"/>
-              </a:rPr>
-              <a:t>Your figure: individual-level morphospace of several species, individuals coloured by population / habitat (INTRAIT), or mixed-model variance partition; alternative: published lake–stream shape divergence</a:t>
-            </a:r>
-            <a:endParaRPr lang="en-US" sz="1200" dirty="0"/>
           </a:p>
         </p:txBody>
       </p:sp>
@@ -11810,6 +11212,13 @@
             <a:prstDash val="solid"/>
           </a:ln>
         </p:spPr>
+        <p:txBody>
+          <a:bodyPr/>
+          <a:lstStyle/>
+          <a:p>
+            <a:endParaRPr lang="en-GB"/>
+          </a:p>
+        </p:txBody>
       </p:sp>
       <p:sp>
         <p:nvSpPr>
@@ -11832,7 +11241,7 @@
           <a:bodyPr wrap="square" lIns="25400" tIns="25400" rIns="25400" bIns="25400" rtlCol="0" anchor="ctr"/>
           <a:lstStyle/>
           <a:p>
-            <a:pPr algn="ctr" indent="0" marL="0">
+            <a:pPr marL="0" indent="0" algn="ctr">
               <a:buNone/>
             </a:pPr>
             <a:r>
@@ -11871,7 +11280,7 @@
           <a:bodyPr wrap="square" lIns="0" tIns="0" rIns="0" bIns="0" rtlCol="0" anchor="ctr"/>
           <a:lstStyle/>
           <a:p>
-            <a:pPr indent="0" marL="0">
+            <a:pPr marL="0" indent="0">
               <a:buNone/>
             </a:pPr>
             <a:r>
@@ -11910,7 +11319,7 @@
           <a:bodyPr wrap="square" lIns="0" tIns="0" rIns="0" bIns="0" rtlCol="0" anchor="t"/>
           <a:lstStyle/>
           <a:p>
-            <a:pPr indent="0" marL="0">
+            <a:pPr marL="0" indent="0">
               <a:buNone/>
             </a:pPr>
             <a:r>
@@ -11954,6 +11363,13 @@
             <a:prstDash val="solid"/>
           </a:ln>
         </p:spPr>
+        <p:txBody>
+          <a:bodyPr/>
+          <a:lstStyle/>
+          <a:p>
+            <a:endParaRPr lang="en-GB"/>
+          </a:p>
+        </p:txBody>
       </p:sp>
       <p:sp>
         <p:nvSpPr>
@@ -11976,7 +11392,7 @@
           <a:bodyPr wrap="square" lIns="25400" tIns="25400" rIns="25400" bIns="25400" rtlCol="0" anchor="ctr"/>
           <a:lstStyle/>
           <a:p>
-            <a:pPr algn="ctr" indent="0" marL="0">
+            <a:pPr marL="0" indent="0" algn="ctr">
               <a:buNone/>
             </a:pPr>
             <a:r>
@@ -12015,7 +11431,7 @@
           <a:bodyPr wrap="square" lIns="0" tIns="0" rIns="0" bIns="0" rtlCol="0" anchor="ctr"/>
           <a:lstStyle/>
           <a:p>
-            <a:pPr indent="0" marL="0">
+            <a:pPr marL="0" indent="0">
               <a:buNone/>
             </a:pPr>
             <a:r>
@@ -12054,7 +11470,7 @@
           <a:bodyPr wrap="square" lIns="0" tIns="0" rIns="0" bIns="0" rtlCol="0" anchor="t"/>
           <a:lstStyle/>
           <a:p>
-            <a:pPr indent="0" marL="0">
+            <a:pPr marL="0" indent="0">
               <a:buNone/>
             </a:pPr>
             <a:r>
@@ -12098,6 +11514,13 @@
             <a:prstDash val="solid"/>
           </a:ln>
         </p:spPr>
+        <p:txBody>
+          <a:bodyPr/>
+          <a:lstStyle/>
+          <a:p>
+            <a:endParaRPr lang="en-GB"/>
+          </a:p>
+        </p:txBody>
       </p:sp>
       <p:sp>
         <p:nvSpPr>
@@ -12120,7 +11543,7 @@
           <a:bodyPr wrap="square" lIns="25400" tIns="25400" rIns="25400" bIns="25400" rtlCol="0" anchor="ctr"/>
           <a:lstStyle/>
           <a:p>
-            <a:pPr algn="ctr" indent="0" marL="0">
+            <a:pPr marL="0" indent="0" algn="ctr">
               <a:buNone/>
             </a:pPr>
             <a:r>
@@ -12159,7 +11582,7 @@
           <a:bodyPr wrap="square" lIns="0" tIns="0" rIns="0" bIns="0" rtlCol="0" anchor="ctr"/>
           <a:lstStyle/>
           <a:p>
-            <a:pPr indent="0" marL="0">
+            <a:pPr marL="0" indent="0">
               <a:buNone/>
             </a:pPr>
             <a:r>
@@ -12198,7 +11621,7 @@
           <a:bodyPr wrap="square" lIns="0" tIns="0" rIns="0" bIns="0" rtlCol="0" anchor="t"/>
           <a:lstStyle/>
           <a:p>
-            <a:pPr indent="0" marL="0">
+            <a:pPr marL="0" indent="0">
               <a:buNone/>
             </a:pPr>
             <a:r>
@@ -12242,6 +11665,13 @@
             <a:prstDash val="solid"/>
           </a:ln>
         </p:spPr>
+        <p:txBody>
+          <a:bodyPr/>
+          <a:lstStyle/>
+          <a:p>
+            <a:endParaRPr lang="en-GB"/>
+          </a:p>
+        </p:txBody>
       </p:sp>
       <p:sp>
         <p:nvSpPr>
@@ -12264,7 +11694,7 @@
           <a:bodyPr wrap="square" lIns="50800" tIns="50800" rIns="50800" bIns="50800" rtlCol="0" anchor="ctr"/>
           <a:lstStyle/>
           <a:p>
-            <a:pPr indent="0" marL="0">
+            <a:pPr marL="0" indent="0">
               <a:buNone/>
             </a:pPr>
             <a:r>
@@ -12282,6 +11712,49 @@
           </a:p>
         </p:txBody>
       </p:sp>
+      <p:pic>
+        <p:nvPicPr>
+          <p:cNvPr id="21" name="Image 20" descr="Une image contenant texte, diagramme, carte&#10;&#10;Description générée automatiquement">
+            <a:extLst>
+              <a:ext uri="{FF2B5EF4-FFF2-40B4-BE49-F238E27FC236}">
+                <a16:creationId xmlns:a16="http://schemas.microsoft.com/office/drawing/2014/main" id="{A21D7FAC-B748-47EC-3916-D4FD0C7EBEA3}"/>
+              </a:ext>
+            </a:extLst>
+          </p:cNvPr>
+          <p:cNvPicPr>
+            <a:picLocks noChangeAspect="1"/>
+          </p:cNvPicPr>
+          <p:nvPr/>
+        </p:nvPicPr>
+        <p:blipFill rotWithShape="1">
+          <a:blip r:embed="rId3" cstate="print">
+            <a:extLst>
+              <a:ext uri="{28A0092B-C50C-407E-A947-70E740481C1C}">
+                <a14:useLocalDpi xmlns:a14="http://schemas.microsoft.com/office/drawing/2010/main" val="0"/>
+              </a:ext>
+            </a:extLst>
+          </a:blip>
+          <a:srcRect l="1202" r="2168"/>
+          <a:stretch/>
+        </p:blipFill>
+        <p:spPr bwMode="auto">
+          <a:xfrm>
+            <a:off x="548640" y="1383347"/>
+            <a:ext cx="5782310" cy="4091305"/>
+          </a:xfrm>
+          <a:prstGeom prst="rect">
+            <a:avLst/>
+          </a:prstGeom>
+          <a:ln>
+            <a:noFill/>
+          </a:ln>
+          <a:extLst>
+            <a:ext uri="{53640926-AAD7-44D8-BBD7-CCE9431645EC}">
+              <a14:shadowObscured xmlns:a14="http://schemas.microsoft.com/office/drawing/2010/main"/>
+            </a:ext>
+          </a:extLst>
+        </p:spPr>
+      </p:pic>
     </p:spTree>
   </p:cSld>
   <p:clrMapOvr>
@@ -12583,4 +12056,319 @@
     </a:ext>
   </a:extLst>
 </a:theme>
+</file>
+
+<file path=ppt/theme/theme2.xml><?xml version="1.0" encoding="utf-8"?>
+<a:theme xmlns:a="http://schemas.openxmlformats.org/drawingml/2006/main" name="Thème Office">
+  <a:themeElements>
+    <a:clrScheme name="Office">
+      <a:dk1>
+        <a:sysClr val="windowText" lastClr="000000"/>
+      </a:dk1>
+      <a:lt1>
+        <a:sysClr val="window" lastClr="FFFFFF"/>
+      </a:lt1>
+      <a:dk2>
+        <a:srgbClr val="0E2841"/>
+      </a:dk2>
+      <a:lt2>
+        <a:srgbClr val="E8E8E8"/>
+      </a:lt2>
+      <a:accent1>
+        <a:srgbClr val="156082"/>
+      </a:accent1>
+      <a:accent2>
+        <a:srgbClr val="E97132"/>
+      </a:accent2>
+      <a:accent3>
+        <a:srgbClr val="196B24"/>
+      </a:accent3>
+      <a:accent4>
+        <a:srgbClr val="0F9ED5"/>
+      </a:accent4>
+      <a:accent5>
+        <a:srgbClr val="A02B93"/>
+      </a:accent5>
+      <a:accent6>
+        <a:srgbClr val="4EA72E"/>
+      </a:accent6>
+      <a:hlink>
+        <a:srgbClr val="467886"/>
+      </a:hlink>
+      <a:folHlink>
+        <a:srgbClr val="96607D"/>
+      </a:folHlink>
+    </a:clrScheme>
+    <a:fontScheme name="Office">
+      <a:majorFont>
+        <a:latin typeface="Aptos Display" panose="02110004020202020204"/>
+        <a:ea typeface=""/>
+        <a:cs typeface=""/>
+        <a:font script="Jpan" typeface="游ゴシック Light"/>
+        <a:font script="Hang" typeface="맑은 고딕"/>
+        <a:font script="Hans" typeface="等线 Light"/>
+        <a:font script="Hant" typeface="新細明體"/>
+        <a:font script="Arab" typeface="Times New Roman"/>
+        <a:font script="Hebr" typeface="Times New Roman"/>
+        <a:font script="Thai" typeface="Angsana New"/>
+        <a:font script="Ethi" typeface="Nyala"/>
+        <a:font script="Beng" typeface="Vrinda"/>
+        <a:font script="Gujr" typeface="Shruti"/>
+        <a:font script="Khmr" typeface="MoolBoran"/>
+        <a:font script="Knda" typeface="Tunga"/>
+        <a:font script="Guru" typeface="Raavi"/>
+        <a:font script="Cans" typeface="Euphemia"/>
+        <a:font script="Cher" typeface="Plantagenet Cherokee"/>
+        <a:font script="Yiii" typeface="Microsoft Yi Baiti"/>
+        <a:font script="Tibt" typeface="Microsoft Himalaya"/>
+        <a:font script="Thaa" typeface="MV Boli"/>
+        <a:font script="Deva" typeface="Mangal"/>
+        <a:font script="Telu" typeface="Gautami"/>
+        <a:font script="Taml" typeface="Latha"/>
+        <a:font script="Syrc" typeface="Estrangelo Edessa"/>
+        <a:font script="Orya" typeface="Kalinga"/>
+        <a:font script="Mlym" typeface="Kartika"/>
+        <a:font script="Laoo" typeface="DokChampa"/>
+        <a:font script="Sinh" typeface="Iskoola Pota"/>
+        <a:font script="Mong" typeface="Mongolian Baiti"/>
+        <a:font script="Viet" typeface="Times New Roman"/>
+        <a:font script="Uigh" typeface="Microsoft Uighur"/>
+        <a:font script="Geor" typeface="Sylfaen"/>
+        <a:font script="Armn" typeface="Arial"/>
+        <a:font script="Bugi" typeface="Leelawadee UI"/>
+        <a:font script="Bopo" typeface="Microsoft JhengHei"/>
+        <a:font script="Java" typeface="Javanese Text"/>
+        <a:font script="Lisu" typeface="Segoe UI"/>
+        <a:font script="Mymr" typeface="Myanmar Text"/>
+        <a:font script="Nkoo" typeface="Ebrima"/>
+        <a:font script="Olck" typeface="Nirmala UI"/>
+        <a:font script="Osma" typeface="Ebrima"/>
+        <a:font script="Phag" typeface="Phagspa"/>
+        <a:font script="Syrn" typeface="Estrangelo Edessa"/>
+        <a:font script="Syrj" typeface="Estrangelo Edessa"/>
+        <a:font script="Syre" typeface="Estrangelo Edessa"/>
+        <a:font script="Sora" typeface="Nirmala UI"/>
+        <a:font script="Tale" typeface="Microsoft Tai Le"/>
+        <a:font script="Talu" typeface="Microsoft New Tai Lue"/>
+        <a:font script="Tfng" typeface="Ebrima"/>
+      </a:majorFont>
+      <a:minorFont>
+        <a:latin typeface="Aptos" panose="02110004020202020204"/>
+        <a:ea typeface=""/>
+        <a:cs typeface=""/>
+        <a:font script="Jpan" typeface="游ゴシック"/>
+        <a:font script="Hang" typeface="맑은 고딕"/>
+        <a:font script="Hans" typeface="等线"/>
+        <a:font script="Hant" typeface="新細明體"/>
+        <a:font script="Arab" typeface="Arial"/>
+        <a:font script="Hebr" typeface="Arial"/>
+        <a:font script="Thai" typeface="Cordia New"/>
+        <a:font script="Ethi" typeface="Nyala"/>
+        <a:font script="Beng" typeface="Vrinda"/>
+        <a:font script="Gujr" typeface="Shruti"/>
+        <a:font script="Khmr" typeface="DaunPenh"/>
+        <a:font script="Knda" typeface="Tunga"/>
+        <a:font script="Guru" typeface="Raavi"/>
+        <a:font script="Cans" typeface="Euphemia"/>
+        <a:font script="Cher" typeface="Plantagenet Cherokee"/>
+        <a:font script="Yiii" typeface="Microsoft Yi Baiti"/>
+        <a:font script="Tibt" typeface="Microsoft Himalaya"/>
+        <a:font script="Thaa" typeface="MV Boli"/>
+        <a:font script="Deva" typeface="Mangal"/>
+        <a:font script="Telu" typeface="Gautami"/>
+        <a:font script="Taml" typeface="Latha"/>
+        <a:font script="Syrc" typeface="Estrangelo Edessa"/>
+        <a:font script="Orya" typeface="Kalinga"/>
+        <a:font script="Mlym" typeface="Kartika"/>
+        <a:font script="Laoo" typeface="DokChampa"/>
+        <a:font script="Sinh" typeface="Iskoola Pota"/>
+        <a:font script="Mong" typeface="Mongolian Baiti"/>
+        <a:font script="Viet" typeface="Arial"/>
+        <a:font script="Uigh" typeface="Microsoft Uighur"/>
+        <a:font script="Geor" typeface="Sylfaen"/>
+        <a:font script="Armn" typeface="Arial"/>
+        <a:font script="Bugi" typeface="Leelawadee UI"/>
+        <a:font script="Bopo" typeface="Microsoft JhengHei"/>
+        <a:font script="Java" typeface="Javanese Text"/>
+        <a:font script="Lisu" typeface="Segoe UI"/>
+        <a:font script="Mymr" typeface="Myanmar Text"/>
+        <a:font script="Nkoo" typeface="Ebrima"/>
+        <a:font script="Olck" typeface="Nirmala UI"/>
+        <a:font script="Osma" typeface="Ebrima"/>
+        <a:font script="Phag" typeface="Phagspa"/>
+        <a:font script="Syrn" typeface="Estrangelo Edessa"/>
+        <a:font script="Syrj" typeface="Estrangelo Edessa"/>
+        <a:font script="Syre" typeface="Estrangelo Edessa"/>
+        <a:font script="Sora" typeface="Nirmala UI"/>
+        <a:font script="Tale" typeface="Microsoft Tai Le"/>
+        <a:font script="Talu" typeface="Microsoft New Tai Lue"/>
+        <a:font script="Tfng" typeface="Ebrima"/>
+      </a:minorFont>
+    </a:fontScheme>
+    <a:fmtScheme name="Office">
+      <a:fillStyleLst>
+        <a:solidFill>
+          <a:schemeClr val="phClr"/>
+        </a:solidFill>
+        <a:gradFill rotWithShape="1">
+          <a:gsLst>
+            <a:gs pos="0">
+              <a:schemeClr val="phClr">
+                <a:lumMod val="110000"/>
+                <a:satMod val="105000"/>
+                <a:tint val="67000"/>
+              </a:schemeClr>
+            </a:gs>
+            <a:gs pos="50000">
+              <a:schemeClr val="phClr">
+                <a:lumMod val="105000"/>
+                <a:satMod val="103000"/>
+                <a:tint val="73000"/>
+              </a:schemeClr>
+            </a:gs>
+            <a:gs pos="100000">
+              <a:schemeClr val="phClr">
+                <a:lumMod val="105000"/>
+                <a:satMod val="109000"/>
+                <a:tint val="81000"/>
+              </a:schemeClr>
+            </a:gs>
+          </a:gsLst>
+          <a:lin ang="5400000" scaled="0"/>
+        </a:gradFill>
+        <a:gradFill rotWithShape="1">
+          <a:gsLst>
+            <a:gs pos="0">
+              <a:schemeClr val="phClr">
+                <a:satMod val="103000"/>
+                <a:lumMod val="102000"/>
+                <a:tint val="94000"/>
+              </a:schemeClr>
+            </a:gs>
+            <a:gs pos="50000">
+              <a:schemeClr val="phClr">
+                <a:satMod val="110000"/>
+                <a:lumMod val="100000"/>
+                <a:shade val="100000"/>
+              </a:schemeClr>
+            </a:gs>
+            <a:gs pos="100000">
+              <a:schemeClr val="phClr">
+                <a:lumMod val="99000"/>
+                <a:satMod val="120000"/>
+                <a:shade val="78000"/>
+              </a:schemeClr>
+            </a:gs>
+          </a:gsLst>
+          <a:lin ang="5400000" scaled="0"/>
+        </a:gradFill>
+      </a:fillStyleLst>
+      <a:lnStyleLst>
+        <a:ln w="12700" cap="flat" cmpd="sng" algn="ctr">
+          <a:solidFill>
+            <a:schemeClr val="phClr"/>
+          </a:solidFill>
+          <a:prstDash val="solid"/>
+          <a:miter lim="800000"/>
+        </a:ln>
+        <a:ln w="19050" cap="flat" cmpd="sng" algn="ctr">
+          <a:solidFill>
+            <a:schemeClr val="phClr"/>
+          </a:solidFill>
+          <a:prstDash val="solid"/>
+          <a:miter lim="800000"/>
+        </a:ln>
+        <a:ln w="25400" cap="flat" cmpd="sng" algn="ctr">
+          <a:solidFill>
+            <a:schemeClr val="phClr"/>
+          </a:solidFill>
+          <a:prstDash val="solid"/>
+          <a:miter lim="800000"/>
+        </a:ln>
+      </a:lnStyleLst>
+      <a:effectStyleLst>
+        <a:effectStyle>
+          <a:effectLst/>
+        </a:effectStyle>
+        <a:effectStyle>
+          <a:effectLst/>
+        </a:effectStyle>
+        <a:effectStyle>
+          <a:effectLst>
+            <a:outerShdw blurRad="57150" dist="19050" dir="5400000" algn="ctr" rotWithShape="0">
+              <a:srgbClr val="000000">
+                <a:alpha val="63000"/>
+              </a:srgbClr>
+            </a:outerShdw>
+          </a:effectLst>
+        </a:effectStyle>
+      </a:effectStyleLst>
+      <a:bgFillStyleLst>
+        <a:solidFill>
+          <a:schemeClr val="phClr"/>
+        </a:solidFill>
+        <a:solidFill>
+          <a:schemeClr val="phClr">
+            <a:tint val="95000"/>
+            <a:satMod val="170000"/>
+          </a:schemeClr>
+        </a:solidFill>
+        <a:gradFill rotWithShape="1">
+          <a:gsLst>
+            <a:gs pos="0">
+              <a:schemeClr val="phClr">
+                <a:tint val="93000"/>
+                <a:satMod val="150000"/>
+                <a:shade val="98000"/>
+                <a:lumMod val="102000"/>
+              </a:schemeClr>
+            </a:gs>
+            <a:gs pos="50000">
+              <a:schemeClr val="phClr">
+                <a:tint val="98000"/>
+                <a:satMod val="130000"/>
+                <a:shade val="90000"/>
+                <a:lumMod val="103000"/>
+              </a:schemeClr>
+            </a:gs>
+            <a:gs pos="100000">
+              <a:schemeClr val="phClr">
+                <a:shade val="63000"/>
+                <a:satMod val="120000"/>
+              </a:schemeClr>
+            </a:gs>
+          </a:gsLst>
+          <a:lin ang="5400000" scaled="0"/>
+        </a:gradFill>
+      </a:bgFillStyleLst>
+    </a:fmtScheme>
+  </a:themeElements>
+  <a:objectDefaults>
+    <a:lnDef>
+      <a:spPr/>
+      <a:bodyPr/>
+      <a:lstStyle/>
+      <a:style>
+        <a:lnRef idx="2">
+          <a:schemeClr val="accent1"/>
+        </a:lnRef>
+        <a:fillRef idx="0">
+          <a:schemeClr val="accent1"/>
+        </a:fillRef>
+        <a:effectRef idx="1">
+          <a:schemeClr val="accent1"/>
+        </a:effectRef>
+        <a:fontRef idx="minor">
+          <a:schemeClr val="tx1"/>
+        </a:fontRef>
+      </a:style>
+    </a:lnDef>
+  </a:objectDefaults>
+  <a:extraClrSchemeLst/>
+  <a:extLst>
+    <a:ext uri="{05A4C25C-085E-4340-85A3-A5531E510DB2}">
+      <thm15:themeFamily xmlns:thm15="http://schemas.microsoft.com/office/thememl/2012/main" name="Office Theme" id="{2E142A2C-CD16-42D6-873A-C26D2A0506FA}" vid="{1BDDFF52-6CD6-40A5-AB3C-68EB2F1E4D0A}"/>
+    </a:ext>
+  </a:extLst>
+</a:theme>
 </file>